--- a/0035. MUVERA/画图.pptx
+++ b/0035. MUVERA/画图.pptx
@@ -5,7 +5,7 @@
     <p:sldMasterId id="2147483648" r:id="rId1"/>
   </p:sldMasterIdLst>
   <p:notesMasterIdLst>
-    <p:notesMasterId r:id="rId9"/>
+    <p:notesMasterId r:id="rId10"/>
   </p:notesMasterIdLst>
   <p:sldIdLst>
     <p:sldId id="259" r:id="rId2"/>
@@ -15,6 +15,7 @@
     <p:sldId id="257" r:id="rId6"/>
     <p:sldId id="258" r:id="rId7"/>
     <p:sldId id="256" r:id="rId8"/>
+    <p:sldId id="263" r:id="rId9"/>
   </p:sldIdLst>
   <p:sldSz cx="12192000" cy="6858000"/>
   <p:notesSz cx="6858000" cy="9144000"/>
@@ -203,7 +204,7 @@
           <a:p>
             <a:fld id="{A590292E-7FEB-460C-93FB-1A08689DA3F3}" type="datetimeFigureOut">
               <a:rPr lang="zh-CN" altLang="en-US" smtClean="0"/>
-              <a:t>2025/3/4</a:t>
+              <a:t>2025/5/23</a:t>
             </a:fld>
             <a:endParaRPr lang="zh-CN" altLang="en-US"/>
           </a:p>
@@ -890,6 +891,90 @@
 </p:notes>
 </file>
 
+<file path=ppt/notesSlides/notesSlide6.xml><?xml version="1.0" encoding="utf-8"?>
+<p:notes xmlns:a="http://schemas.openxmlformats.org/drawingml/2006/main" xmlns:r="http://schemas.openxmlformats.org/officeDocument/2006/relationships" xmlns:p="http://schemas.openxmlformats.org/presentationml/2006/main">
+  <p:cSld>
+    <p:spTree>
+      <p:nvGrpSpPr>
+        <p:cNvPr id="1" name=""/>
+        <p:cNvGrpSpPr/>
+        <p:nvPr/>
+      </p:nvGrpSpPr>
+      <p:grpSpPr>
+        <a:xfrm>
+          <a:off x="0" y="0"/>
+          <a:ext cx="0" cy="0"/>
+          <a:chOff x="0" y="0"/>
+          <a:chExt cx="0" cy="0"/>
+        </a:xfrm>
+      </p:grpSpPr>
+      <p:sp>
+        <p:nvSpPr>
+          <p:cNvPr id="2" name="幻灯片图像占位符 1"/>
+          <p:cNvSpPr>
+            <a:spLocks noGrp="1" noRot="1" noChangeAspect="1"/>
+          </p:cNvSpPr>
+          <p:nvPr>
+            <p:ph type="sldImg"/>
+          </p:nvPr>
+        </p:nvSpPr>
+        <p:spPr/>
+      </p:sp>
+      <p:sp>
+        <p:nvSpPr>
+          <p:cNvPr id="3" name="备注占位符 2"/>
+          <p:cNvSpPr>
+            <a:spLocks noGrp="1"/>
+          </p:cNvSpPr>
+          <p:nvPr>
+            <p:ph type="body" idx="1"/>
+          </p:nvPr>
+        </p:nvSpPr>
+        <p:spPr/>
+        <p:txBody>
+          <a:bodyPr/>
+          <a:lstStyle/>
+          <a:p>
+            <a:endParaRPr lang="zh-CN" altLang="en-US" dirty="0"/>
+          </a:p>
+        </p:txBody>
+      </p:sp>
+      <p:sp>
+        <p:nvSpPr>
+          <p:cNvPr id="4" name="灯片编号占位符 3"/>
+          <p:cNvSpPr>
+            <a:spLocks noGrp="1"/>
+          </p:cNvSpPr>
+          <p:nvPr>
+            <p:ph type="sldNum" sz="quarter" idx="5"/>
+          </p:nvPr>
+        </p:nvSpPr>
+        <p:spPr/>
+        <p:txBody>
+          <a:bodyPr/>
+          <a:lstStyle/>
+          <a:p>
+            <a:fld id="{7A4557C9-110E-44C3-B31A-B615B0555FC4}" type="slidenum">
+              <a:rPr lang="zh-CN" altLang="en-US" smtClean="0"/>
+              <a:t>8</a:t>
+            </a:fld>
+            <a:endParaRPr lang="zh-CN" altLang="en-US"/>
+          </a:p>
+        </p:txBody>
+      </p:sp>
+    </p:spTree>
+    <p:extLst>
+      <p:ext uri="{BB962C8B-B14F-4D97-AF65-F5344CB8AC3E}">
+        <p14:creationId xmlns:p14="http://schemas.microsoft.com/office/powerpoint/2010/main" val="2696106178"/>
+      </p:ext>
+    </p:extLst>
+  </p:cSld>
+  <p:clrMapOvr>
+    <a:masterClrMapping/>
+  </p:clrMapOvr>
+</p:notes>
+</file>
+
 <file path=ppt/slideLayouts/slideLayout1.xml><?xml version="1.0" encoding="utf-8"?>
 <p:sldLayout xmlns:a="http://schemas.openxmlformats.org/drawingml/2006/main" xmlns:r="http://schemas.openxmlformats.org/officeDocument/2006/relationships" xmlns:p="http://schemas.openxmlformats.org/presentationml/2006/main" type="title" preserve="1">
   <p:cSld name="标题幻灯片">
@@ -1037,7 +1122,7 @@
           <a:p>
             <a:fld id="{4FE4FA13-15B7-4E50-B9F8-C0E2627139AE}" type="datetimeFigureOut">
               <a:rPr lang="zh-CN" altLang="en-US" smtClean="0"/>
-              <a:t>2025/3/4</a:t>
+              <a:t>2025/5/23</a:t>
             </a:fld>
             <a:endParaRPr lang="zh-CN" altLang="en-US"/>
           </a:p>
@@ -1235,7 +1320,7 @@
           <a:p>
             <a:fld id="{4FE4FA13-15B7-4E50-B9F8-C0E2627139AE}" type="datetimeFigureOut">
               <a:rPr lang="zh-CN" altLang="en-US" smtClean="0"/>
-              <a:t>2025/3/4</a:t>
+              <a:t>2025/5/23</a:t>
             </a:fld>
             <a:endParaRPr lang="zh-CN" altLang="en-US"/>
           </a:p>
@@ -1443,7 +1528,7 @@
           <a:p>
             <a:fld id="{4FE4FA13-15B7-4E50-B9F8-C0E2627139AE}" type="datetimeFigureOut">
               <a:rPr lang="zh-CN" altLang="en-US" smtClean="0"/>
-              <a:t>2025/3/4</a:t>
+              <a:t>2025/5/23</a:t>
             </a:fld>
             <a:endParaRPr lang="zh-CN" altLang="en-US"/>
           </a:p>
@@ -1641,7 +1726,7 @@
           <a:p>
             <a:fld id="{4FE4FA13-15B7-4E50-B9F8-C0E2627139AE}" type="datetimeFigureOut">
               <a:rPr lang="zh-CN" altLang="en-US" smtClean="0"/>
-              <a:t>2025/3/4</a:t>
+              <a:t>2025/5/23</a:t>
             </a:fld>
             <a:endParaRPr lang="zh-CN" altLang="en-US"/>
           </a:p>
@@ -1916,7 +2001,7 @@
           <a:p>
             <a:fld id="{4FE4FA13-15B7-4E50-B9F8-C0E2627139AE}" type="datetimeFigureOut">
               <a:rPr lang="zh-CN" altLang="en-US" smtClean="0"/>
-              <a:t>2025/3/4</a:t>
+              <a:t>2025/5/23</a:t>
             </a:fld>
             <a:endParaRPr lang="zh-CN" altLang="en-US"/>
           </a:p>
@@ -2181,7 +2266,7 @@
           <a:p>
             <a:fld id="{4FE4FA13-15B7-4E50-B9F8-C0E2627139AE}" type="datetimeFigureOut">
               <a:rPr lang="zh-CN" altLang="en-US" smtClean="0"/>
-              <a:t>2025/3/4</a:t>
+              <a:t>2025/5/23</a:t>
             </a:fld>
             <a:endParaRPr lang="zh-CN" altLang="en-US"/>
           </a:p>
@@ -2593,7 +2678,7 @@
           <a:p>
             <a:fld id="{4FE4FA13-15B7-4E50-B9F8-C0E2627139AE}" type="datetimeFigureOut">
               <a:rPr lang="zh-CN" altLang="en-US" smtClean="0"/>
-              <a:t>2025/3/4</a:t>
+              <a:t>2025/5/23</a:t>
             </a:fld>
             <a:endParaRPr lang="zh-CN" altLang="en-US"/>
           </a:p>
@@ -2734,7 +2819,7 @@
           <a:p>
             <a:fld id="{4FE4FA13-15B7-4E50-B9F8-C0E2627139AE}" type="datetimeFigureOut">
               <a:rPr lang="zh-CN" altLang="en-US" smtClean="0"/>
-              <a:t>2025/3/4</a:t>
+              <a:t>2025/5/23</a:t>
             </a:fld>
             <a:endParaRPr lang="zh-CN" altLang="en-US"/>
           </a:p>
@@ -2847,7 +2932,7 @@
           <a:p>
             <a:fld id="{4FE4FA13-15B7-4E50-B9F8-C0E2627139AE}" type="datetimeFigureOut">
               <a:rPr lang="zh-CN" altLang="en-US" smtClean="0"/>
-              <a:t>2025/3/4</a:t>
+              <a:t>2025/5/23</a:t>
             </a:fld>
             <a:endParaRPr lang="zh-CN" altLang="en-US"/>
           </a:p>
@@ -3158,7 +3243,7 @@
           <a:p>
             <a:fld id="{4FE4FA13-15B7-4E50-B9F8-C0E2627139AE}" type="datetimeFigureOut">
               <a:rPr lang="zh-CN" altLang="en-US" smtClean="0"/>
-              <a:t>2025/3/4</a:t>
+              <a:t>2025/5/23</a:t>
             </a:fld>
             <a:endParaRPr lang="zh-CN" altLang="en-US"/>
           </a:p>
@@ -3446,7 +3531,7 @@
           <a:p>
             <a:fld id="{4FE4FA13-15B7-4E50-B9F8-C0E2627139AE}" type="datetimeFigureOut">
               <a:rPr lang="zh-CN" altLang="en-US" smtClean="0"/>
-              <a:t>2025/3/4</a:t>
+              <a:t>2025/5/23</a:t>
             </a:fld>
             <a:endParaRPr lang="zh-CN" altLang="en-US"/>
           </a:p>
@@ -3687,7 +3772,7 @@
           <a:p>
             <a:fld id="{4FE4FA13-15B7-4E50-B9F8-C0E2627139AE}" type="datetimeFigureOut">
               <a:rPr lang="zh-CN" altLang="en-US" smtClean="0"/>
-              <a:t>2025/3/4</a:t>
+              <a:t>2025/5/23</a:t>
             </a:fld>
             <a:endParaRPr lang="zh-CN" altLang="en-US"/>
           </a:p>
@@ -4942,7 +5027,7 @@
           <a:graphicData uri="http://schemas.openxmlformats.org/presentationml/2006/ole">
             <mc:AlternateContent xmlns:mc="http://schemas.openxmlformats.org/markup-compatibility/2006">
               <mc:Choice xmlns:v="urn:schemas-microsoft-com:vml" Requires="v">
-                <p:oleObj spid="_x0000_s4470" name="Equation" r:id="rId4" imgW="139680" imgH="177480" progId="Equation.DSMT4">
+                <p:oleObj spid="_x0000_s4610" name="Equation" r:id="rId4" imgW="139680" imgH="177480" progId="Equation.DSMT4">
                   <p:embed/>
                 </p:oleObj>
               </mc:Choice>
@@ -5005,7 +5090,7 @@
           <a:graphicData uri="http://schemas.openxmlformats.org/presentationml/2006/ole">
             <mc:AlternateContent xmlns:mc="http://schemas.openxmlformats.org/markup-compatibility/2006">
               <mc:Choice xmlns:v="urn:schemas-microsoft-com:vml" Requires="v">
-                <p:oleObj spid="_x0000_s4471" name="Equation" r:id="rId6" imgW="266400" imgH="241200" progId="Equation.DSMT4">
+                <p:oleObj spid="_x0000_s4611" name="Equation" r:id="rId6" imgW="266400" imgH="241200" progId="Equation.DSMT4">
                   <p:embed/>
                 </p:oleObj>
               </mc:Choice>
@@ -5338,7 +5423,7 @@
           <a:graphicData uri="http://schemas.openxmlformats.org/presentationml/2006/ole">
             <mc:AlternateContent xmlns:mc="http://schemas.openxmlformats.org/markup-compatibility/2006">
               <mc:Choice xmlns:v="urn:schemas-microsoft-com:vml" Requires="v">
-                <p:oleObj spid="_x0000_s4472" name="Equation" r:id="rId8" imgW="126720" imgH="177480" progId="Equation.DSMT4">
+                <p:oleObj spid="_x0000_s4612" name="Equation" r:id="rId8" imgW="126720" imgH="177480" progId="Equation.DSMT4">
                   <p:embed/>
                 </p:oleObj>
               </mc:Choice>
@@ -5401,7 +5486,7 @@
           <a:graphicData uri="http://schemas.openxmlformats.org/presentationml/2006/ole">
             <mc:AlternateContent xmlns:mc="http://schemas.openxmlformats.org/markup-compatibility/2006">
               <mc:Choice xmlns:v="urn:schemas-microsoft-com:vml" Requires="v">
-                <p:oleObj spid="_x0000_s4473" name="Equation" r:id="rId10" imgW="177480" imgH="228600" progId="Equation.DSMT4">
+                <p:oleObj spid="_x0000_s4613" name="Equation" r:id="rId10" imgW="177480" imgH="228600" progId="Equation.DSMT4">
                   <p:embed/>
                 </p:oleObj>
               </mc:Choice>
@@ -5464,7 +5549,7 @@
           <a:graphicData uri="http://schemas.openxmlformats.org/presentationml/2006/ole">
             <mc:AlternateContent xmlns:mc="http://schemas.openxmlformats.org/markup-compatibility/2006">
               <mc:Choice xmlns:v="urn:schemas-microsoft-com:vml" Requires="v">
-                <p:oleObj spid="_x0000_s4474" name="Equation" r:id="rId12" imgW="190440" imgH="228600" progId="Equation.DSMT4">
+                <p:oleObj spid="_x0000_s4614" name="Equation" r:id="rId12" imgW="190440" imgH="228600" progId="Equation.DSMT4">
                   <p:embed/>
                 </p:oleObj>
               </mc:Choice>
@@ -5527,7 +5612,7 @@
           <a:graphicData uri="http://schemas.openxmlformats.org/presentationml/2006/ole">
             <mc:AlternateContent xmlns:mc="http://schemas.openxmlformats.org/markup-compatibility/2006">
               <mc:Choice xmlns:v="urn:schemas-microsoft-com:vml" Requires="v">
-                <p:oleObj spid="_x0000_s4475" name="Equation" r:id="rId14" imgW="190440" imgH="228600" progId="Equation.DSMT4">
+                <p:oleObj spid="_x0000_s4615" name="Equation" r:id="rId14" imgW="190440" imgH="228600" progId="Equation.DSMT4">
                   <p:embed/>
                 </p:oleObj>
               </mc:Choice>
@@ -5590,7 +5675,7 @@
           <a:graphicData uri="http://schemas.openxmlformats.org/presentationml/2006/ole">
             <mc:AlternateContent xmlns:mc="http://schemas.openxmlformats.org/markup-compatibility/2006">
               <mc:Choice xmlns:v="urn:schemas-microsoft-com:vml" Requires="v">
-                <p:oleObj spid="_x0000_s4476" name="Equation" r:id="rId16" imgW="190440" imgH="228600" progId="Equation.DSMT4">
+                <p:oleObj spid="_x0000_s4616" name="Equation" r:id="rId16" imgW="190440" imgH="228600" progId="Equation.DSMT4">
                   <p:embed/>
                 </p:oleObj>
               </mc:Choice>
@@ -5653,7 +5738,7 @@
           <a:graphicData uri="http://schemas.openxmlformats.org/presentationml/2006/ole">
             <mc:AlternateContent xmlns:mc="http://schemas.openxmlformats.org/markup-compatibility/2006">
               <mc:Choice xmlns:v="urn:schemas-microsoft-com:vml" Requires="v">
-                <p:oleObj spid="_x0000_s4477" name="Equation" r:id="rId18" imgW="190440" imgH="228600" progId="Equation.DSMT4">
+                <p:oleObj spid="_x0000_s4617" name="Equation" r:id="rId18" imgW="190440" imgH="228600" progId="Equation.DSMT4">
                   <p:embed/>
                 </p:oleObj>
               </mc:Choice>
@@ -5716,7 +5801,7 @@
           <a:graphicData uri="http://schemas.openxmlformats.org/presentationml/2006/ole">
             <mc:AlternateContent xmlns:mc="http://schemas.openxmlformats.org/markup-compatibility/2006">
               <mc:Choice xmlns:v="urn:schemas-microsoft-com:vml" Requires="v">
-                <p:oleObj spid="_x0000_s4478" name="Equation" r:id="rId20" imgW="190440" imgH="228600" progId="Equation.DSMT4">
+                <p:oleObj spid="_x0000_s4618" name="Equation" r:id="rId20" imgW="190440" imgH="228600" progId="Equation.DSMT4">
                   <p:embed/>
                 </p:oleObj>
               </mc:Choice>
@@ -5785,7 +5870,7 @@
           <a:graphicData uri="http://schemas.openxmlformats.org/presentationml/2006/ole">
             <mc:AlternateContent xmlns:mc="http://schemas.openxmlformats.org/markup-compatibility/2006">
               <mc:Choice xmlns:v="urn:schemas-microsoft-com:vml" Requires="v">
-                <p:oleObj spid="_x0000_s4479" name="Equation" r:id="rId22" imgW="203040" imgH="228600" progId="Equation.DSMT4">
+                <p:oleObj spid="_x0000_s4619" name="Equation" r:id="rId22" imgW="203040" imgH="228600" progId="Equation.DSMT4">
                   <p:embed/>
                 </p:oleObj>
               </mc:Choice>
@@ -5854,7 +5939,7 @@
           <a:graphicData uri="http://schemas.openxmlformats.org/presentationml/2006/ole">
             <mc:AlternateContent xmlns:mc="http://schemas.openxmlformats.org/markup-compatibility/2006">
               <mc:Choice xmlns:v="urn:schemas-microsoft-com:vml" Requires="v">
-                <p:oleObj spid="_x0000_s4480" name="Equation" r:id="rId24" imgW="203040" imgH="228600" progId="Equation.DSMT4">
+                <p:oleObj spid="_x0000_s4620" name="Equation" r:id="rId24" imgW="203040" imgH="228600" progId="Equation.DSMT4">
                   <p:embed/>
                 </p:oleObj>
               </mc:Choice>
@@ -5923,7 +6008,7 @@
           <a:graphicData uri="http://schemas.openxmlformats.org/presentationml/2006/ole">
             <mc:AlternateContent xmlns:mc="http://schemas.openxmlformats.org/markup-compatibility/2006">
               <mc:Choice xmlns:v="urn:schemas-microsoft-com:vml" Requires="v">
-                <p:oleObj spid="_x0000_s4481" name="Equation" r:id="rId26" imgW="203040" imgH="228600" progId="Equation.DSMT4">
+                <p:oleObj spid="_x0000_s4621" name="Equation" r:id="rId26" imgW="203040" imgH="228600" progId="Equation.DSMT4">
                   <p:embed/>
                 </p:oleObj>
               </mc:Choice>
@@ -5992,7 +6077,7 @@
           <a:graphicData uri="http://schemas.openxmlformats.org/presentationml/2006/ole">
             <mc:AlternateContent xmlns:mc="http://schemas.openxmlformats.org/markup-compatibility/2006">
               <mc:Choice xmlns:v="urn:schemas-microsoft-com:vml" Requires="v">
-                <p:oleObj spid="_x0000_s4482" name="Equation" r:id="rId28" imgW="203040" imgH="228600" progId="Equation.DSMT4">
+                <p:oleObj spid="_x0000_s4622" name="Equation" r:id="rId28" imgW="203040" imgH="228600" progId="Equation.DSMT4">
                   <p:embed/>
                 </p:oleObj>
               </mc:Choice>
@@ -6061,7 +6146,7 @@
           <a:graphicData uri="http://schemas.openxmlformats.org/presentationml/2006/ole">
             <mc:AlternateContent xmlns:mc="http://schemas.openxmlformats.org/markup-compatibility/2006">
               <mc:Choice xmlns:v="urn:schemas-microsoft-com:vml" Requires="v">
-                <p:oleObj spid="_x0000_s4483" name="Equation" r:id="rId30" imgW="190440" imgH="228600" progId="Equation.DSMT4">
+                <p:oleObj spid="_x0000_s4623" name="Equation" r:id="rId30" imgW="190440" imgH="228600" progId="Equation.DSMT4">
                   <p:embed/>
                 </p:oleObj>
               </mc:Choice>
@@ -6130,7 +6215,7 @@
           <a:graphicData uri="http://schemas.openxmlformats.org/presentationml/2006/ole">
             <mc:AlternateContent xmlns:mc="http://schemas.openxmlformats.org/markup-compatibility/2006">
               <mc:Choice xmlns:v="urn:schemas-microsoft-com:vml" Requires="v">
-                <p:oleObj spid="_x0000_s4484" name="Equation" r:id="rId32" imgW="203040" imgH="228600" progId="Equation.DSMT4">
+                <p:oleObj spid="_x0000_s4624" name="Equation" r:id="rId32" imgW="203040" imgH="228600" progId="Equation.DSMT4">
                   <p:embed/>
                 </p:oleObj>
               </mc:Choice>
@@ -6199,7 +6284,7 @@
           <a:graphicData uri="http://schemas.openxmlformats.org/presentationml/2006/ole">
             <mc:AlternateContent xmlns:mc="http://schemas.openxmlformats.org/markup-compatibility/2006">
               <mc:Choice xmlns:v="urn:schemas-microsoft-com:vml" Requires="v">
-                <p:oleObj spid="_x0000_s4485" name="Equation" r:id="rId34" imgW="190440" imgH="228600" progId="Equation.DSMT4">
+                <p:oleObj spid="_x0000_s4625" name="Equation" r:id="rId34" imgW="190440" imgH="228600" progId="Equation.DSMT4">
                   <p:embed/>
                 </p:oleObj>
               </mc:Choice>
@@ -6268,7 +6353,7 @@
           <a:graphicData uri="http://schemas.openxmlformats.org/presentationml/2006/ole">
             <mc:AlternateContent xmlns:mc="http://schemas.openxmlformats.org/markup-compatibility/2006">
               <mc:Choice xmlns:v="urn:schemas-microsoft-com:vml" Requires="v">
-                <p:oleObj spid="_x0000_s4486" name="Equation" r:id="rId36" imgW="203040" imgH="228600" progId="Equation.DSMT4">
+                <p:oleObj spid="_x0000_s4626" name="Equation" r:id="rId36" imgW="203040" imgH="228600" progId="Equation.DSMT4">
                   <p:embed/>
                 </p:oleObj>
               </mc:Choice>
@@ -6337,7 +6422,7 @@
           <a:graphicData uri="http://schemas.openxmlformats.org/presentationml/2006/ole">
             <mc:AlternateContent xmlns:mc="http://schemas.openxmlformats.org/markup-compatibility/2006">
               <mc:Choice xmlns:v="urn:schemas-microsoft-com:vml" Requires="v">
-                <p:oleObj spid="_x0000_s4487" name="Equation" r:id="rId38" imgW="190440" imgH="228600" progId="Equation.DSMT4">
+                <p:oleObj spid="_x0000_s4627" name="Equation" r:id="rId38" imgW="190440" imgH="228600" progId="Equation.DSMT4">
                   <p:embed/>
                 </p:oleObj>
               </mc:Choice>
@@ -6406,7 +6491,7 @@
           <a:graphicData uri="http://schemas.openxmlformats.org/presentationml/2006/ole">
             <mc:AlternateContent xmlns:mc="http://schemas.openxmlformats.org/markup-compatibility/2006">
               <mc:Choice xmlns:v="urn:schemas-microsoft-com:vml" Requires="v">
-                <p:oleObj spid="_x0000_s4488" name="Equation" r:id="rId40" imgW="126720" imgH="139680" progId="Equation.DSMT4">
+                <p:oleObj spid="_x0000_s4628" name="Equation" r:id="rId40" imgW="126720" imgH="139680" progId="Equation.DSMT4">
                   <p:embed/>
                 </p:oleObj>
               </mc:Choice>
@@ -6469,7 +6554,7 @@
           <a:graphicData uri="http://schemas.openxmlformats.org/presentationml/2006/ole">
             <mc:AlternateContent xmlns:mc="http://schemas.openxmlformats.org/markup-compatibility/2006">
               <mc:Choice xmlns:v="urn:schemas-microsoft-com:vml" Requires="v">
-                <p:oleObj spid="_x0000_s4489" name="Equation" r:id="rId42" imgW="152280" imgH="228600" progId="Equation.DSMT4">
+                <p:oleObj spid="_x0000_s4629" name="Equation" r:id="rId42" imgW="152280" imgH="228600" progId="Equation.DSMT4">
                   <p:embed/>
                 </p:oleObj>
               </mc:Choice>
@@ -6532,7 +6617,7 @@
           <a:graphicData uri="http://schemas.openxmlformats.org/presentationml/2006/ole">
             <mc:AlternateContent xmlns:mc="http://schemas.openxmlformats.org/markup-compatibility/2006">
               <mc:Choice xmlns:v="urn:schemas-microsoft-com:vml" Requires="v">
-                <p:oleObj spid="_x0000_s4490" name="Equation" r:id="rId44" imgW="164880" imgH="228600" progId="Equation.DSMT4">
+                <p:oleObj spid="_x0000_s4630" name="Equation" r:id="rId44" imgW="164880" imgH="228600" progId="Equation.DSMT4">
                   <p:embed/>
                 </p:oleObj>
               </mc:Choice>
@@ -6595,7 +6680,7 @@
           <a:graphicData uri="http://schemas.openxmlformats.org/presentationml/2006/ole">
             <mc:AlternateContent xmlns:mc="http://schemas.openxmlformats.org/markup-compatibility/2006">
               <mc:Choice xmlns:v="urn:schemas-microsoft-com:vml" Requires="v">
-                <p:oleObj spid="_x0000_s4491" name="Equation" r:id="rId46" imgW="164880" imgH="228600" progId="Equation.DSMT4">
+                <p:oleObj spid="_x0000_s4631" name="Equation" r:id="rId46" imgW="164880" imgH="228600" progId="Equation.DSMT4">
                   <p:embed/>
                 </p:oleObj>
               </mc:Choice>
@@ -6658,7 +6743,7 @@
           <a:graphicData uri="http://schemas.openxmlformats.org/presentationml/2006/ole">
             <mc:AlternateContent xmlns:mc="http://schemas.openxmlformats.org/markup-compatibility/2006">
               <mc:Choice xmlns:v="urn:schemas-microsoft-com:vml" Requires="v">
-                <p:oleObj spid="_x0000_s4492" name="Equation" r:id="rId48" imgW="164880" imgH="228600" progId="Equation.DSMT4">
+                <p:oleObj spid="_x0000_s4632" name="Equation" r:id="rId48" imgW="164880" imgH="228600" progId="Equation.DSMT4">
                   <p:embed/>
                 </p:oleObj>
               </mc:Choice>
@@ -6727,7 +6812,7 @@
           <a:graphicData uri="http://schemas.openxmlformats.org/presentationml/2006/ole">
             <mc:AlternateContent xmlns:mc="http://schemas.openxmlformats.org/markup-compatibility/2006">
               <mc:Choice xmlns:v="urn:schemas-microsoft-com:vml" Requires="v">
-                <p:oleObj spid="_x0000_s4493" name="Equation" r:id="rId50" imgW="164880" imgH="228600" progId="Equation.DSMT4">
+                <p:oleObj spid="_x0000_s4633" name="Equation" r:id="rId50" imgW="164880" imgH="228600" progId="Equation.DSMT4">
                   <p:embed/>
                 </p:oleObj>
               </mc:Choice>
@@ -6958,7 +7043,7 @@
           <a:graphicData uri="http://schemas.openxmlformats.org/presentationml/2006/ole">
             <mc:AlternateContent xmlns:mc="http://schemas.openxmlformats.org/markup-compatibility/2006">
               <mc:Choice xmlns:v="urn:schemas-microsoft-com:vml" Requires="v">
-                <p:oleObj spid="_x0000_s4494" name="Equation" r:id="rId52" imgW="203040" imgH="228600" progId="Equation.DSMT4">
+                <p:oleObj spid="_x0000_s4634" name="Equation" r:id="rId52" imgW="203040" imgH="228600" progId="Equation.DSMT4">
                   <p:embed/>
                 </p:oleObj>
               </mc:Choice>
@@ -7027,7 +7112,7 @@
           <a:graphicData uri="http://schemas.openxmlformats.org/presentationml/2006/ole">
             <mc:AlternateContent xmlns:mc="http://schemas.openxmlformats.org/markup-compatibility/2006">
               <mc:Choice xmlns:v="urn:schemas-microsoft-com:vml" Requires="v">
-                <p:oleObj spid="_x0000_s4495" name="Equation" r:id="rId54" imgW="215640" imgH="228600" progId="Equation.DSMT4">
+                <p:oleObj spid="_x0000_s4635" name="Equation" r:id="rId54" imgW="215640" imgH="228600" progId="Equation.DSMT4">
                   <p:embed/>
                 </p:oleObj>
               </mc:Choice>
@@ -7096,7 +7181,7 @@
           <a:graphicData uri="http://schemas.openxmlformats.org/presentationml/2006/ole">
             <mc:AlternateContent xmlns:mc="http://schemas.openxmlformats.org/markup-compatibility/2006">
               <mc:Choice xmlns:v="urn:schemas-microsoft-com:vml" Requires="v">
-                <p:oleObj spid="_x0000_s4496" name="Equation" r:id="rId56" imgW="215640" imgH="228600" progId="Equation.DSMT4">
+                <p:oleObj spid="_x0000_s4636" name="Equation" r:id="rId56" imgW="215640" imgH="228600" progId="Equation.DSMT4">
                   <p:embed/>
                 </p:oleObj>
               </mc:Choice>
@@ -7165,7 +7250,7 @@
           <a:graphicData uri="http://schemas.openxmlformats.org/presentationml/2006/ole">
             <mc:AlternateContent xmlns:mc="http://schemas.openxmlformats.org/markup-compatibility/2006">
               <mc:Choice xmlns:v="urn:schemas-microsoft-com:vml" Requires="v">
-                <p:oleObj spid="_x0000_s4497" name="Equation" r:id="rId58" imgW="215640" imgH="177480" progId="Equation.DSMT4">
+                <p:oleObj spid="_x0000_s4637" name="Equation" r:id="rId58" imgW="215640" imgH="177480" progId="Equation.DSMT4">
                   <p:embed/>
                 </p:oleObj>
               </mc:Choice>
@@ -7282,7 +7367,7 @@
           <a:graphicData uri="http://schemas.openxmlformats.org/presentationml/2006/ole">
             <mc:AlternateContent xmlns:mc="http://schemas.openxmlformats.org/markup-compatibility/2006">
               <mc:Choice xmlns:v="urn:schemas-microsoft-com:vml" Requires="v">
-                <p:oleObj spid="_x0000_s4498" name="Equation" r:id="rId60" imgW="596880" imgH="469800" progId="Equation.DSMT4">
+                <p:oleObj spid="_x0000_s4638" name="Equation" r:id="rId60" imgW="596880" imgH="469800" progId="Equation.DSMT4">
                   <p:embed/>
                 </p:oleObj>
               </mc:Choice>
@@ -7351,7 +7436,7 @@
           <a:graphicData uri="http://schemas.openxmlformats.org/presentationml/2006/ole">
             <mc:AlternateContent xmlns:mc="http://schemas.openxmlformats.org/markup-compatibility/2006">
               <mc:Choice xmlns:v="urn:schemas-microsoft-com:vml" Requires="v">
-                <p:oleObj spid="_x0000_s4499" name="Equation" r:id="rId62" imgW="342720" imgH="203040" progId="Equation.DSMT4">
+                <p:oleObj spid="_x0000_s4639" name="Equation" r:id="rId62" imgW="342720" imgH="203040" progId="Equation.DSMT4">
                   <p:embed/>
                 </p:oleObj>
               </mc:Choice>
@@ -7474,7 +7559,7 @@
           <a:graphicData uri="http://schemas.openxmlformats.org/presentationml/2006/ole">
             <mc:AlternateContent xmlns:mc="http://schemas.openxmlformats.org/markup-compatibility/2006">
               <mc:Choice xmlns:v="urn:schemas-microsoft-com:vml" Requires="v">
-                <p:oleObj spid="_x0000_s4500" name="Equation" r:id="rId64" imgW="609480" imgH="469800" progId="Equation.DSMT4">
+                <p:oleObj spid="_x0000_s4640" name="Equation" r:id="rId64" imgW="609480" imgH="469800" progId="Equation.DSMT4">
                   <p:embed/>
                 </p:oleObj>
               </mc:Choice>
@@ -7597,7 +7682,7 @@
           <a:graphicData uri="http://schemas.openxmlformats.org/presentationml/2006/ole">
             <mc:AlternateContent xmlns:mc="http://schemas.openxmlformats.org/markup-compatibility/2006">
               <mc:Choice xmlns:v="urn:schemas-microsoft-com:vml" Requires="v">
-                <p:oleObj spid="_x0000_s4501" name="Equation" r:id="rId66" imgW="609480" imgH="469800" progId="Equation.DSMT4">
+                <p:oleObj spid="_x0000_s4641" name="Equation" r:id="rId66" imgW="609480" imgH="469800" progId="Equation.DSMT4">
                   <p:embed/>
                 </p:oleObj>
               </mc:Choice>
@@ -7666,7 +7751,7 @@
           <a:graphicData uri="http://schemas.openxmlformats.org/presentationml/2006/ole">
             <mc:AlternateContent xmlns:mc="http://schemas.openxmlformats.org/markup-compatibility/2006">
               <mc:Choice xmlns:v="urn:schemas-microsoft-com:vml" Requires="v">
-                <p:oleObj spid="_x0000_s4502" name="Equation" r:id="rId68" imgW="114120" imgH="139680" progId="Equation.DSMT4">
+                <p:oleObj spid="_x0000_s4642" name="Equation" r:id="rId68" imgW="114120" imgH="139680" progId="Equation.DSMT4">
                   <p:embed/>
                 </p:oleObj>
               </mc:Choice>
@@ -7729,7 +7814,7 @@
           <a:graphicData uri="http://schemas.openxmlformats.org/presentationml/2006/ole">
             <mc:AlternateContent xmlns:mc="http://schemas.openxmlformats.org/markup-compatibility/2006">
               <mc:Choice xmlns:v="urn:schemas-microsoft-com:vml" Requires="v">
-                <p:oleObj spid="_x0000_s4503" name="Equation" r:id="rId70" imgW="126720" imgH="114120" progId="Equation.DSMT4">
+                <p:oleObj spid="_x0000_s4643" name="Equation" r:id="rId70" imgW="126720" imgH="114120" progId="Equation.DSMT4">
                   <p:embed/>
                 </p:oleObj>
               </mc:Choice>
@@ -7792,7 +7877,7 @@
           <a:graphicData uri="http://schemas.openxmlformats.org/presentationml/2006/ole">
             <mc:AlternateContent xmlns:mc="http://schemas.openxmlformats.org/markup-compatibility/2006">
               <mc:Choice xmlns:v="urn:schemas-microsoft-com:vml" Requires="v">
-                <p:oleObj spid="_x0000_s4504" name="Equation" r:id="rId72" imgW="177480" imgH="126720" progId="Equation.DSMT4">
+                <p:oleObj spid="_x0000_s4644" name="Equation" r:id="rId72" imgW="177480" imgH="126720" progId="Equation.DSMT4">
                   <p:embed/>
                 </p:oleObj>
               </mc:Choice>
@@ -7987,7 +8072,7 @@
           <a:graphicData uri="http://schemas.openxmlformats.org/presentationml/2006/ole">
             <mc:AlternateContent xmlns:mc="http://schemas.openxmlformats.org/markup-compatibility/2006">
               <mc:Choice xmlns:v="urn:schemas-microsoft-com:vml" Requires="v">
-                <p:oleObj spid="_x0000_s7222" name="Equation" r:id="rId4" imgW="507960" imgH="241200" progId="Equation.DSMT4">
+                <p:oleObj spid="_x0000_s7326" name="Equation" r:id="rId4" imgW="507960" imgH="241200" progId="Equation.DSMT4">
                   <p:embed/>
                 </p:oleObj>
               </mc:Choice>
@@ -8104,7 +8189,7 @@
           <a:graphicData uri="http://schemas.openxmlformats.org/presentationml/2006/ole">
             <mc:AlternateContent xmlns:mc="http://schemas.openxmlformats.org/markup-compatibility/2006">
               <mc:Choice xmlns:v="urn:schemas-microsoft-com:vml" Requires="v">
-                <p:oleObj spid="_x0000_s7223" name="Equation" r:id="rId6" imgW="495000" imgH="241200" progId="Equation.DSMT4">
+                <p:oleObj spid="_x0000_s7327" name="Equation" r:id="rId6" imgW="495000" imgH="241200" progId="Equation.DSMT4">
                   <p:embed/>
                 </p:oleObj>
               </mc:Choice>
@@ -8167,7 +8252,7 @@
           <a:graphicData uri="http://schemas.openxmlformats.org/presentationml/2006/ole">
             <mc:AlternateContent xmlns:mc="http://schemas.openxmlformats.org/markup-compatibility/2006">
               <mc:Choice xmlns:v="urn:schemas-microsoft-com:vml" Requires="v">
-                <p:oleObj spid="_x0000_s7224" name="Equation" r:id="rId8" imgW="228600" imgH="101520" progId="Equation.DSMT4">
+                <p:oleObj spid="_x0000_s7328" name="Equation" r:id="rId8" imgW="228600" imgH="101520" progId="Equation.DSMT4">
                   <p:embed/>
                 </p:oleObj>
               </mc:Choice>
@@ -8230,7 +8315,7 @@
           <a:graphicData uri="http://schemas.openxmlformats.org/presentationml/2006/ole">
             <mc:AlternateContent xmlns:mc="http://schemas.openxmlformats.org/markup-compatibility/2006">
               <mc:Choice xmlns:v="urn:schemas-microsoft-com:vml" Requires="v">
-                <p:oleObj spid="_x0000_s7225" name="Equation" r:id="rId10" imgW="507960" imgH="241200" progId="Equation.DSMT4">
+                <p:oleObj spid="_x0000_s7329" name="Equation" r:id="rId10" imgW="507960" imgH="241200" progId="Equation.DSMT4">
                   <p:embed/>
                 </p:oleObj>
               </mc:Choice>
@@ -8334,7 +8419,7 @@
           <a:graphicData uri="http://schemas.openxmlformats.org/presentationml/2006/ole">
             <mc:AlternateContent xmlns:mc="http://schemas.openxmlformats.org/markup-compatibility/2006">
               <mc:Choice xmlns:v="urn:schemas-microsoft-com:vml" Requires="v">
-                <p:oleObj spid="_x0000_s7226" name="Equation" r:id="rId12" imgW="368280" imgH="228600" progId="Equation.DSMT4">
+                <p:oleObj spid="_x0000_s7330" name="Equation" r:id="rId12" imgW="368280" imgH="228600" progId="Equation.DSMT4">
                   <p:embed/>
                 </p:oleObj>
               </mc:Choice>
@@ -8701,7 +8786,7 @@
           <a:graphicData uri="http://schemas.openxmlformats.org/presentationml/2006/ole">
             <mc:AlternateContent xmlns:mc="http://schemas.openxmlformats.org/markup-compatibility/2006">
               <mc:Choice xmlns:v="urn:schemas-microsoft-com:vml" Requires="v">
-                <p:oleObj spid="_x0000_s7227" name="Equation" r:id="rId14" imgW="507960" imgH="241200" progId="Equation.DSMT4">
+                <p:oleObj spid="_x0000_s7331" name="Equation" r:id="rId14" imgW="507960" imgH="241200" progId="Equation.DSMT4">
                   <p:embed/>
                 </p:oleObj>
               </mc:Choice>
@@ -8861,7 +8946,7 @@
           <a:graphicData uri="http://schemas.openxmlformats.org/presentationml/2006/ole">
             <mc:AlternateContent xmlns:mc="http://schemas.openxmlformats.org/markup-compatibility/2006">
               <mc:Choice xmlns:v="urn:schemas-microsoft-com:vml" Requires="v">
-                <p:oleObj spid="_x0000_s7228" name="Equation" r:id="rId16" imgW="380880" imgH="228600" progId="Equation.DSMT4">
+                <p:oleObj spid="_x0000_s7332" name="Equation" r:id="rId16" imgW="380880" imgH="228600" progId="Equation.DSMT4">
                   <p:embed/>
                 </p:oleObj>
               </mc:Choice>
@@ -8978,7 +9063,7 @@
           <a:graphicData uri="http://schemas.openxmlformats.org/presentationml/2006/ole">
             <mc:AlternateContent xmlns:mc="http://schemas.openxmlformats.org/markup-compatibility/2006">
               <mc:Choice xmlns:v="urn:schemas-microsoft-com:vml" Requires="v">
-                <p:oleObj spid="_x0000_s7229" name="Equation" r:id="rId18" imgW="558720" imgH="253800" progId="Equation.DSMT4">
+                <p:oleObj spid="_x0000_s7333" name="Equation" r:id="rId18" imgW="558720" imgH="253800" progId="Equation.DSMT4">
                   <p:embed/>
                 </p:oleObj>
               </mc:Choice>
@@ -9095,7 +9180,7 @@
           <a:graphicData uri="http://schemas.openxmlformats.org/presentationml/2006/ole">
             <mc:AlternateContent xmlns:mc="http://schemas.openxmlformats.org/markup-compatibility/2006">
               <mc:Choice xmlns:v="urn:schemas-microsoft-com:vml" Requires="v">
-                <p:oleObj spid="_x0000_s7230" name="Equation" r:id="rId20" imgW="571320" imgH="253800" progId="Equation.DSMT4">
+                <p:oleObj spid="_x0000_s7334" name="Equation" r:id="rId20" imgW="571320" imgH="253800" progId="Equation.DSMT4">
                   <p:embed/>
                 </p:oleObj>
               </mc:Choice>
@@ -9158,7 +9243,7 @@
           <a:graphicData uri="http://schemas.openxmlformats.org/presentationml/2006/ole">
             <mc:AlternateContent xmlns:mc="http://schemas.openxmlformats.org/markup-compatibility/2006">
               <mc:Choice xmlns:v="urn:schemas-microsoft-com:vml" Requires="v">
-                <p:oleObj spid="_x0000_s7231" name="Equation" r:id="rId22" imgW="228600" imgH="101520" progId="Equation.DSMT4">
+                <p:oleObj spid="_x0000_s7335" name="Equation" r:id="rId22" imgW="228600" imgH="101520" progId="Equation.DSMT4">
                   <p:embed/>
                 </p:oleObj>
               </mc:Choice>
@@ -9275,7 +9360,7 @@
           <a:graphicData uri="http://schemas.openxmlformats.org/presentationml/2006/ole">
             <mc:AlternateContent xmlns:mc="http://schemas.openxmlformats.org/markup-compatibility/2006">
               <mc:Choice xmlns:v="urn:schemas-microsoft-com:vml" Requires="v">
-                <p:oleObj spid="_x0000_s7232" name="Equation" r:id="rId24" imgW="571320" imgH="253800" progId="Equation.DSMT4">
+                <p:oleObj spid="_x0000_s7336" name="Equation" r:id="rId24" imgW="571320" imgH="253800" progId="Equation.DSMT4">
                   <p:embed/>
                 </p:oleObj>
               </mc:Choice>
@@ -9560,7 +9645,7 @@
           <a:graphicData uri="http://schemas.openxmlformats.org/presentationml/2006/ole">
             <mc:AlternateContent xmlns:mc="http://schemas.openxmlformats.org/markup-compatibility/2006">
               <mc:Choice xmlns:v="urn:schemas-microsoft-com:vml" Requires="v">
-                <p:oleObj spid="_x0000_s7233" name="Equation" r:id="rId26" imgW="571320" imgH="253800" progId="Equation.DSMT4">
+                <p:oleObj spid="_x0000_s7337" name="Equation" r:id="rId26" imgW="571320" imgH="253800" progId="Equation.DSMT4">
                   <p:embed/>
                 </p:oleObj>
               </mc:Choice>
@@ -9733,7 +9818,7 @@
           <a:graphicData uri="http://schemas.openxmlformats.org/presentationml/2006/ole">
             <mc:AlternateContent xmlns:mc="http://schemas.openxmlformats.org/markup-compatibility/2006">
               <mc:Choice xmlns:v="urn:schemas-microsoft-com:vml" Requires="v">
-                <p:oleObj spid="_x0000_s7234" name="Equation" r:id="rId28" imgW="558720" imgH="253800" progId="Equation.DSMT4">
+                <p:oleObj spid="_x0000_s7338" name="Equation" r:id="rId28" imgW="558720" imgH="253800" progId="Equation.DSMT4">
                   <p:embed/>
                 </p:oleObj>
               </mc:Choice>
@@ -9850,7 +9935,7 @@
           <a:graphicData uri="http://schemas.openxmlformats.org/presentationml/2006/ole">
             <mc:AlternateContent xmlns:mc="http://schemas.openxmlformats.org/markup-compatibility/2006">
               <mc:Choice xmlns:v="urn:schemas-microsoft-com:vml" Requires="v">
-                <p:oleObj spid="_x0000_s7235" name="Equation" r:id="rId30" imgW="571320" imgH="253800" progId="Equation.DSMT4">
+                <p:oleObj spid="_x0000_s7339" name="Equation" r:id="rId30" imgW="571320" imgH="253800" progId="Equation.DSMT4">
                   <p:embed/>
                 </p:oleObj>
               </mc:Choice>
@@ -9913,7 +9998,7 @@
           <a:graphicData uri="http://schemas.openxmlformats.org/presentationml/2006/ole">
             <mc:AlternateContent xmlns:mc="http://schemas.openxmlformats.org/markup-compatibility/2006">
               <mc:Choice xmlns:v="urn:schemas-microsoft-com:vml" Requires="v">
-                <p:oleObj spid="_x0000_s7236" name="Equation" r:id="rId32" imgW="228600" imgH="101520" progId="Equation.DSMT4">
+                <p:oleObj spid="_x0000_s7340" name="Equation" r:id="rId32" imgW="228600" imgH="101520" progId="Equation.DSMT4">
                   <p:embed/>
                 </p:oleObj>
               </mc:Choice>
@@ -10030,7 +10115,7 @@
           <a:graphicData uri="http://schemas.openxmlformats.org/presentationml/2006/ole">
             <mc:AlternateContent xmlns:mc="http://schemas.openxmlformats.org/markup-compatibility/2006">
               <mc:Choice xmlns:v="urn:schemas-microsoft-com:vml" Requires="v">
-                <p:oleObj spid="_x0000_s7237" name="Equation" r:id="rId33" imgW="571320" imgH="253800" progId="Equation.DSMT4">
+                <p:oleObj spid="_x0000_s7341" name="Equation" r:id="rId33" imgW="571320" imgH="253800" progId="Equation.DSMT4">
                   <p:embed/>
                 </p:oleObj>
               </mc:Choice>
@@ -10315,7 +10400,7 @@
           <a:graphicData uri="http://schemas.openxmlformats.org/presentationml/2006/ole">
             <mc:AlternateContent xmlns:mc="http://schemas.openxmlformats.org/markup-compatibility/2006">
               <mc:Choice xmlns:v="urn:schemas-microsoft-com:vml" Requires="v">
-                <p:oleObj spid="_x0000_s7238" name="Equation" r:id="rId35" imgW="571320" imgH="253800" progId="Equation.DSMT4">
+                <p:oleObj spid="_x0000_s7342" name="Equation" r:id="rId35" imgW="571320" imgH="253800" progId="Equation.DSMT4">
                   <p:embed/>
                 </p:oleObj>
               </mc:Choice>
@@ -10434,7 +10519,7 @@
           <a:graphicData uri="http://schemas.openxmlformats.org/presentationml/2006/ole">
             <mc:AlternateContent xmlns:mc="http://schemas.openxmlformats.org/markup-compatibility/2006">
               <mc:Choice xmlns:v="urn:schemas-microsoft-com:vml" Requires="v">
-                <p:oleObj spid="_x0000_s7239" name="Equation" r:id="rId37" imgW="380880" imgH="228600" progId="Equation.DSMT4">
+                <p:oleObj spid="_x0000_s7343" name="Equation" r:id="rId37" imgW="380880" imgH="228600" progId="Equation.DSMT4">
                   <p:embed/>
                 </p:oleObj>
               </mc:Choice>
@@ -10497,7 +10582,7 @@
           <a:graphicData uri="http://schemas.openxmlformats.org/presentationml/2006/ole">
             <mc:AlternateContent xmlns:mc="http://schemas.openxmlformats.org/markup-compatibility/2006">
               <mc:Choice xmlns:v="urn:schemas-microsoft-com:vml" Requires="v">
-                <p:oleObj spid="_x0000_s7240" name="Equation" r:id="rId39" imgW="393480" imgH="228600" progId="Equation.DSMT4">
+                <p:oleObj spid="_x0000_s7344" name="Equation" r:id="rId39" imgW="393480" imgH="228600" progId="Equation.DSMT4">
                   <p:embed/>
                 </p:oleObj>
               </mc:Choice>
@@ -10560,7 +10645,7 @@
           <a:graphicData uri="http://schemas.openxmlformats.org/presentationml/2006/ole">
             <mc:AlternateContent xmlns:mc="http://schemas.openxmlformats.org/markup-compatibility/2006">
               <mc:Choice xmlns:v="urn:schemas-microsoft-com:vml" Requires="v">
-                <p:oleObj spid="_x0000_s7241" name="Equation" r:id="rId41" imgW="380880" imgH="228600" progId="Equation.DSMT4">
+                <p:oleObj spid="_x0000_s7345" name="Equation" r:id="rId41" imgW="380880" imgH="228600" progId="Equation.DSMT4">
                   <p:embed/>
                 </p:oleObj>
               </mc:Choice>
@@ -10623,7 +10708,7 @@
           <a:graphicData uri="http://schemas.openxmlformats.org/presentationml/2006/ole">
             <mc:AlternateContent xmlns:mc="http://schemas.openxmlformats.org/markup-compatibility/2006">
               <mc:Choice xmlns:v="urn:schemas-microsoft-com:vml" Requires="v">
-                <p:oleObj spid="_x0000_s7242" name="Equation" r:id="rId43" imgW="393480" imgH="228600" progId="Equation.DSMT4">
+                <p:oleObj spid="_x0000_s7346" name="Equation" r:id="rId43" imgW="393480" imgH="228600" progId="Equation.DSMT4">
                   <p:embed/>
                 </p:oleObj>
               </mc:Choice>
@@ -10686,7 +10771,7 @@
           <a:graphicData uri="http://schemas.openxmlformats.org/presentationml/2006/ole">
             <mc:AlternateContent xmlns:mc="http://schemas.openxmlformats.org/markup-compatibility/2006">
               <mc:Choice xmlns:v="urn:schemas-microsoft-com:vml" Requires="v">
-                <p:oleObj spid="_x0000_s7243" name="Equation" r:id="rId45" imgW="393480" imgH="228600" progId="Equation.DSMT4">
+                <p:oleObj spid="_x0000_s7347" name="Equation" r:id="rId45" imgW="393480" imgH="228600" progId="Equation.DSMT4">
                   <p:embed/>
                 </p:oleObj>
               </mc:Choice>
@@ -10749,7 +10834,7 @@
           <a:graphicData uri="http://schemas.openxmlformats.org/presentationml/2006/ole">
             <mc:AlternateContent xmlns:mc="http://schemas.openxmlformats.org/markup-compatibility/2006">
               <mc:Choice xmlns:v="urn:schemas-microsoft-com:vml" Requires="v">
-                <p:oleObj spid="_x0000_s7244" name="Equation" r:id="rId47" imgW="406080" imgH="228600" progId="Equation.DSMT4">
+                <p:oleObj spid="_x0000_s7348" name="Equation" r:id="rId47" imgW="406080" imgH="228600" progId="Equation.DSMT4">
                   <p:embed/>
                 </p:oleObj>
               </mc:Choice>
@@ -11073,7 +11158,7 @@
           <a:graphicData uri="http://schemas.openxmlformats.org/presentationml/2006/ole">
             <mc:AlternateContent xmlns:mc="http://schemas.openxmlformats.org/markup-compatibility/2006">
               <mc:Choice xmlns:v="urn:schemas-microsoft-com:vml" Requires="v">
-                <p:oleObj spid="_x0000_s7245" name="Equation" r:id="rId49" imgW="1511280" imgH="241200" progId="Equation.DSMT4">
+                <p:oleObj spid="_x0000_s7349" name="Equation" r:id="rId49" imgW="1511280" imgH="241200" progId="Equation.DSMT4">
                   <p:embed/>
                 </p:oleObj>
               </mc:Choice>
@@ -11233,7 +11318,7 @@
           <a:graphicData uri="http://schemas.openxmlformats.org/presentationml/2006/ole">
             <mc:AlternateContent xmlns:mc="http://schemas.openxmlformats.org/markup-compatibility/2006">
               <mc:Choice xmlns:v="urn:schemas-microsoft-com:vml" Requires="v">
-                <p:oleObj spid="_x0000_s7246" name="Equation" r:id="rId51" imgW="1714320" imgH="253800" progId="Equation.DSMT4">
+                <p:oleObj spid="_x0000_s7350" name="Equation" r:id="rId51" imgW="1714320" imgH="253800" progId="Equation.DSMT4">
                   <p:embed/>
                 </p:oleObj>
               </mc:Choice>
@@ -11392,7 +11477,7 @@
           <a:graphicData uri="http://schemas.openxmlformats.org/presentationml/2006/ole">
             <mc:AlternateContent xmlns:mc="http://schemas.openxmlformats.org/markup-compatibility/2006">
               <mc:Choice xmlns:v="urn:schemas-microsoft-com:vml" Requires="v">
-                <p:oleObj spid="_x0000_s7247" name="Equation" r:id="rId53" imgW="1688760" imgH="253800" progId="Equation.DSMT4">
+                <p:oleObj spid="_x0000_s7351" name="Equation" r:id="rId53" imgW="1688760" imgH="253800" progId="Equation.DSMT4">
                   <p:embed/>
                 </p:oleObj>
               </mc:Choice>
@@ -11585,7 +11670,7 @@
           <a:graphicData uri="http://schemas.openxmlformats.org/presentationml/2006/ole">
             <mc:AlternateContent xmlns:mc="http://schemas.openxmlformats.org/markup-compatibility/2006">
               <mc:Choice xmlns:v="urn:schemas-microsoft-com:vml" Requires="v">
-                <p:oleObj spid="_x0000_s5304" name="Equation" r:id="rId4" imgW="495000" imgH="241200" progId="Equation.DSMT4">
+                <p:oleObj spid="_x0000_s5408" name="Equation" r:id="rId4" imgW="495000" imgH="241200" progId="Equation.DSMT4">
                   <p:embed/>
                 </p:oleObj>
               </mc:Choice>
@@ -11702,7 +11787,7 @@
           <a:graphicData uri="http://schemas.openxmlformats.org/presentationml/2006/ole">
             <mc:AlternateContent xmlns:mc="http://schemas.openxmlformats.org/markup-compatibility/2006">
               <mc:Choice xmlns:v="urn:schemas-microsoft-com:vml" Requires="v">
-                <p:oleObj spid="_x0000_s5305" name="Equation" r:id="rId6" imgW="507960" imgH="241200" progId="Equation.DSMT4">
+                <p:oleObj spid="_x0000_s5409" name="Equation" r:id="rId6" imgW="507960" imgH="241200" progId="Equation.DSMT4">
                   <p:embed/>
                 </p:oleObj>
               </mc:Choice>
@@ -11819,7 +11904,7 @@
           <a:graphicData uri="http://schemas.openxmlformats.org/presentationml/2006/ole">
             <mc:AlternateContent xmlns:mc="http://schemas.openxmlformats.org/markup-compatibility/2006">
               <mc:Choice xmlns:v="urn:schemas-microsoft-com:vml" Requires="v">
-                <p:oleObj spid="_x0000_s5306" name="Equation" r:id="rId8" imgW="507960" imgH="241200" progId="Equation.DSMT4">
+                <p:oleObj spid="_x0000_s5410" name="Equation" r:id="rId8" imgW="507960" imgH="241200" progId="Equation.DSMT4">
                   <p:embed/>
                 </p:oleObj>
               </mc:Choice>
@@ -11979,7 +12064,7 @@
           <a:graphicData uri="http://schemas.openxmlformats.org/presentationml/2006/ole">
             <mc:AlternateContent xmlns:mc="http://schemas.openxmlformats.org/markup-compatibility/2006">
               <mc:Choice xmlns:v="urn:schemas-microsoft-com:vml" Requires="v">
-                <p:oleObj spid="_x0000_s5307" name="Equation" r:id="rId10" imgW="1028520" imgH="342720" progId="Equation.DSMT4">
+                <p:oleObj spid="_x0000_s5411" name="Equation" r:id="rId10" imgW="1028520" imgH="342720" progId="Equation.DSMT4">
                   <p:embed/>
                 </p:oleObj>
               </mc:Choice>
@@ -12186,7 +12271,7 @@
           <a:graphicData uri="http://schemas.openxmlformats.org/presentationml/2006/ole">
             <mc:AlternateContent xmlns:mc="http://schemas.openxmlformats.org/markup-compatibility/2006">
               <mc:Choice xmlns:v="urn:schemas-microsoft-com:vml" Requires="v">
-                <p:oleObj spid="_x0000_s5308" name="Equation" r:id="rId12" imgW="596880" imgH="253800" progId="Equation.DSMT4">
+                <p:oleObj spid="_x0000_s5412" name="Equation" r:id="rId12" imgW="596880" imgH="253800" progId="Equation.DSMT4">
                   <p:embed/>
                 </p:oleObj>
               </mc:Choice>
@@ -12359,7 +12444,7 @@
           <a:graphicData uri="http://schemas.openxmlformats.org/presentationml/2006/ole">
             <mc:AlternateContent xmlns:mc="http://schemas.openxmlformats.org/markup-compatibility/2006">
               <mc:Choice xmlns:v="urn:schemas-microsoft-com:vml" Requires="v">
-                <p:oleObj spid="_x0000_s5309" name="Equation" r:id="rId14" imgW="495000" imgH="241200" progId="Equation.DSMT4">
+                <p:oleObj spid="_x0000_s5413" name="Equation" r:id="rId14" imgW="495000" imgH="241200" progId="Equation.DSMT4">
                   <p:embed/>
                 </p:oleObj>
               </mc:Choice>
@@ -12532,7 +12617,7 @@
           <a:graphicData uri="http://schemas.openxmlformats.org/presentationml/2006/ole">
             <mc:AlternateContent xmlns:mc="http://schemas.openxmlformats.org/markup-compatibility/2006">
               <mc:Choice xmlns:v="urn:schemas-microsoft-com:vml" Requires="v">
-                <p:oleObj spid="_x0000_s5310" name="Equation" r:id="rId16" imgW="507960" imgH="241200" progId="Equation.DSMT4">
+                <p:oleObj spid="_x0000_s5414" name="Equation" r:id="rId16" imgW="507960" imgH="241200" progId="Equation.DSMT4">
                   <p:embed/>
                 </p:oleObj>
               </mc:Choice>
@@ -12649,7 +12734,7 @@
           <a:graphicData uri="http://schemas.openxmlformats.org/presentationml/2006/ole">
             <mc:AlternateContent xmlns:mc="http://schemas.openxmlformats.org/markup-compatibility/2006">
               <mc:Choice xmlns:v="urn:schemas-microsoft-com:vml" Requires="v">
-                <p:oleObj spid="_x0000_s5311" name="Equation" r:id="rId18" imgW="507960" imgH="241200" progId="Equation.DSMT4">
+                <p:oleObj spid="_x0000_s5415" name="Equation" r:id="rId18" imgW="507960" imgH="241200" progId="Equation.DSMT4">
                   <p:embed/>
                 </p:oleObj>
               </mc:Choice>
@@ -12822,7 +12907,7 @@
           <a:graphicData uri="http://schemas.openxmlformats.org/presentationml/2006/ole">
             <mc:AlternateContent xmlns:mc="http://schemas.openxmlformats.org/markup-compatibility/2006">
               <mc:Choice xmlns:v="urn:schemas-microsoft-com:vml" Requires="v">
-                <p:oleObj spid="_x0000_s5312" name="Equation" r:id="rId20" imgW="596880" imgH="253800" progId="Equation.DSMT4">
+                <p:oleObj spid="_x0000_s5416" name="Equation" r:id="rId20" imgW="596880" imgH="253800" progId="Equation.DSMT4">
                   <p:embed/>
                 </p:oleObj>
               </mc:Choice>
@@ -12995,7 +13080,7 @@
           <a:graphicData uri="http://schemas.openxmlformats.org/presentationml/2006/ole">
             <mc:AlternateContent xmlns:mc="http://schemas.openxmlformats.org/markup-compatibility/2006">
               <mc:Choice xmlns:v="urn:schemas-microsoft-com:vml" Requires="v">
-                <p:oleObj spid="_x0000_s5313" name="Equation" r:id="rId22" imgW="596880" imgH="253800" progId="Equation.DSMT4">
+                <p:oleObj spid="_x0000_s5417" name="Equation" r:id="rId22" imgW="596880" imgH="253800" progId="Equation.DSMT4">
                   <p:embed/>
                 </p:oleObj>
               </mc:Choice>
@@ -13112,7 +13197,7 @@
           <a:graphicData uri="http://schemas.openxmlformats.org/presentationml/2006/ole">
             <mc:AlternateContent xmlns:mc="http://schemas.openxmlformats.org/markup-compatibility/2006">
               <mc:Choice xmlns:v="urn:schemas-microsoft-com:vml" Requires="v">
-                <p:oleObj spid="_x0000_s5314" name="Equation" r:id="rId24" imgW="596880" imgH="253800" progId="Equation.DSMT4">
+                <p:oleObj spid="_x0000_s5418" name="Equation" r:id="rId24" imgW="596880" imgH="253800" progId="Equation.DSMT4">
                   <p:embed/>
                 </p:oleObj>
               </mc:Choice>
@@ -13495,7 +13580,7 @@
           <a:graphicData uri="http://schemas.openxmlformats.org/presentationml/2006/ole">
             <mc:AlternateContent xmlns:mc="http://schemas.openxmlformats.org/markup-compatibility/2006">
               <mc:Choice xmlns:v="urn:schemas-microsoft-com:vml" Requires="v">
-                <p:oleObj spid="_x0000_s5315" name="Equation" r:id="rId25" imgW="507960" imgH="241200" progId="Equation.DSMT4">
+                <p:oleObj spid="_x0000_s5419" name="Equation" r:id="rId25" imgW="507960" imgH="241200" progId="Equation.DSMT4">
                   <p:embed/>
                 </p:oleObj>
               </mc:Choice>
@@ -13612,7 +13697,7 @@
           <a:graphicData uri="http://schemas.openxmlformats.org/presentationml/2006/ole">
             <mc:AlternateContent xmlns:mc="http://schemas.openxmlformats.org/markup-compatibility/2006">
               <mc:Choice xmlns:v="urn:schemas-microsoft-com:vml" Requires="v">
-                <p:oleObj spid="_x0000_s5316" name="Equation" r:id="rId27" imgW="495000" imgH="241200" progId="Equation.DSMT4">
+                <p:oleObj spid="_x0000_s5420" name="Equation" r:id="rId27" imgW="495000" imgH="241200" progId="Equation.DSMT4">
                   <p:embed/>
                 </p:oleObj>
               </mc:Choice>
@@ -13675,7 +13760,7 @@
           <a:graphicData uri="http://schemas.openxmlformats.org/presentationml/2006/ole">
             <mc:AlternateContent xmlns:mc="http://schemas.openxmlformats.org/markup-compatibility/2006">
               <mc:Choice xmlns:v="urn:schemas-microsoft-com:vml" Requires="v">
-                <p:oleObj spid="_x0000_s5317" name="Equation" r:id="rId29" imgW="228600" imgH="101520" progId="Equation.DSMT4">
+                <p:oleObj spid="_x0000_s5421" name="Equation" r:id="rId29" imgW="228600" imgH="101520" progId="Equation.DSMT4">
                   <p:embed/>
                 </p:oleObj>
               </mc:Choice>
@@ -13738,7 +13823,7 @@
           <a:graphicData uri="http://schemas.openxmlformats.org/presentationml/2006/ole">
             <mc:AlternateContent xmlns:mc="http://schemas.openxmlformats.org/markup-compatibility/2006">
               <mc:Choice xmlns:v="urn:schemas-microsoft-com:vml" Requires="v">
-                <p:oleObj spid="_x0000_s5318" name="Equation" r:id="rId31" imgW="507960" imgH="241200" progId="Equation.DSMT4">
+                <p:oleObj spid="_x0000_s5422" name="Equation" r:id="rId31" imgW="507960" imgH="241200" progId="Equation.DSMT4">
                   <p:embed/>
                 </p:oleObj>
               </mc:Choice>
@@ -13842,7 +13927,7 @@
           <a:graphicData uri="http://schemas.openxmlformats.org/presentationml/2006/ole">
             <mc:AlternateContent xmlns:mc="http://schemas.openxmlformats.org/markup-compatibility/2006">
               <mc:Choice xmlns:v="urn:schemas-microsoft-com:vml" Requires="v">
-                <p:oleObj spid="_x0000_s5319" name="Equation" r:id="rId33" imgW="368280" imgH="228600" progId="Equation.DSMT4">
+                <p:oleObj spid="_x0000_s5423" name="Equation" r:id="rId33" imgW="368280" imgH="228600" progId="Equation.DSMT4">
                   <p:embed/>
                 </p:oleObj>
               </mc:Choice>
@@ -13959,7 +14044,7 @@
           <a:graphicData uri="http://schemas.openxmlformats.org/presentationml/2006/ole">
             <mc:AlternateContent xmlns:mc="http://schemas.openxmlformats.org/markup-compatibility/2006">
               <mc:Choice xmlns:v="urn:schemas-microsoft-com:vml" Requires="v">
-                <p:oleObj spid="_x0000_s5320" name="Equation" r:id="rId35" imgW="558720" imgH="253800" progId="Equation.DSMT4">
+                <p:oleObj spid="_x0000_s5424" name="Equation" r:id="rId35" imgW="558720" imgH="253800" progId="Equation.DSMT4">
                   <p:embed/>
                 </p:oleObj>
               </mc:Choice>
@@ -14117,7 +14202,7 @@
           <a:graphicData uri="http://schemas.openxmlformats.org/presentationml/2006/ole">
             <mc:AlternateContent xmlns:mc="http://schemas.openxmlformats.org/markup-compatibility/2006">
               <mc:Choice xmlns:v="urn:schemas-microsoft-com:vml" Requires="v">
-                <p:oleObj spid="_x0000_s5321" name="Equation" r:id="rId37" imgW="571320" imgH="253800" progId="Equation.DSMT4">
+                <p:oleObj spid="_x0000_s5425" name="Equation" r:id="rId37" imgW="571320" imgH="253800" progId="Equation.DSMT4">
                   <p:embed/>
                 </p:oleObj>
               </mc:Choice>
@@ -14180,7 +14265,7 @@
           <a:graphicData uri="http://schemas.openxmlformats.org/presentationml/2006/ole">
             <mc:AlternateContent xmlns:mc="http://schemas.openxmlformats.org/markup-compatibility/2006">
               <mc:Choice xmlns:v="urn:schemas-microsoft-com:vml" Requires="v">
-                <p:oleObj spid="_x0000_s5322" name="Equation" r:id="rId39" imgW="228600" imgH="101520" progId="Equation.DSMT4">
+                <p:oleObj spid="_x0000_s5426" name="Equation" r:id="rId39" imgW="228600" imgH="101520" progId="Equation.DSMT4">
                   <p:embed/>
                 </p:oleObj>
               </mc:Choice>
@@ -14338,7 +14423,7 @@
           <a:graphicData uri="http://schemas.openxmlformats.org/presentationml/2006/ole">
             <mc:AlternateContent xmlns:mc="http://schemas.openxmlformats.org/markup-compatibility/2006">
               <mc:Choice xmlns:v="urn:schemas-microsoft-com:vml" Requires="v">
-                <p:oleObj spid="_x0000_s5323" name="Equation" r:id="rId41" imgW="571320" imgH="253800" progId="Equation.DSMT4">
+                <p:oleObj spid="_x0000_s5427" name="Equation" r:id="rId41" imgW="571320" imgH="253800" progId="Equation.DSMT4">
                   <p:embed/>
                 </p:oleObj>
               </mc:Choice>
@@ -14401,7 +14486,7 @@
           <a:graphicData uri="http://schemas.openxmlformats.org/presentationml/2006/ole">
             <mc:AlternateContent xmlns:mc="http://schemas.openxmlformats.org/markup-compatibility/2006">
               <mc:Choice xmlns:v="urn:schemas-microsoft-com:vml" Requires="v">
-                <p:oleObj spid="_x0000_s5324" name="Equation" r:id="rId43" imgW="393480" imgH="228600" progId="Equation.DSMT4">
+                <p:oleObj spid="_x0000_s5428" name="Equation" r:id="rId43" imgW="393480" imgH="228600" progId="Equation.DSMT4">
                   <p:embed/>
                 </p:oleObj>
               </mc:Choice>
@@ -14464,7 +14549,7 @@
           <a:graphicData uri="http://schemas.openxmlformats.org/presentationml/2006/ole">
             <mc:AlternateContent xmlns:mc="http://schemas.openxmlformats.org/markup-compatibility/2006">
               <mc:Choice xmlns:v="urn:schemas-microsoft-com:vml" Requires="v">
-                <p:oleObj spid="_x0000_s5325" name="Equation" r:id="rId45" imgW="380880" imgH="228600" progId="Equation.DSMT4">
+                <p:oleObj spid="_x0000_s5429" name="Equation" r:id="rId45" imgW="380880" imgH="228600" progId="Equation.DSMT4">
                   <p:embed/>
                 </p:oleObj>
               </mc:Choice>
@@ -14917,7 +15002,7 @@
           <a:graphicData uri="http://schemas.openxmlformats.org/presentationml/2006/ole">
             <mc:AlternateContent xmlns:mc="http://schemas.openxmlformats.org/markup-compatibility/2006">
               <mc:Choice xmlns:v="urn:schemas-microsoft-com:vml" Requires="v">
-                <p:oleObj spid="_x0000_s5326" name="Equation" r:id="rId47" imgW="507960" imgH="241200" progId="Equation.DSMT4">
+                <p:oleObj spid="_x0000_s5430" name="Equation" r:id="rId47" imgW="507960" imgH="241200" progId="Equation.DSMT4">
                   <p:embed/>
                 </p:oleObj>
               </mc:Choice>
@@ -15075,7 +15160,7 @@
           <a:graphicData uri="http://schemas.openxmlformats.org/presentationml/2006/ole">
             <mc:AlternateContent xmlns:mc="http://schemas.openxmlformats.org/markup-compatibility/2006">
               <mc:Choice xmlns:v="urn:schemas-microsoft-com:vml" Requires="v">
-                <p:oleObj spid="_x0000_s5327" name="Equation" r:id="rId49" imgW="571320" imgH="253800" progId="Equation.DSMT4">
+                <p:oleObj spid="_x0000_s5431" name="Equation" r:id="rId49" imgW="571320" imgH="253800" progId="Equation.DSMT4">
                   <p:embed/>
                 </p:oleObj>
               </mc:Choice>
@@ -15138,7 +15223,7 @@
           <a:graphicData uri="http://schemas.openxmlformats.org/presentationml/2006/ole">
             <mc:AlternateContent xmlns:mc="http://schemas.openxmlformats.org/markup-compatibility/2006">
               <mc:Choice xmlns:v="urn:schemas-microsoft-com:vml" Requires="v">
-                <p:oleObj spid="_x0000_s5328" name="Equation" r:id="rId51" imgW="380880" imgH="228600" progId="Equation.DSMT4">
+                <p:oleObj spid="_x0000_s5432" name="Equation" r:id="rId51" imgW="380880" imgH="228600" progId="Equation.DSMT4">
                   <p:embed/>
                 </p:oleObj>
               </mc:Choice>
@@ -15409,7 +15494,7 @@
           <a:graphicData uri="http://schemas.openxmlformats.org/presentationml/2006/ole">
             <mc:AlternateContent xmlns:mc="http://schemas.openxmlformats.org/markup-compatibility/2006">
               <mc:Choice xmlns:v="urn:schemas-microsoft-com:vml" Requires="v">
-                <p:oleObj spid="_x0000_s5329" name="Equation" r:id="rId53" imgW="812520" imgH="203040" progId="Equation.DSMT4">
+                <p:oleObj spid="_x0000_s5433" name="Equation" r:id="rId53" imgW="812520" imgH="203040" progId="Equation.DSMT4">
                   <p:embed/>
                 </p:oleObj>
               </mc:Choice>
@@ -15654,7 +15739,7 @@
           <a:graphicData uri="http://schemas.openxmlformats.org/presentationml/2006/ole">
             <mc:AlternateContent xmlns:mc="http://schemas.openxmlformats.org/markup-compatibility/2006">
               <mc:Choice xmlns:v="urn:schemas-microsoft-com:vml" Requires="v">
-                <p:oleObj spid="_x0000_s6476" name="Equation" r:id="rId4" imgW="495000" imgH="241200" progId="Equation.DSMT4">
+                <p:oleObj spid="_x0000_s6708" name="Equation" r:id="rId4" imgW="495000" imgH="241200" progId="Equation.DSMT4">
                   <p:embed/>
                 </p:oleObj>
               </mc:Choice>
@@ -15771,7 +15856,7 @@
           <a:graphicData uri="http://schemas.openxmlformats.org/presentationml/2006/ole">
             <mc:AlternateContent xmlns:mc="http://schemas.openxmlformats.org/markup-compatibility/2006">
               <mc:Choice xmlns:v="urn:schemas-microsoft-com:vml" Requires="v">
-                <p:oleObj spid="_x0000_s6477" name="Equation" r:id="rId6" imgW="507960" imgH="241200" progId="Equation.DSMT4">
+                <p:oleObj spid="_x0000_s6709" name="Equation" r:id="rId6" imgW="507960" imgH="241200" progId="Equation.DSMT4">
                   <p:embed/>
                 </p:oleObj>
               </mc:Choice>
@@ -15888,7 +15973,7 @@
           <a:graphicData uri="http://schemas.openxmlformats.org/presentationml/2006/ole">
             <mc:AlternateContent xmlns:mc="http://schemas.openxmlformats.org/markup-compatibility/2006">
               <mc:Choice xmlns:v="urn:schemas-microsoft-com:vml" Requires="v">
-                <p:oleObj spid="_x0000_s6478" name="Equation" r:id="rId8" imgW="507960" imgH="241200" progId="Equation.DSMT4">
+                <p:oleObj spid="_x0000_s6710" name="Equation" r:id="rId8" imgW="507960" imgH="241200" progId="Equation.DSMT4">
                   <p:embed/>
                 </p:oleObj>
               </mc:Choice>
@@ -16048,7 +16133,7 @@
           <a:graphicData uri="http://schemas.openxmlformats.org/presentationml/2006/ole">
             <mc:AlternateContent xmlns:mc="http://schemas.openxmlformats.org/markup-compatibility/2006">
               <mc:Choice xmlns:v="urn:schemas-microsoft-com:vml" Requires="v">
-                <p:oleObj spid="_x0000_s6479" name="Equation" r:id="rId10" imgW="1028520" imgH="342720" progId="Equation.DSMT4">
+                <p:oleObj spid="_x0000_s6711" name="Equation" r:id="rId10" imgW="1028520" imgH="342720" progId="Equation.DSMT4">
                   <p:embed/>
                 </p:oleObj>
               </mc:Choice>
@@ -16261,7 +16346,7 @@
           <a:graphicData uri="http://schemas.openxmlformats.org/presentationml/2006/ole">
             <mc:AlternateContent xmlns:mc="http://schemas.openxmlformats.org/markup-compatibility/2006">
               <mc:Choice xmlns:v="urn:schemas-microsoft-com:vml" Requires="v">
-                <p:oleObj spid="_x0000_s6480" name="Equation" r:id="rId12" imgW="596880" imgH="253800" progId="Equation.DSMT4">
+                <p:oleObj spid="_x0000_s6712" name="Equation" r:id="rId12" imgW="596880" imgH="253800" progId="Equation.DSMT4">
                   <p:embed/>
                 </p:oleObj>
               </mc:Choice>
@@ -16434,7 +16519,7 @@
           <a:graphicData uri="http://schemas.openxmlformats.org/presentationml/2006/ole">
             <mc:AlternateContent xmlns:mc="http://schemas.openxmlformats.org/markup-compatibility/2006">
               <mc:Choice xmlns:v="urn:schemas-microsoft-com:vml" Requires="v">
-                <p:oleObj spid="_x0000_s6481" name="Equation" r:id="rId14" imgW="495000" imgH="241200" progId="Equation.DSMT4">
+                <p:oleObj spid="_x0000_s6713" name="Equation" r:id="rId14" imgW="495000" imgH="241200" progId="Equation.DSMT4">
                   <p:embed/>
                 </p:oleObj>
               </mc:Choice>
@@ -16607,7 +16692,7 @@
           <a:graphicData uri="http://schemas.openxmlformats.org/presentationml/2006/ole">
             <mc:AlternateContent xmlns:mc="http://schemas.openxmlformats.org/markup-compatibility/2006">
               <mc:Choice xmlns:v="urn:schemas-microsoft-com:vml" Requires="v">
-                <p:oleObj spid="_x0000_s6482" name="Equation" r:id="rId16" imgW="507960" imgH="241200" progId="Equation.DSMT4">
+                <p:oleObj spid="_x0000_s6714" name="Equation" r:id="rId16" imgW="507960" imgH="241200" progId="Equation.DSMT4">
                   <p:embed/>
                 </p:oleObj>
               </mc:Choice>
@@ -16724,7 +16809,7 @@
           <a:graphicData uri="http://schemas.openxmlformats.org/presentationml/2006/ole">
             <mc:AlternateContent xmlns:mc="http://schemas.openxmlformats.org/markup-compatibility/2006">
               <mc:Choice xmlns:v="urn:schemas-microsoft-com:vml" Requires="v">
-                <p:oleObj spid="_x0000_s6483" name="Equation" r:id="rId18" imgW="507960" imgH="241200" progId="Equation.DSMT4">
+                <p:oleObj spid="_x0000_s6715" name="Equation" r:id="rId18" imgW="507960" imgH="241200" progId="Equation.DSMT4">
                   <p:embed/>
                 </p:oleObj>
               </mc:Choice>
@@ -16903,7 +16988,7 @@
           <a:graphicData uri="http://schemas.openxmlformats.org/presentationml/2006/ole">
             <mc:AlternateContent xmlns:mc="http://schemas.openxmlformats.org/markup-compatibility/2006">
               <mc:Choice xmlns:v="urn:schemas-microsoft-com:vml" Requires="v">
-                <p:oleObj spid="_x0000_s6484" name="Equation" r:id="rId20" imgW="596880" imgH="253800" progId="Equation.DSMT4">
+                <p:oleObj spid="_x0000_s6716" name="Equation" r:id="rId20" imgW="596880" imgH="253800" progId="Equation.DSMT4">
                   <p:embed/>
                 </p:oleObj>
               </mc:Choice>
@@ -17082,7 +17167,7 @@
           <a:graphicData uri="http://schemas.openxmlformats.org/presentationml/2006/ole">
             <mc:AlternateContent xmlns:mc="http://schemas.openxmlformats.org/markup-compatibility/2006">
               <mc:Choice xmlns:v="urn:schemas-microsoft-com:vml" Requires="v">
-                <p:oleObj spid="_x0000_s6485" name="Equation" r:id="rId22" imgW="596880" imgH="253800" progId="Equation.DSMT4">
+                <p:oleObj spid="_x0000_s6717" name="Equation" r:id="rId22" imgW="596880" imgH="253800" progId="Equation.DSMT4">
                   <p:embed/>
                 </p:oleObj>
               </mc:Choice>
@@ -17205,7 +17290,7 @@
           <a:graphicData uri="http://schemas.openxmlformats.org/presentationml/2006/ole">
             <mc:AlternateContent xmlns:mc="http://schemas.openxmlformats.org/markup-compatibility/2006">
               <mc:Choice xmlns:v="urn:schemas-microsoft-com:vml" Requires="v">
-                <p:oleObj spid="_x0000_s6486" name="Equation" r:id="rId24" imgW="596880" imgH="253800" progId="Equation.DSMT4">
+                <p:oleObj spid="_x0000_s6718" name="Equation" r:id="rId24" imgW="596880" imgH="253800" progId="Equation.DSMT4">
                   <p:embed/>
                 </p:oleObj>
               </mc:Choice>
@@ -17511,7 +17596,7 @@
           <a:graphicData uri="http://schemas.openxmlformats.org/presentationml/2006/ole">
             <mc:AlternateContent xmlns:mc="http://schemas.openxmlformats.org/markup-compatibility/2006">
               <mc:Choice xmlns:v="urn:schemas-microsoft-com:vml" Requires="v">
-                <p:oleObj spid="_x0000_s6487" name="Equation" r:id="rId25" imgW="507960" imgH="241200" progId="Equation.DSMT4">
+                <p:oleObj spid="_x0000_s6719" name="Equation" r:id="rId25" imgW="507960" imgH="241200" progId="Equation.DSMT4">
                   <p:embed/>
                 </p:oleObj>
               </mc:Choice>
@@ -17634,7 +17719,7 @@
           <a:graphicData uri="http://schemas.openxmlformats.org/presentationml/2006/ole">
             <mc:AlternateContent xmlns:mc="http://schemas.openxmlformats.org/markup-compatibility/2006">
               <mc:Choice xmlns:v="urn:schemas-microsoft-com:vml" Requires="v">
-                <p:oleObj spid="_x0000_s6488" name="Equation" r:id="rId27" imgW="495000" imgH="241200" progId="Equation.DSMT4">
+                <p:oleObj spid="_x0000_s6720" name="Equation" r:id="rId27" imgW="495000" imgH="241200" progId="Equation.DSMT4">
                   <p:embed/>
                 </p:oleObj>
               </mc:Choice>
@@ -17703,7 +17788,7 @@
           <a:graphicData uri="http://schemas.openxmlformats.org/presentationml/2006/ole">
             <mc:AlternateContent xmlns:mc="http://schemas.openxmlformats.org/markup-compatibility/2006">
               <mc:Choice xmlns:v="urn:schemas-microsoft-com:vml" Requires="v">
-                <p:oleObj spid="_x0000_s6489" name="Equation" r:id="rId29" imgW="228600" imgH="101520" progId="Equation.DSMT4">
+                <p:oleObj spid="_x0000_s6721" name="Equation" r:id="rId29" imgW="228600" imgH="101520" progId="Equation.DSMT4">
                   <p:embed/>
                 </p:oleObj>
               </mc:Choice>
@@ -17772,7 +17857,7 @@
           <a:graphicData uri="http://schemas.openxmlformats.org/presentationml/2006/ole">
             <mc:AlternateContent xmlns:mc="http://schemas.openxmlformats.org/markup-compatibility/2006">
               <mc:Choice xmlns:v="urn:schemas-microsoft-com:vml" Requires="v">
-                <p:oleObj spid="_x0000_s6490" name="Equation" r:id="rId31" imgW="507960" imgH="241200" progId="Equation.DSMT4">
+                <p:oleObj spid="_x0000_s6722" name="Equation" r:id="rId31" imgW="507960" imgH="241200" progId="Equation.DSMT4">
                   <p:embed/>
                 </p:oleObj>
               </mc:Choice>
@@ -17882,7 +17967,7 @@
           <a:graphicData uri="http://schemas.openxmlformats.org/presentationml/2006/ole">
             <mc:AlternateContent xmlns:mc="http://schemas.openxmlformats.org/markup-compatibility/2006">
               <mc:Choice xmlns:v="urn:schemas-microsoft-com:vml" Requires="v">
-                <p:oleObj spid="_x0000_s6491" name="Equation" r:id="rId33" imgW="368280" imgH="228600" progId="Equation.DSMT4">
+                <p:oleObj spid="_x0000_s6723" name="Equation" r:id="rId33" imgW="368280" imgH="228600" progId="Equation.DSMT4">
                   <p:embed/>
                 </p:oleObj>
               </mc:Choice>
@@ -18005,7 +18090,7 @@
           <a:graphicData uri="http://schemas.openxmlformats.org/presentationml/2006/ole">
             <mc:AlternateContent xmlns:mc="http://schemas.openxmlformats.org/markup-compatibility/2006">
               <mc:Choice xmlns:v="urn:schemas-microsoft-com:vml" Requires="v">
-                <p:oleObj spid="_x0000_s6492" name="Equation" r:id="rId35" imgW="558720" imgH="253800" progId="Equation.DSMT4">
+                <p:oleObj spid="_x0000_s6724" name="Equation" r:id="rId35" imgW="558720" imgH="253800" progId="Equation.DSMT4">
                   <p:embed/>
                 </p:oleObj>
               </mc:Choice>
@@ -18128,7 +18213,7 @@
           <a:graphicData uri="http://schemas.openxmlformats.org/presentationml/2006/ole">
             <mc:AlternateContent xmlns:mc="http://schemas.openxmlformats.org/markup-compatibility/2006">
               <mc:Choice xmlns:v="urn:schemas-microsoft-com:vml" Requires="v">
-                <p:oleObj spid="_x0000_s6493" name="Equation" r:id="rId37" imgW="571320" imgH="253800" progId="Equation.DSMT4">
+                <p:oleObj spid="_x0000_s6725" name="Equation" r:id="rId37" imgW="571320" imgH="253800" progId="Equation.DSMT4">
                   <p:embed/>
                 </p:oleObj>
               </mc:Choice>
@@ -18197,7 +18282,7 @@
           <a:graphicData uri="http://schemas.openxmlformats.org/presentationml/2006/ole">
             <mc:AlternateContent xmlns:mc="http://schemas.openxmlformats.org/markup-compatibility/2006">
               <mc:Choice xmlns:v="urn:schemas-microsoft-com:vml" Requires="v">
-                <p:oleObj spid="_x0000_s6494" name="Equation" r:id="rId39" imgW="228600" imgH="101520" progId="Equation.DSMT4">
+                <p:oleObj spid="_x0000_s6726" name="Equation" r:id="rId39" imgW="228600" imgH="101520" progId="Equation.DSMT4">
                   <p:embed/>
                 </p:oleObj>
               </mc:Choice>
@@ -18320,7 +18405,7 @@
           <a:graphicData uri="http://schemas.openxmlformats.org/presentationml/2006/ole">
             <mc:AlternateContent xmlns:mc="http://schemas.openxmlformats.org/markup-compatibility/2006">
               <mc:Choice xmlns:v="urn:schemas-microsoft-com:vml" Requires="v">
-                <p:oleObj spid="_x0000_s6495" name="Equation" r:id="rId41" imgW="571320" imgH="253800" progId="Equation.DSMT4">
+                <p:oleObj spid="_x0000_s6727" name="Equation" r:id="rId41" imgW="571320" imgH="253800" progId="Equation.DSMT4">
                   <p:embed/>
                 </p:oleObj>
               </mc:Choice>
@@ -18555,7 +18640,7 @@
           <a:graphicData uri="http://schemas.openxmlformats.org/presentationml/2006/ole">
             <mc:AlternateContent xmlns:mc="http://schemas.openxmlformats.org/markup-compatibility/2006">
               <mc:Choice xmlns:v="urn:schemas-microsoft-com:vml" Requires="v">
-                <p:oleObj spid="_x0000_s6496" name="Equation" r:id="rId43" imgW="507960" imgH="241200" progId="Equation.DSMT4">
+                <p:oleObj spid="_x0000_s6728" name="Equation" r:id="rId43" imgW="507960" imgH="241200" progId="Equation.DSMT4">
                   <p:embed/>
                 </p:oleObj>
               </mc:Choice>
@@ -18678,7 +18763,7 @@
           <a:graphicData uri="http://schemas.openxmlformats.org/presentationml/2006/ole">
             <mc:AlternateContent xmlns:mc="http://schemas.openxmlformats.org/markup-compatibility/2006">
               <mc:Choice xmlns:v="urn:schemas-microsoft-com:vml" Requires="v">
-                <p:oleObj spid="_x0000_s6497" name="Equation" r:id="rId45" imgW="571320" imgH="253800" progId="Equation.DSMT4">
+                <p:oleObj spid="_x0000_s6729" name="Equation" r:id="rId45" imgW="571320" imgH="253800" progId="Equation.DSMT4">
                   <p:embed/>
                 </p:oleObj>
               </mc:Choice>
@@ -18843,7 +18928,7 @@
           <a:graphicData uri="http://schemas.openxmlformats.org/presentationml/2006/ole">
             <mc:AlternateContent xmlns:mc="http://schemas.openxmlformats.org/markup-compatibility/2006">
               <mc:Choice xmlns:v="urn:schemas-microsoft-com:vml" Requires="v">
-                <p:oleObj spid="_x0000_s6498" name="Equation" r:id="rId47" imgW="812520" imgH="203040" progId="Equation.DSMT4">
+                <p:oleObj spid="_x0000_s6730" name="Equation" r:id="rId47" imgW="812520" imgH="203040" progId="Equation.DSMT4">
                   <p:embed/>
                 </p:oleObj>
               </mc:Choice>
@@ -18964,7 +19049,7 @@
           <a:graphicData uri="http://schemas.openxmlformats.org/presentationml/2006/ole">
             <mc:AlternateContent xmlns:mc="http://schemas.openxmlformats.org/markup-compatibility/2006">
               <mc:Choice xmlns:v="urn:schemas-microsoft-com:vml" Requires="v">
-                <p:oleObj spid="_x0000_s6499" name="Equation" r:id="rId49" imgW="291960" imgH="203040" progId="Equation.DSMT4">
+                <p:oleObj spid="_x0000_s6731" name="Equation" r:id="rId49" imgW="291960" imgH="203040" progId="Equation.DSMT4">
                   <p:embed/>
                 </p:oleObj>
               </mc:Choice>
@@ -19122,7 +19207,7 @@
           <a:graphicData uri="http://schemas.openxmlformats.org/presentationml/2006/ole">
             <mc:AlternateContent xmlns:mc="http://schemas.openxmlformats.org/markup-compatibility/2006">
               <mc:Choice xmlns:v="urn:schemas-microsoft-com:vml" Requires="v">
-                <p:oleObj spid="_x0000_s6500" name="Equation" r:id="rId51" imgW="812520" imgH="253800" progId="Equation.DSMT4">
+                <p:oleObj spid="_x0000_s6732" name="Equation" r:id="rId51" imgW="812520" imgH="253800" progId="Equation.DSMT4">
                   <p:embed/>
                 </p:oleObj>
               </mc:Choice>
@@ -19286,7 +19371,7 @@
           <a:graphicData uri="http://schemas.openxmlformats.org/presentationml/2006/ole">
             <mc:AlternateContent xmlns:mc="http://schemas.openxmlformats.org/markup-compatibility/2006">
               <mc:Choice xmlns:v="urn:schemas-microsoft-com:vml" Requires="v">
-                <p:oleObj spid="_x0000_s6501" name="Equation" r:id="rId53" imgW="152347" imgH="108027" progId="Equation.DSMT4">
+                <p:oleObj spid="_x0000_s6733" name="Equation" r:id="rId53" imgW="152347" imgH="108027" progId="Equation.DSMT4">
                   <p:embed/>
                 </p:oleObj>
               </mc:Choice>
@@ -19349,7 +19434,7 @@
           <a:graphicData uri="http://schemas.openxmlformats.org/presentationml/2006/ole">
             <mc:AlternateContent xmlns:mc="http://schemas.openxmlformats.org/markup-compatibility/2006">
               <mc:Choice xmlns:v="urn:schemas-microsoft-com:vml" Requires="v">
-                <p:oleObj spid="_x0000_s6502" name="Equation" r:id="rId55" imgW="927000" imgH="266400" progId="Equation.DSMT4">
+                <p:oleObj spid="_x0000_s6734" name="Equation" r:id="rId55" imgW="927000" imgH="266400" progId="Equation.DSMT4">
                   <p:embed/>
                 </p:oleObj>
               </mc:Choice>
@@ -19412,7 +19497,7 @@
           <a:graphicData uri="http://schemas.openxmlformats.org/presentationml/2006/ole">
             <mc:AlternateContent xmlns:mc="http://schemas.openxmlformats.org/markup-compatibility/2006">
               <mc:Choice xmlns:v="urn:schemas-microsoft-com:vml" Requires="v">
-                <p:oleObj spid="_x0000_s6503" name="Equation" r:id="rId49" imgW="291960" imgH="203040" progId="Equation.DSMT4">
+                <p:oleObj spid="_x0000_s6735" name="Equation" r:id="rId49" imgW="291960" imgH="203040" progId="Equation.DSMT4">
                   <p:embed/>
                 </p:oleObj>
               </mc:Choice>
@@ -19576,7 +19661,7 @@
           <a:graphicData uri="http://schemas.openxmlformats.org/presentationml/2006/ole">
             <mc:AlternateContent xmlns:mc="http://schemas.openxmlformats.org/markup-compatibility/2006">
               <mc:Choice xmlns:v="urn:schemas-microsoft-com:vml" Requires="v">
-                <p:oleObj spid="_x0000_s6504" name="Equation" r:id="rId57" imgW="774360" imgH="266400" progId="Equation.DSMT4">
+                <p:oleObj spid="_x0000_s6736" name="Equation" r:id="rId57" imgW="774360" imgH="266400" progId="Equation.DSMT4">
                   <p:embed/>
                 </p:oleObj>
               </mc:Choice>
@@ -19740,7 +19825,7 @@
           <a:graphicData uri="http://schemas.openxmlformats.org/presentationml/2006/ole">
             <mc:AlternateContent xmlns:mc="http://schemas.openxmlformats.org/markup-compatibility/2006">
               <mc:Choice xmlns:v="urn:schemas-microsoft-com:vml" Requires="v">
-                <p:oleObj spid="_x0000_s6505" name="Equation" r:id="rId59" imgW="152347" imgH="108027" progId="Equation.DSMT4">
+                <p:oleObj spid="_x0000_s6737" name="Equation" r:id="rId59" imgW="152347" imgH="108027" progId="Equation.DSMT4">
                   <p:embed/>
                 </p:oleObj>
               </mc:Choice>
@@ -19809,7 +19894,7 @@
           <a:graphicData uri="http://schemas.openxmlformats.org/presentationml/2006/ole">
             <mc:AlternateContent xmlns:mc="http://schemas.openxmlformats.org/markup-compatibility/2006">
               <mc:Choice xmlns:v="urn:schemas-microsoft-com:vml" Requires="v">
-                <p:oleObj spid="_x0000_s6506" name="Equation" r:id="rId60" imgW="787320" imgH="266400" progId="Equation.DSMT4">
+                <p:oleObj spid="_x0000_s6738" name="Equation" r:id="rId60" imgW="787320" imgH="266400" progId="Equation.DSMT4">
                   <p:embed/>
                 </p:oleObj>
               </mc:Choice>
@@ -19919,7 +20004,7 @@
           <a:graphicData uri="http://schemas.openxmlformats.org/presentationml/2006/ole">
             <mc:AlternateContent xmlns:mc="http://schemas.openxmlformats.org/markup-compatibility/2006">
               <mc:Choice xmlns:v="urn:schemas-microsoft-com:vml" Requires="v">
-                <p:oleObj spid="_x0000_s6507" name="Equation" r:id="rId49" imgW="291960" imgH="203040" progId="Equation.DSMT4">
+                <p:oleObj spid="_x0000_s6739" name="Equation" r:id="rId49" imgW="291960" imgH="203040" progId="Equation.DSMT4">
                   <p:embed/>
                 </p:oleObj>
               </mc:Choice>
@@ -20083,7 +20168,7 @@
           <a:graphicData uri="http://schemas.openxmlformats.org/presentationml/2006/ole">
             <mc:AlternateContent xmlns:mc="http://schemas.openxmlformats.org/markup-compatibility/2006">
               <mc:Choice xmlns:v="urn:schemas-microsoft-com:vml" Requires="v">
-                <p:oleObj spid="_x0000_s6508" name="Equation" r:id="rId62" imgW="825480" imgH="253800" progId="Equation.DSMT4">
+                <p:oleObj spid="_x0000_s6740" name="Equation" r:id="rId62" imgW="825480" imgH="253800" progId="Equation.DSMT4">
                   <p:embed/>
                 </p:oleObj>
               </mc:Choice>
@@ -20152,7 +20237,7 @@
           <a:graphicData uri="http://schemas.openxmlformats.org/presentationml/2006/ole">
             <mc:AlternateContent xmlns:mc="http://schemas.openxmlformats.org/markup-compatibility/2006">
               <mc:Choice xmlns:v="urn:schemas-microsoft-com:vml" Requires="v">
-                <p:oleObj spid="_x0000_s6509" name="Equation" r:id="rId64" imgW="152347" imgH="108027" progId="Equation.DSMT4">
+                <p:oleObj spid="_x0000_s6741" name="Equation" r:id="rId64" imgW="152347" imgH="108027" progId="Equation.DSMT4">
                   <p:embed/>
                 </p:oleObj>
               </mc:Choice>
@@ -20262,7 +20347,7 @@
           <a:graphicData uri="http://schemas.openxmlformats.org/presentationml/2006/ole">
             <mc:AlternateContent xmlns:mc="http://schemas.openxmlformats.org/markup-compatibility/2006">
               <mc:Choice xmlns:v="urn:schemas-microsoft-com:vml" Requires="v">
-                <p:oleObj spid="_x0000_s6510" name="Equation" r:id="rId49" imgW="291960" imgH="203040" progId="Equation.DSMT4">
+                <p:oleObj spid="_x0000_s6742" name="Equation" r:id="rId49" imgW="291960" imgH="203040" progId="Equation.DSMT4">
                   <p:embed/>
                 </p:oleObj>
               </mc:Choice>
@@ -20426,7 +20511,7 @@
           <a:graphicData uri="http://schemas.openxmlformats.org/presentationml/2006/ole">
             <mc:AlternateContent xmlns:mc="http://schemas.openxmlformats.org/markup-compatibility/2006">
               <mc:Choice xmlns:v="urn:schemas-microsoft-com:vml" Requires="v">
-                <p:oleObj spid="_x0000_s6511" name="Equation" r:id="rId65" imgW="825480" imgH="253800" progId="Equation.DSMT4">
+                <p:oleObj spid="_x0000_s6743" name="Equation" r:id="rId65" imgW="825480" imgH="253800" progId="Equation.DSMT4">
                   <p:embed/>
                 </p:oleObj>
               </mc:Choice>
@@ -20536,7 +20621,7 @@
           <a:graphicData uri="http://schemas.openxmlformats.org/presentationml/2006/ole">
             <mc:AlternateContent xmlns:mc="http://schemas.openxmlformats.org/markup-compatibility/2006">
               <mc:Choice xmlns:v="urn:schemas-microsoft-com:vml" Requires="v">
-                <p:oleObj spid="_x0000_s6512" name="Equation" r:id="rId67" imgW="152347" imgH="108027" progId="Equation.DSMT4">
+                <p:oleObj spid="_x0000_s6744" name="Equation" r:id="rId67" imgW="152347" imgH="108027" progId="Equation.DSMT4">
                   <p:embed/>
                 </p:oleObj>
               </mc:Choice>
@@ -20659,7 +20744,7 @@
           <a:graphicData uri="http://schemas.openxmlformats.org/presentationml/2006/ole">
             <mc:AlternateContent xmlns:mc="http://schemas.openxmlformats.org/markup-compatibility/2006">
               <mc:Choice xmlns:v="urn:schemas-microsoft-com:vml" Requires="v">
-                <p:oleObj spid="_x0000_s6513" name="Equation" r:id="rId68" imgW="927000" imgH="266400" progId="Equation.DSMT4">
+                <p:oleObj spid="_x0000_s6745" name="Equation" r:id="rId68" imgW="927000" imgH="266400" progId="Equation.DSMT4">
                   <p:embed/>
                 </p:oleObj>
               </mc:Choice>
@@ -20823,7 +20908,7 @@
           <a:graphicData uri="http://schemas.openxmlformats.org/presentationml/2006/ole">
             <mc:AlternateContent xmlns:mc="http://schemas.openxmlformats.org/markup-compatibility/2006">
               <mc:Choice xmlns:v="urn:schemas-microsoft-com:vml" Requires="v">
-                <p:oleObj spid="_x0000_s6514" name="Equation" r:id="rId70" imgW="927000" imgH="266400" progId="Equation.DSMT4">
+                <p:oleObj spid="_x0000_s6746" name="Equation" r:id="rId70" imgW="927000" imgH="266400" progId="Equation.DSMT4">
                   <p:embed/>
                 </p:oleObj>
               </mc:Choice>
@@ -20892,7 +20977,7 @@
           <a:graphicData uri="http://schemas.openxmlformats.org/presentationml/2006/ole">
             <mc:AlternateContent xmlns:mc="http://schemas.openxmlformats.org/markup-compatibility/2006">
               <mc:Choice xmlns:v="urn:schemas-microsoft-com:vml" Requires="v">
-                <p:oleObj spid="_x0000_s6515" name="Equation" r:id="rId49" imgW="291960" imgH="203040" progId="Equation.DSMT4">
+                <p:oleObj spid="_x0000_s6747" name="Equation" r:id="rId49" imgW="291960" imgH="203040" progId="Equation.DSMT4">
                   <p:embed/>
                 </p:oleObj>
               </mc:Choice>
@@ -21056,7 +21141,7 @@
           <a:graphicData uri="http://schemas.openxmlformats.org/presentationml/2006/ole">
             <mc:AlternateContent xmlns:mc="http://schemas.openxmlformats.org/markup-compatibility/2006">
               <mc:Choice xmlns:v="urn:schemas-microsoft-com:vml" Requires="v">
-                <p:oleObj spid="_x0000_s6516" name="Equation" r:id="rId71" imgW="812520" imgH="253800" progId="Equation.DSMT4">
+                <p:oleObj spid="_x0000_s6748" name="Equation" r:id="rId71" imgW="812520" imgH="253800" progId="Equation.DSMT4">
                   <p:embed/>
                 </p:oleObj>
               </mc:Choice>
@@ -21220,7 +21305,7 @@
           <a:graphicData uri="http://schemas.openxmlformats.org/presentationml/2006/ole">
             <mc:AlternateContent xmlns:mc="http://schemas.openxmlformats.org/markup-compatibility/2006">
               <mc:Choice xmlns:v="urn:schemas-microsoft-com:vml" Requires="v">
-                <p:oleObj spid="_x0000_s6517" name="Equation" r:id="rId72" imgW="152347" imgH="108027" progId="Equation.DSMT4">
+                <p:oleObj spid="_x0000_s6749" name="Equation" r:id="rId72" imgW="152347" imgH="108027" progId="Equation.DSMT4">
                   <p:embed/>
                 </p:oleObj>
               </mc:Choice>
@@ -21289,7 +21374,7 @@
           <a:graphicData uri="http://schemas.openxmlformats.org/presentationml/2006/ole">
             <mc:AlternateContent xmlns:mc="http://schemas.openxmlformats.org/markup-compatibility/2006">
               <mc:Choice xmlns:v="urn:schemas-microsoft-com:vml" Requires="v">
-                <p:oleObj spid="_x0000_s6518" name="Equation" r:id="rId73" imgW="876240" imgH="266400" progId="Equation.DSMT4">
+                <p:oleObj spid="_x0000_s6750" name="Equation" r:id="rId73" imgW="876240" imgH="266400" progId="Equation.DSMT4">
                   <p:embed/>
                 </p:oleObj>
               </mc:Choice>
@@ -21399,7 +21484,7 @@
           <a:graphicData uri="http://schemas.openxmlformats.org/presentationml/2006/ole">
             <mc:AlternateContent xmlns:mc="http://schemas.openxmlformats.org/markup-compatibility/2006">
               <mc:Choice xmlns:v="urn:schemas-microsoft-com:vml" Requires="v">
-                <p:oleObj spid="_x0000_s6519" name="Equation" r:id="rId75" imgW="380880" imgH="228600" progId="Equation.DSMT4">
+                <p:oleObj spid="_x0000_s6751" name="Equation" r:id="rId75" imgW="380880" imgH="228600" progId="Equation.DSMT4">
                   <p:embed/>
                 </p:oleObj>
               </mc:Choice>
@@ -21580,7 +21665,7 @@
           <a:graphicData uri="http://schemas.openxmlformats.org/presentationml/2006/ole">
             <mc:AlternateContent xmlns:mc="http://schemas.openxmlformats.org/markup-compatibility/2006">
               <mc:Choice xmlns:v="urn:schemas-microsoft-com:vml" Requires="v">
-                <p:oleObj spid="_x0000_s6520" name="Equation" r:id="rId49" imgW="291960" imgH="203040" progId="Equation.DSMT4">
+                <p:oleObj spid="_x0000_s6752" name="Equation" r:id="rId49" imgW="291960" imgH="203040" progId="Equation.DSMT4">
                   <p:embed/>
                 </p:oleObj>
               </mc:Choice>
@@ -21744,7 +21829,7 @@
           <a:graphicData uri="http://schemas.openxmlformats.org/presentationml/2006/ole">
             <mc:AlternateContent xmlns:mc="http://schemas.openxmlformats.org/markup-compatibility/2006">
               <mc:Choice xmlns:v="urn:schemas-microsoft-com:vml" Requires="v">
-                <p:oleObj spid="_x0000_s6521" name="Equation" r:id="rId77" imgW="825480" imgH="253800" progId="Equation.DSMT4">
+                <p:oleObj spid="_x0000_s6753" name="Equation" r:id="rId77" imgW="825480" imgH="253800" progId="Equation.DSMT4">
                   <p:embed/>
                 </p:oleObj>
               </mc:Choice>
@@ -21908,7 +21993,7 @@
           <a:graphicData uri="http://schemas.openxmlformats.org/presentationml/2006/ole">
             <mc:AlternateContent xmlns:mc="http://schemas.openxmlformats.org/markup-compatibility/2006">
               <mc:Choice xmlns:v="urn:schemas-microsoft-com:vml" Requires="v">
-                <p:oleObj spid="_x0000_s6522" name="Equation" r:id="rId79" imgW="152347" imgH="108027" progId="Equation.DSMT4">
+                <p:oleObj spid="_x0000_s6754" name="Equation" r:id="rId79" imgW="152347" imgH="108027" progId="Equation.DSMT4">
                   <p:embed/>
                 </p:oleObj>
               </mc:Choice>
@@ -21977,7 +22062,7 @@
           <a:graphicData uri="http://schemas.openxmlformats.org/presentationml/2006/ole">
             <mc:AlternateContent xmlns:mc="http://schemas.openxmlformats.org/markup-compatibility/2006">
               <mc:Choice xmlns:v="urn:schemas-microsoft-com:vml" Requires="v">
-                <p:oleObj spid="_x0000_s6523" name="Equation" r:id="rId80" imgW="888840" imgH="266400" progId="Equation.DSMT4">
+                <p:oleObj spid="_x0000_s6755" name="Equation" r:id="rId80" imgW="888840" imgH="266400" progId="Equation.DSMT4">
                   <p:embed/>
                 </p:oleObj>
               </mc:Choice>
@@ -22087,7 +22172,7 @@
           <a:graphicData uri="http://schemas.openxmlformats.org/presentationml/2006/ole">
             <mc:AlternateContent xmlns:mc="http://schemas.openxmlformats.org/markup-compatibility/2006">
               <mc:Choice xmlns:v="urn:schemas-microsoft-com:vml" Requires="v">
-                <p:oleObj spid="_x0000_s6524" name="Equation" r:id="rId82" imgW="380880" imgH="228600" progId="Equation.DSMT4">
+                <p:oleObj spid="_x0000_s6756" name="Equation" r:id="rId82" imgW="380880" imgH="228600" progId="Equation.DSMT4">
                   <p:embed/>
                 </p:oleObj>
               </mc:Choice>
@@ -22268,7 +22353,7 @@
           <a:graphicData uri="http://schemas.openxmlformats.org/presentationml/2006/ole">
             <mc:AlternateContent xmlns:mc="http://schemas.openxmlformats.org/markup-compatibility/2006">
               <mc:Choice xmlns:v="urn:schemas-microsoft-com:vml" Requires="v">
-                <p:oleObj spid="_x0000_s6525" name="Equation" r:id="rId49" imgW="291960" imgH="203040" progId="Equation.DSMT4">
+                <p:oleObj spid="_x0000_s6757" name="Equation" r:id="rId49" imgW="291960" imgH="203040" progId="Equation.DSMT4">
                   <p:embed/>
                 </p:oleObj>
               </mc:Choice>
@@ -22432,7 +22517,7 @@
           <a:graphicData uri="http://schemas.openxmlformats.org/presentationml/2006/ole">
             <mc:AlternateContent xmlns:mc="http://schemas.openxmlformats.org/markup-compatibility/2006">
               <mc:Choice xmlns:v="urn:schemas-microsoft-com:vml" Requires="v">
-                <p:oleObj spid="_x0000_s6526" name="Equation" r:id="rId84" imgW="825480" imgH="253800" progId="Equation.DSMT4">
+                <p:oleObj spid="_x0000_s6758" name="Equation" r:id="rId84" imgW="825480" imgH="253800" progId="Equation.DSMT4">
                   <p:embed/>
                 </p:oleObj>
               </mc:Choice>
@@ -22596,7 +22681,7 @@
           <a:graphicData uri="http://schemas.openxmlformats.org/presentationml/2006/ole">
             <mc:AlternateContent xmlns:mc="http://schemas.openxmlformats.org/markup-compatibility/2006">
               <mc:Choice xmlns:v="urn:schemas-microsoft-com:vml" Requires="v">
-                <p:oleObj spid="_x0000_s6527" name="Equation" r:id="rId86" imgW="152347" imgH="108027" progId="Equation.DSMT4">
+                <p:oleObj spid="_x0000_s6759" name="Equation" r:id="rId86" imgW="152347" imgH="108027" progId="Equation.DSMT4">
                   <p:embed/>
                 </p:oleObj>
               </mc:Choice>
@@ -22665,7 +22750,7 @@
           <a:graphicData uri="http://schemas.openxmlformats.org/presentationml/2006/ole">
             <mc:AlternateContent xmlns:mc="http://schemas.openxmlformats.org/markup-compatibility/2006">
               <mc:Choice xmlns:v="urn:schemas-microsoft-com:vml" Requires="v">
-                <p:oleObj spid="_x0000_s6528" name="Equation" r:id="rId87" imgW="888840" imgH="266400" progId="Equation.DSMT4">
+                <p:oleObj spid="_x0000_s6760" name="Equation" r:id="rId87" imgW="888840" imgH="266400" progId="Equation.DSMT4">
                   <p:embed/>
                 </p:oleObj>
               </mc:Choice>
@@ -22775,7 +22860,7 @@
           <a:graphicData uri="http://schemas.openxmlformats.org/presentationml/2006/ole">
             <mc:AlternateContent xmlns:mc="http://schemas.openxmlformats.org/markup-compatibility/2006">
               <mc:Choice xmlns:v="urn:schemas-microsoft-com:vml" Requires="v">
-                <p:oleObj spid="_x0000_s6529" name="Equation" r:id="rId89" imgW="393480" imgH="228600" progId="Equation.DSMT4">
+                <p:oleObj spid="_x0000_s6761" name="Equation" r:id="rId89" imgW="393480" imgH="228600" progId="Equation.DSMT4">
                   <p:embed/>
                 </p:oleObj>
               </mc:Choice>
@@ -22844,7 +22929,7 @@
           <a:graphicData uri="http://schemas.openxmlformats.org/presentationml/2006/ole">
             <mc:AlternateContent xmlns:mc="http://schemas.openxmlformats.org/markup-compatibility/2006">
               <mc:Choice xmlns:v="urn:schemas-microsoft-com:vml" Requires="v">
-                <p:oleObj spid="_x0000_s6530" name="Equation" r:id="rId49" imgW="291960" imgH="203040" progId="Equation.DSMT4">
+                <p:oleObj spid="_x0000_s6762" name="Equation" r:id="rId49" imgW="291960" imgH="203040" progId="Equation.DSMT4">
                   <p:embed/>
                 </p:oleObj>
               </mc:Choice>
@@ -23008,7 +23093,7 @@
           <a:graphicData uri="http://schemas.openxmlformats.org/presentationml/2006/ole">
             <mc:AlternateContent xmlns:mc="http://schemas.openxmlformats.org/markup-compatibility/2006">
               <mc:Choice xmlns:v="urn:schemas-microsoft-com:vml" Requires="v">
-                <p:oleObj spid="_x0000_s6531" name="Equation" r:id="rId91" imgW="825480" imgH="253800" progId="Equation.DSMT4">
+                <p:oleObj spid="_x0000_s6763" name="Equation" r:id="rId91" imgW="825480" imgH="253800" progId="Equation.DSMT4">
                   <p:embed/>
                 </p:oleObj>
               </mc:Choice>
@@ -23172,7 +23257,7 @@
           <a:graphicData uri="http://schemas.openxmlformats.org/presentationml/2006/ole">
             <mc:AlternateContent xmlns:mc="http://schemas.openxmlformats.org/markup-compatibility/2006">
               <mc:Choice xmlns:v="urn:schemas-microsoft-com:vml" Requires="v">
-                <p:oleObj spid="_x0000_s6532" name="Equation" r:id="rId93" imgW="152347" imgH="108027" progId="Equation.DSMT4">
+                <p:oleObj spid="_x0000_s6764" name="Equation" r:id="rId93" imgW="152347" imgH="108027" progId="Equation.DSMT4">
                   <p:embed/>
                 </p:oleObj>
               </mc:Choice>
@@ -23241,7 +23326,7 @@
           <a:graphicData uri="http://schemas.openxmlformats.org/presentationml/2006/ole">
             <mc:AlternateContent xmlns:mc="http://schemas.openxmlformats.org/markup-compatibility/2006">
               <mc:Choice xmlns:v="urn:schemas-microsoft-com:vml" Requires="v">
-                <p:oleObj spid="_x0000_s6533" name="Equation" r:id="rId94" imgW="888840" imgH="266400" progId="Equation.DSMT4">
+                <p:oleObj spid="_x0000_s6765" name="Equation" r:id="rId94" imgW="888840" imgH="266400" progId="Equation.DSMT4">
                   <p:embed/>
                 </p:oleObj>
               </mc:Choice>
@@ -24458,7 +24543,7 @@
           <a:graphicData uri="http://schemas.openxmlformats.org/presentationml/2006/ole">
             <mc:AlternateContent xmlns:mc="http://schemas.openxmlformats.org/markup-compatibility/2006">
               <mc:Choice xmlns:v="urn:schemas-microsoft-com:vml" Requires="v">
-                <p:oleObj spid="_x0000_s2418" name="Equation" r:id="rId3" imgW="190440" imgH="241200" progId="Equation.DSMT4">
+                <p:oleObj spid="_x0000_s2486" name="Equation" r:id="rId3" imgW="190440" imgH="241200" progId="Equation.DSMT4">
                   <p:embed/>
                 </p:oleObj>
               </mc:Choice>
@@ -24521,7 +24606,7 @@
           <a:graphicData uri="http://schemas.openxmlformats.org/presentationml/2006/ole">
             <mc:AlternateContent xmlns:mc="http://schemas.openxmlformats.org/markup-compatibility/2006">
               <mc:Choice xmlns:v="urn:schemas-microsoft-com:vml" Requires="v">
-                <p:oleObj spid="_x0000_s2419" name="Equation" r:id="rId5" imgW="190440" imgH="241200" progId="Equation.DSMT4">
+                <p:oleObj spid="_x0000_s2487" name="Equation" r:id="rId5" imgW="190440" imgH="241200" progId="Equation.DSMT4">
                   <p:embed/>
                 </p:oleObj>
               </mc:Choice>
@@ -24584,7 +24669,7 @@
           <a:graphicData uri="http://schemas.openxmlformats.org/presentationml/2006/ole">
             <mc:AlternateContent xmlns:mc="http://schemas.openxmlformats.org/markup-compatibility/2006">
               <mc:Choice xmlns:v="urn:schemas-microsoft-com:vml" Requires="v">
-                <p:oleObj spid="_x0000_s2420" name="Equation" r:id="rId7" imgW="190440" imgH="241200" progId="Equation.DSMT4">
+                <p:oleObj spid="_x0000_s2488" name="Equation" r:id="rId7" imgW="190440" imgH="241200" progId="Equation.DSMT4">
                   <p:embed/>
                 </p:oleObj>
               </mc:Choice>
@@ -24647,7 +24732,7 @@
           <a:graphicData uri="http://schemas.openxmlformats.org/presentationml/2006/ole">
             <mc:AlternateContent xmlns:mc="http://schemas.openxmlformats.org/markup-compatibility/2006">
               <mc:Choice xmlns:v="urn:schemas-microsoft-com:vml" Requires="v">
-                <p:oleObj spid="_x0000_s2421" name="Equation" r:id="rId9" imgW="152280" imgH="228600" progId="Equation.DSMT4">
+                <p:oleObj spid="_x0000_s2489" name="Equation" r:id="rId9" imgW="152280" imgH="228600" progId="Equation.DSMT4">
                   <p:embed/>
                 </p:oleObj>
               </mc:Choice>
@@ -24710,7 +24795,7 @@
           <a:graphicData uri="http://schemas.openxmlformats.org/presentationml/2006/ole">
             <mc:AlternateContent xmlns:mc="http://schemas.openxmlformats.org/markup-compatibility/2006">
               <mc:Choice xmlns:v="urn:schemas-microsoft-com:vml" Requires="v">
-                <p:oleObj spid="_x0000_s2422" name="Equation" r:id="rId11" imgW="177480" imgH="241200" progId="Equation.DSMT4">
+                <p:oleObj spid="_x0000_s2490" name="Equation" r:id="rId11" imgW="177480" imgH="241200" progId="Equation.DSMT4">
                   <p:embed/>
                 </p:oleObj>
               </mc:Choice>
@@ -24773,7 +24858,7 @@
           <a:graphicData uri="http://schemas.openxmlformats.org/presentationml/2006/ole">
             <mc:AlternateContent xmlns:mc="http://schemas.openxmlformats.org/markup-compatibility/2006">
               <mc:Choice xmlns:v="urn:schemas-microsoft-com:vml" Requires="v">
-                <p:oleObj spid="_x0000_s2423" name="Equation" r:id="rId13" imgW="139680" imgH="228600" progId="Equation.DSMT4">
+                <p:oleObj spid="_x0000_s2491" name="Equation" r:id="rId13" imgW="139680" imgH="228600" progId="Equation.DSMT4">
                   <p:embed/>
                 </p:oleObj>
               </mc:Choice>
@@ -24836,7 +24921,7 @@
           <a:graphicData uri="http://schemas.openxmlformats.org/presentationml/2006/ole">
             <mc:AlternateContent xmlns:mc="http://schemas.openxmlformats.org/markup-compatibility/2006">
               <mc:Choice xmlns:v="urn:schemas-microsoft-com:vml" Requires="v">
-                <p:oleObj spid="_x0000_s2424" name="Equation" r:id="rId15" imgW="152280" imgH="228600" progId="Equation.DSMT4">
+                <p:oleObj spid="_x0000_s2492" name="Equation" r:id="rId15" imgW="152280" imgH="228600" progId="Equation.DSMT4">
                   <p:embed/>
                 </p:oleObj>
               </mc:Choice>
@@ -24899,7 +24984,7 @@
           <a:graphicData uri="http://schemas.openxmlformats.org/presentationml/2006/ole">
             <mc:AlternateContent xmlns:mc="http://schemas.openxmlformats.org/markup-compatibility/2006">
               <mc:Choice xmlns:v="urn:schemas-microsoft-com:vml" Requires="v">
-                <p:oleObj spid="_x0000_s2425" name="Equation" r:id="rId17" imgW="152280" imgH="228600" progId="Equation.DSMT4">
+                <p:oleObj spid="_x0000_s2493" name="Equation" r:id="rId17" imgW="152280" imgH="228600" progId="Equation.DSMT4">
                   <p:embed/>
                 </p:oleObj>
               </mc:Choice>
@@ -24962,7 +25047,7 @@
           <a:graphicData uri="http://schemas.openxmlformats.org/presentationml/2006/ole">
             <mc:AlternateContent xmlns:mc="http://schemas.openxmlformats.org/markup-compatibility/2006">
               <mc:Choice xmlns:v="urn:schemas-microsoft-com:vml" Requires="v">
-                <p:oleObj spid="_x0000_s2426" name="Equation" r:id="rId19" imgW="203040" imgH="241200" progId="Equation.DSMT4">
+                <p:oleObj spid="_x0000_s2494" name="Equation" r:id="rId19" imgW="203040" imgH="241200" progId="Equation.DSMT4">
                   <p:embed/>
                 </p:oleObj>
               </mc:Choice>
@@ -25025,7 +25110,7 @@
           <a:graphicData uri="http://schemas.openxmlformats.org/presentationml/2006/ole">
             <mc:AlternateContent xmlns:mc="http://schemas.openxmlformats.org/markup-compatibility/2006">
               <mc:Choice xmlns:v="urn:schemas-microsoft-com:vml" Requires="v">
-                <p:oleObj spid="_x0000_s2427" name="Equation" r:id="rId21" imgW="203040" imgH="241200" progId="Equation.DSMT4">
+                <p:oleObj spid="_x0000_s2495" name="Equation" r:id="rId21" imgW="203040" imgH="241200" progId="Equation.DSMT4">
                   <p:embed/>
                 </p:oleObj>
               </mc:Choice>
@@ -25445,7 +25530,7 @@
           <a:graphicData uri="http://schemas.openxmlformats.org/presentationml/2006/ole">
             <mc:AlternateContent xmlns:mc="http://schemas.openxmlformats.org/markup-compatibility/2006">
               <mc:Choice xmlns:v="urn:schemas-microsoft-com:vml" Requires="v">
-                <p:oleObj spid="_x0000_s2428" name="Equation" r:id="rId23" imgW="152280" imgH="228600" progId="Equation.DSMT4">
+                <p:oleObj spid="_x0000_s2496" name="Equation" r:id="rId23" imgW="152280" imgH="228600" progId="Equation.DSMT4">
                   <p:embed/>
                 </p:oleObj>
               </mc:Choice>
@@ -25508,7 +25593,7 @@
           <a:graphicData uri="http://schemas.openxmlformats.org/presentationml/2006/ole">
             <mc:AlternateContent xmlns:mc="http://schemas.openxmlformats.org/markup-compatibility/2006">
               <mc:Choice xmlns:v="urn:schemas-microsoft-com:vml" Requires="v">
-                <p:oleObj spid="_x0000_s2429" name="Equation" r:id="rId25" imgW="164880" imgH="228600" progId="Equation.DSMT4">
+                <p:oleObj spid="_x0000_s2497" name="Equation" r:id="rId25" imgW="164880" imgH="228600" progId="Equation.DSMT4">
                   <p:embed/>
                 </p:oleObj>
               </mc:Choice>
@@ -25620,7 +25705,7 @@
           <a:graphicData uri="http://schemas.openxmlformats.org/presentationml/2006/ole">
             <mc:AlternateContent xmlns:mc="http://schemas.openxmlformats.org/markup-compatibility/2006">
               <mc:Choice xmlns:v="urn:schemas-microsoft-com:vml" Requires="v">
-                <p:oleObj spid="_x0000_s2430" name="Equation" r:id="rId27" imgW="164880" imgH="228600" progId="Equation.DSMT4">
+                <p:oleObj spid="_x0000_s2498" name="Equation" r:id="rId27" imgW="164880" imgH="228600" progId="Equation.DSMT4">
                   <p:embed/>
                 </p:oleObj>
               </mc:Choice>
@@ -25738,7 +25823,7 @@
           <a:graphicData uri="http://schemas.openxmlformats.org/presentationml/2006/ole">
             <mc:AlternateContent xmlns:mc="http://schemas.openxmlformats.org/markup-compatibility/2006">
               <mc:Choice xmlns:v="urn:schemas-microsoft-com:vml" Requires="v">
-                <p:oleObj spid="_x0000_s2431" name="Equation" r:id="rId29" imgW="164880" imgH="228600" progId="Equation.DSMT4">
+                <p:oleObj spid="_x0000_s2499" name="Equation" r:id="rId29" imgW="164880" imgH="228600" progId="Equation.DSMT4">
                   <p:embed/>
                 </p:oleObj>
               </mc:Choice>
@@ -25856,7 +25941,7 @@
           <a:graphicData uri="http://schemas.openxmlformats.org/presentationml/2006/ole">
             <mc:AlternateContent xmlns:mc="http://schemas.openxmlformats.org/markup-compatibility/2006">
               <mc:Choice xmlns:v="urn:schemas-microsoft-com:vml" Requires="v">
-                <p:oleObj spid="_x0000_s2432" name="Equation" r:id="rId31" imgW="164880" imgH="228600" progId="Equation.DSMT4">
+                <p:oleObj spid="_x0000_s2500" name="Equation" r:id="rId31" imgW="164880" imgH="228600" progId="Equation.DSMT4">
                   <p:embed/>
                 </p:oleObj>
               </mc:Choice>
@@ -26144,7 +26229,7 @@
           <a:graphicData uri="http://schemas.openxmlformats.org/presentationml/2006/ole">
             <mc:AlternateContent xmlns:mc="http://schemas.openxmlformats.org/markup-compatibility/2006">
               <mc:Choice xmlns:v="urn:schemas-microsoft-com:vml" Requires="v">
-                <p:oleObj spid="_x0000_s2433" name="Equation" r:id="rId33" imgW="177480" imgH="228600" progId="Equation.DSMT4">
+                <p:oleObj spid="_x0000_s2501" name="Equation" r:id="rId33" imgW="177480" imgH="228600" progId="Equation.DSMT4">
                   <p:embed/>
                 </p:oleObj>
               </mc:Choice>
@@ -26350,7 +26435,7 @@
           <a:graphicData uri="http://schemas.openxmlformats.org/presentationml/2006/ole">
             <mc:AlternateContent xmlns:mc="http://schemas.openxmlformats.org/markup-compatibility/2006">
               <mc:Choice xmlns:v="urn:schemas-microsoft-com:vml" Requires="v">
-                <p:oleObj spid="_x0000_s2434" name="Equation" r:id="rId35" imgW="164880" imgH="228600" progId="Equation.DSMT4">
+                <p:oleObj spid="_x0000_s2502" name="Equation" r:id="rId35" imgW="164880" imgH="228600" progId="Equation.DSMT4">
                   <p:embed/>
                 </p:oleObj>
               </mc:Choice>
@@ -26590,7 +26675,7 @@
           <a:graphicData uri="http://schemas.openxmlformats.org/presentationml/2006/ole">
             <mc:AlternateContent xmlns:mc="http://schemas.openxmlformats.org/markup-compatibility/2006">
               <mc:Choice xmlns:v="urn:schemas-microsoft-com:vml" Requires="v">
-                <p:oleObj spid="_x0000_s3690" name="Equation" r:id="rId3" imgW="507960" imgH="241200" progId="Equation.DSMT4">
+                <p:oleObj spid="_x0000_s3802" name="Equation" r:id="rId3" imgW="507960" imgH="241200" progId="Equation.DSMT4">
                   <p:embed/>
                 </p:oleObj>
               </mc:Choice>
@@ -26707,7 +26792,7 @@
           <a:graphicData uri="http://schemas.openxmlformats.org/presentationml/2006/ole">
             <mc:AlternateContent xmlns:mc="http://schemas.openxmlformats.org/markup-compatibility/2006">
               <mc:Choice xmlns:v="urn:schemas-microsoft-com:vml" Requires="v">
-                <p:oleObj spid="_x0000_s3691" name="Equation" r:id="rId5" imgW="495000" imgH="241200" progId="Equation.DSMT4">
+                <p:oleObj spid="_x0000_s3803" name="Equation" r:id="rId5" imgW="495000" imgH="241200" progId="Equation.DSMT4">
                   <p:embed/>
                 </p:oleObj>
               </mc:Choice>
@@ -26770,7 +26855,7 @@
           <a:graphicData uri="http://schemas.openxmlformats.org/presentationml/2006/ole">
             <mc:AlternateContent xmlns:mc="http://schemas.openxmlformats.org/markup-compatibility/2006">
               <mc:Choice xmlns:v="urn:schemas-microsoft-com:vml" Requires="v">
-                <p:oleObj spid="_x0000_s3692" name="Equation" r:id="rId7" imgW="228600" imgH="101520" progId="Equation.DSMT4">
+                <p:oleObj spid="_x0000_s3804" name="Equation" r:id="rId7" imgW="228600" imgH="101520" progId="Equation.DSMT4">
                   <p:embed/>
                 </p:oleObj>
               </mc:Choice>
@@ -26833,7 +26918,7 @@
           <a:graphicData uri="http://schemas.openxmlformats.org/presentationml/2006/ole">
             <mc:AlternateContent xmlns:mc="http://schemas.openxmlformats.org/markup-compatibility/2006">
               <mc:Choice xmlns:v="urn:schemas-microsoft-com:vml" Requires="v">
-                <p:oleObj spid="_x0000_s3693" name="Equation" r:id="rId9" imgW="507960" imgH="241200" progId="Equation.DSMT4">
+                <p:oleObj spid="_x0000_s3805" name="Equation" r:id="rId9" imgW="507960" imgH="241200" progId="Equation.DSMT4">
                   <p:embed/>
                 </p:oleObj>
               </mc:Choice>
@@ -26937,7 +27022,7 @@
           <a:graphicData uri="http://schemas.openxmlformats.org/presentationml/2006/ole">
             <mc:AlternateContent xmlns:mc="http://schemas.openxmlformats.org/markup-compatibility/2006">
               <mc:Choice xmlns:v="urn:schemas-microsoft-com:vml" Requires="v">
-                <p:oleObj spid="_x0000_s3694" name="Equation" r:id="rId11" imgW="380880" imgH="228600" progId="Equation.DSMT4">
+                <p:oleObj spid="_x0000_s3806" name="Equation" r:id="rId11" imgW="380880" imgH="228600" progId="Equation.DSMT4">
                   <p:embed/>
                 </p:oleObj>
               </mc:Choice>
@@ -27054,7 +27139,7 @@
           <a:graphicData uri="http://schemas.openxmlformats.org/presentationml/2006/ole">
             <mc:AlternateContent xmlns:mc="http://schemas.openxmlformats.org/markup-compatibility/2006">
               <mc:Choice xmlns:v="urn:schemas-microsoft-com:vml" Requires="v">
-                <p:oleObj spid="_x0000_s3695" name="Equation" r:id="rId13" imgW="558720" imgH="253800" progId="Equation.DSMT4">
+                <p:oleObj spid="_x0000_s3807" name="Equation" r:id="rId13" imgW="558720" imgH="253800" progId="Equation.DSMT4">
                   <p:embed/>
                 </p:oleObj>
               </mc:Choice>
@@ -27212,7 +27297,7 @@
           <a:graphicData uri="http://schemas.openxmlformats.org/presentationml/2006/ole">
             <mc:AlternateContent xmlns:mc="http://schemas.openxmlformats.org/markup-compatibility/2006">
               <mc:Choice xmlns:v="urn:schemas-microsoft-com:vml" Requires="v">
-                <p:oleObj spid="_x0000_s3696" name="Equation" r:id="rId15" imgW="571320" imgH="253800" progId="Equation.DSMT4">
+                <p:oleObj spid="_x0000_s3808" name="Equation" r:id="rId15" imgW="571320" imgH="253800" progId="Equation.DSMT4">
                   <p:embed/>
                 </p:oleObj>
               </mc:Choice>
@@ -27275,7 +27360,7 @@
           <a:graphicData uri="http://schemas.openxmlformats.org/presentationml/2006/ole">
             <mc:AlternateContent xmlns:mc="http://schemas.openxmlformats.org/markup-compatibility/2006">
               <mc:Choice xmlns:v="urn:schemas-microsoft-com:vml" Requires="v">
-                <p:oleObj spid="_x0000_s3697" name="Equation" r:id="rId17" imgW="228600" imgH="101520" progId="Equation.DSMT4">
+                <p:oleObj spid="_x0000_s3809" name="Equation" r:id="rId17" imgW="228600" imgH="101520" progId="Equation.DSMT4">
                   <p:embed/>
                 </p:oleObj>
               </mc:Choice>
@@ -27433,7 +27518,7 @@
           <a:graphicData uri="http://schemas.openxmlformats.org/presentationml/2006/ole">
             <mc:AlternateContent xmlns:mc="http://schemas.openxmlformats.org/markup-compatibility/2006">
               <mc:Choice xmlns:v="urn:schemas-microsoft-com:vml" Requires="v">
-                <p:oleObj spid="_x0000_s3698" name="Equation" r:id="rId19" imgW="571320" imgH="253800" progId="Equation.DSMT4">
+                <p:oleObj spid="_x0000_s3810" name="Equation" r:id="rId19" imgW="571320" imgH="253800" progId="Equation.DSMT4">
                   <p:embed/>
                 </p:oleObj>
               </mc:Choice>
@@ -27496,7 +27581,7 @@
           <a:graphicData uri="http://schemas.openxmlformats.org/presentationml/2006/ole">
             <mc:AlternateContent xmlns:mc="http://schemas.openxmlformats.org/markup-compatibility/2006">
               <mc:Choice xmlns:v="urn:schemas-microsoft-com:vml" Requires="v">
-                <p:oleObj spid="_x0000_s3699" name="Equation" r:id="rId21" imgW="406080" imgH="228600" progId="Equation.DSMT4">
+                <p:oleObj spid="_x0000_s3811" name="Equation" r:id="rId21" imgW="406080" imgH="228600" progId="Equation.DSMT4">
                   <p:embed/>
                 </p:oleObj>
               </mc:Choice>
@@ -27559,7 +27644,7 @@
           <a:graphicData uri="http://schemas.openxmlformats.org/presentationml/2006/ole">
             <mc:AlternateContent xmlns:mc="http://schemas.openxmlformats.org/markup-compatibility/2006">
               <mc:Choice xmlns:v="urn:schemas-microsoft-com:vml" Requires="v">
-                <p:oleObj spid="_x0000_s3700" name="Equation" r:id="rId23" imgW="393480" imgH="228600" progId="Equation.DSMT4">
+                <p:oleObj spid="_x0000_s3812" name="Equation" r:id="rId23" imgW="393480" imgH="228600" progId="Equation.DSMT4">
                   <p:embed/>
                 </p:oleObj>
               </mc:Choice>
@@ -28054,7 +28139,7 @@
           <a:graphicData uri="http://schemas.openxmlformats.org/presentationml/2006/ole">
             <mc:AlternateContent xmlns:mc="http://schemas.openxmlformats.org/markup-compatibility/2006">
               <mc:Choice xmlns:v="urn:schemas-microsoft-com:vml" Requires="v">
-                <p:oleObj spid="_x0000_s3701" name="Equation" r:id="rId25" imgW="1511280" imgH="241200" progId="Equation.DSMT4">
+                <p:oleObj spid="_x0000_s3813" name="Equation" r:id="rId25" imgW="1511280" imgH="241200" progId="Equation.DSMT4">
                   <p:embed/>
                 </p:oleObj>
               </mc:Choice>
@@ -28212,7 +28297,7 @@
           <a:graphicData uri="http://schemas.openxmlformats.org/presentationml/2006/ole">
             <mc:AlternateContent xmlns:mc="http://schemas.openxmlformats.org/markup-compatibility/2006">
               <mc:Choice xmlns:v="urn:schemas-microsoft-com:vml" Requires="v">
-                <p:oleObj spid="_x0000_s3702" name="Equation" r:id="rId27" imgW="1714320" imgH="253800" progId="Equation.DSMT4">
+                <p:oleObj spid="_x0000_s3814" name="Equation" r:id="rId27" imgW="1714320" imgH="253800" progId="Equation.DSMT4">
                   <p:embed/>
                 </p:oleObj>
               </mc:Choice>
@@ -28383,7 +28468,7 @@
           <a:graphicData uri="http://schemas.openxmlformats.org/presentationml/2006/ole">
             <mc:AlternateContent xmlns:mc="http://schemas.openxmlformats.org/markup-compatibility/2006">
               <mc:Choice xmlns:v="urn:schemas-microsoft-com:vml" Requires="v">
-                <p:oleObj spid="_x0000_s3703" name="Equation" r:id="rId29" imgW="507960" imgH="241200" progId="Equation.DSMT4">
+                <p:oleObj spid="_x0000_s3815" name="Equation" r:id="rId29" imgW="507960" imgH="241200" progId="Equation.DSMT4">
                   <p:embed/>
                 </p:oleObj>
               </mc:Choice>
@@ -28500,7 +28585,7 @@
           <a:graphicData uri="http://schemas.openxmlformats.org/presentationml/2006/ole">
             <mc:AlternateContent xmlns:mc="http://schemas.openxmlformats.org/markup-compatibility/2006">
               <mc:Choice xmlns:v="urn:schemas-microsoft-com:vml" Requires="v">
-                <p:oleObj spid="_x0000_s3704" name="Equation" r:id="rId30" imgW="495000" imgH="241200" progId="Equation.DSMT4">
+                <p:oleObj spid="_x0000_s3816" name="Equation" r:id="rId30" imgW="495000" imgH="241200" progId="Equation.DSMT4">
                   <p:embed/>
                 </p:oleObj>
               </mc:Choice>
@@ -28563,7 +28648,7 @@
           <a:graphicData uri="http://schemas.openxmlformats.org/presentationml/2006/ole">
             <mc:AlternateContent xmlns:mc="http://schemas.openxmlformats.org/markup-compatibility/2006">
               <mc:Choice xmlns:v="urn:schemas-microsoft-com:vml" Requires="v">
-                <p:oleObj spid="_x0000_s3705" name="Equation" r:id="rId31" imgW="228600" imgH="101520" progId="Equation.DSMT4">
+                <p:oleObj spid="_x0000_s3817" name="Equation" r:id="rId31" imgW="228600" imgH="101520" progId="Equation.DSMT4">
                   <p:embed/>
                 </p:oleObj>
               </mc:Choice>
@@ -28626,7 +28711,7 @@
           <a:graphicData uri="http://schemas.openxmlformats.org/presentationml/2006/ole">
             <mc:AlternateContent xmlns:mc="http://schemas.openxmlformats.org/markup-compatibility/2006">
               <mc:Choice xmlns:v="urn:schemas-microsoft-com:vml" Requires="v">
-                <p:oleObj spid="_x0000_s3706" name="Equation" r:id="rId32" imgW="507960" imgH="241200" progId="Equation.DSMT4">
+                <p:oleObj spid="_x0000_s3818" name="Equation" r:id="rId32" imgW="507960" imgH="241200" progId="Equation.DSMT4">
                   <p:embed/>
                 </p:oleObj>
               </mc:Choice>
@@ -28730,7 +28815,7 @@
           <a:graphicData uri="http://schemas.openxmlformats.org/presentationml/2006/ole">
             <mc:AlternateContent xmlns:mc="http://schemas.openxmlformats.org/markup-compatibility/2006">
               <mc:Choice xmlns:v="urn:schemas-microsoft-com:vml" Requires="v">
-                <p:oleObj spid="_x0000_s3707" name="Equation" r:id="rId33" imgW="368280" imgH="228600" progId="Equation.DSMT4">
+                <p:oleObj spid="_x0000_s3819" name="Equation" r:id="rId33" imgW="368280" imgH="228600" progId="Equation.DSMT4">
                   <p:embed/>
                 </p:oleObj>
               </mc:Choice>
@@ -28847,7 +28932,7 @@
           <a:graphicData uri="http://schemas.openxmlformats.org/presentationml/2006/ole">
             <mc:AlternateContent xmlns:mc="http://schemas.openxmlformats.org/markup-compatibility/2006">
               <mc:Choice xmlns:v="urn:schemas-microsoft-com:vml" Requires="v">
-                <p:oleObj spid="_x0000_s3708" name="Equation" r:id="rId35" imgW="558720" imgH="253800" progId="Equation.DSMT4">
+                <p:oleObj spid="_x0000_s3820" name="Equation" r:id="rId35" imgW="558720" imgH="253800" progId="Equation.DSMT4">
                   <p:embed/>
                 </p:oleObj>
               </mc:Choice>
@@ -29005,7 +29090,7 @@
           <a:graphicData uri="http://schemas.openxmlformats.org/presentationml/2006/ole">
             <mc:AlternateContent xmlns:mc="http://schemas.openxmlformats.org/markup-compatibility/2006">
               <mc:Choice xmlns:v="urn:schemas-microsoft-com:vml" Requires="v">
-                <p:oleObj spid="_x0000_s3709" name="Equation" r:id="rId36" imgW="571320" imgH="253800" progId="Equation.DSMT4">
+                <p:oleObj spid="_x0000_s3821" name="Equation" r:id="rId36" imgW="571320" imgH="253800" progId="Equation.DSMT4">
                   <p:embed/>
                 </p:oleObj>
               </mc:Choice>
@@ -29068,7 +29153,7 @@
           <a:graphicData uri="http://schemas.openxmlformats.org/presentationml/2006/ole">
             <mc:AlternateContent xmlns:mc="http://schemas.openxmlformats.org/markup-compatibility/2006">
               <mc:Choice xmlns:v="urn:schemas-microsoft-com:vml" Requires="v">
-                <p:oleObj spid="_x0000_s3710" name="Equation" r:id="rId37" imgW="228600" imgH="101520" progId="Equation.DSMT4">
+                <p:oleObj spid="_x0000_s3822" name="Equation" r:id="rId37" imgW="228600" imgH="101520" progId="Equation.DSMT4">
                   <p:embed/>
                 </p:oleObj>
               </mc:Choice>
@@ -29226,7 +29311,7 @@
           <a:graphicData uri="http://schemas.openxmlformats.org/presentationml/2006/ole">
             <mc:AlternateContent xmlns:mc="http://schemas.openxmlformats.org/markup-compatibility/2006">
               <mc:Choice xmlns:v="urn:schemas-microsoft-com:vml" Requires="v">
-                <p:oleObj spid="_x0000_s3711" name="Equation" r:id="rId38" imgW="571320" imgH="253800" progId="Equation.DSMT4">
+                <p:oleObj spid="_x0000_s3823" name="Equation" r:id="rId38" imgW="571320" imgH="253800" progId="Equation.DSMT4">
                   <p:embed/>
                 </p:oleObj>
               </mc:Choice>
@@ -29289,7 +29374,7 @@
           <a:graphicData uri="http://schemas.openxmlformats.org/presentationml/2006/ole">
             <mc:AlternateContent xmlns:mc="http://schemas.openxmlformats.org/markup-compatibility/2006">
               <mc:Choice xmlns:v="urn:schemas-microsoft-com:vml" Requires="v">
-                <p:oleObj spid="_x0000_s3712" name="Equation" r:id="rId39" imgW="393480" imgH="228600" progId="Equation.DSMT4">
+                <p:oleObj spid="_x0000_s3824" name="Equation" r:id="rId39" imgW="393480" imgH="228600" progId="Equation.DSMT4">
                   <p:embed/>
                 </p:oleObj>
               </mc:Choice>
@@ -29352,7 +29437,7 @@
           <a:graphicData uri="http://schemas.openxmlformats.org/presentationml/2006/ole">
             <mc:AlternateContent xmlns:mc="http://schemas.openxmlformats.org/markup-compatibility/2006">
               <mc:Choice xmlns:v="urn:schemas-microsoft-com:vml" Requires="v">
-                <p:oleObj spid="_x0000_s3713" name="Equation" r:id="rId41" imgW="380880" imgH="228600" progId="Equation.DSMT4">
+                <p:oleObj spid="_x0000_s3825" name="Equation" r:id="rId41" imgW="380880" imgH="228600" progId="Equation.DSMT4">
                   <p:embed/>
                 </p:oleObj>
               </mc:Choice>
@@ -29847,7 +29932,7 @@
           <a:graphicData uri="http://schemas.openxmlformats.org/presentationml/2006/ole">
             <mc:AlternateContent xmlns:mc="http://schemas.openxmlformats.org/markup-compatibility/2006">
               <mc:Choice xmlns:v="urn:schemas-microsoft-com:vml" Requires="v">
-                <p:oleObj spid="_x0000_s3714" name="Equation" r:id="rId43" imgW="1511280" imgH="241200" progId="Equation.DSMT4">
+                <p:oleObj spid="_x0000_s3826" name="Equation" r:id="rId43" imgW="1511280" imgH="241200" progId="Equation.DSMT4">
                   <p:embed/>
                 </p:oleObj>
               </mc:Choice>
@@ -30005,7 +30090,7 @@
           <a:graphicData uri="http://schemas.openxmlformats.org/presentationml/2006/ole">
             <mc:AlternateContent xmlns:mc="http://schemas.openxmlformats.org/markup-compatibility/2006">
               <mc:Choice xmlns:v="urn:schemas-microsoft-com:vml" Requires="v">
-                <p:oleObj spid="_x0000_s3715" name="Equation" r:id="rId44" imgW="1714320" imgH="253800" progId="Equation.DSMT4">
+                <p:oleObj spid="_x0000_s3827" name="Equation" r:id="rId44" imgW="1714320" imgH="253800" progId="Equation.DSMT4">
                   <p:embed/>
                 </p:oleObj>
               </mc:Choice>
@@ -30260,7 +30345,7 @@
           <a:graphicData uri="http://schemas.openxmlformats.org/presentationml/2006/ole">
             <mc:AlternateContent xmlns:mc="http://schemas.openxmlformats.org/markup-compatibility/2006">
               <mc:Choice xmlns:v="urn:schemas-microsoft-com:vml" Requires="v">
-                <p:oleObj spid="_x0000_s3716" name="Equation" r:id="rId45" imgW="291960" imgH="241200" progId="Equation.DSMT4">
+                <p:oleObj spid="_x0000_s3828" name="Equation" r:id="rId45" imgW="291960" imgH="241200" progId="Equation.DSMT4">
                   <p:embed/>
                 </p:oleObj>
               </mc:Choice>
@@ -30323,7 +30408,7 @@
           <a:graphicData uri="http://schemas.openxmlformats.org/presentationml/2006/ole">
             <mc:AlternateContent xmlns:mc="http://schemas.openxmlformats.org/markup-compatibility/2006">
               <mc:Choice xmlns:v="urn:schemas-microsoft-com:vml" Requires="v">
-                <p:oleObj spid="_x0000_s3717" name="Equation" r:id="rId47" imgW="330120" imgH="241200" progId="Equation.DSMT4">
+                <p:oleObj spid="_x0000_s3829" name="Equation" r:id="rId47" imgW="330120" imgH="241200" progId="Equation.DSMT4">
                   <p:embed/>
                 </p:oleObj>
               </mc:Choice>
@@ -30394,45 +30479,6 @@
           <a:chExt cx="0" cy="0"/>
         </a:xfrm>
       </p:grpSpPr>
-      <p:cxnSp>
-        <p:nvCxnSpPr>
-          <p:cNvPr id="161" name="直接连接符 160">
-            <a:extLst>
-              <a:ext uri="{FF2B5EF4-FFF2-40B4-BE49-F238E27FC236}">
-                <a16:creationId xmlns:a16="http://schemas.microsoft.com/office/drawing/2014/main" id="{C4A4FE76-04AA-480C-B86B-D55755ABCEE2}"/>
-              </a:ext>
-            </a:extLst>
-          </p:cNvPr>
-          <p:cNvCxnSpPr>
-            <a:cxnSpLocks/>
-          </p:cNvCxnSpPr>
-          <p:nvPr/>
-        </p:nvCxnSpPr>
-        <p:spPr>
-          <a:xfrm>
-            <a:off x="7643084" y="629459"/>
-            <a:ext cx="300346" cy="0"/>
-          </a:xfrm>
-          <a:prstGeom prst="line">
-            <a:avLst/>
-          </a:prstGeom>
-          <a:ln w="19050"/>
-        </p:spPr>
-        <p:style>
-          <a:lnRef idx="1">
-            <a:schemeClr val="accent1"/>
-          </a:lnRef>
-          <a:fillRef idx="0">
-            <a:schemeClr val="accent1"/>
-          </a:fillRef>
-          <a:effectRef idx="0">
-            <a:schemeClr val="accent1"/>
-          </a:effectRef>
-          <a:fontRef idx="minor">
-            <a:schemeClr val="tx1"/>
-          </a:fontRef>
-        </p:style>
-      </p:cxnSp>
       <p:sp>
         <p:nvSpPr>
           <p:cNvPr id="147" name="矩形 146">
@@ -30713,387 +30759,6 @@
           <a:p>
             <a:pPr algn="ctr"/>
             <a:endParaRPr lang="zh-CN" altLang="en-US" dirty="0"/>
-          </a:p>
-        </p:txBody>
-      </p:sp>
-      <p:grpSp>
-        <p:nvGrpSpPr>
-          <p:cNvPr id="94" name="组合 93">
-            <a:extLst>
-              <a:ext uri="{FF2B5EF4-FFF2-40B4-BE49-F238E27FC236}">
-                <a16:creationId xmlns:a16="http://schemas.microsoft.com/office/drawing/2014/main" id="{7B236271-E2AC-4F30-8615-7477D98EF41D}"/>
-              </a:ext>
-            </a:extLst>
-          </p:cNvPr>
-          <p:cNvGrpSpPr/>
-          <p:nvPr/>
-        </p:nvGrpSpPr>
-        <p:grpSpPr>
-          <a:xfrm>
-            <a:off x="7627454" y="181748"/>
-            <a:ext cx="1260028" cy="1965138"/>
-            <a:chOff x="5310330" y="2544765"/>
-            <a:chExt cx="500927" cy="374575"/>
-          </a:xfrm>
-        </p:grpSpPr>
-        <p:sp>
-          <p:nvSpPr>
-            <p:cNvPr id="95" name="卷形: 垂直 94">
-              <a:extLst>
-                <a:ext uri="{FF2B5EF4-FFF2-40B4-BE49-F238E27FC236}">
-                  <a16:creationId xmlns:a16="http://schemas.microsoft.com/office/drawing/2014/main" id="{D5DFD258-1F28-4A87-A6AB-611B4114CC01}"/>
-                </a:ext>
-              </a:extLst>
-            </p:cNvPr>
-            <p:cNvSpPr/>
-            <p:nvPr/>
-          </p:nvSpPr>
-          <p:spPr>
-            <a:xfrm>
-              <a:off x="5310330" y="2544765"/>
-              <a:ext cx="488950" cy="374575"/>
-            </a:xfrm>
-            <a:prstGeom prst="verticalScroll">
-              <a:avLst/>
-            </a:prstGeom>
-            <a:solidFill>
-              <a:schemeClr val="accent1">
-                <a:lumMod val="40000"/>
-                <a:lumOff val="60000"/>
-              </a:schemeClr>
-            </a:solidFill>
-            <a:ln>
-              <a:solidFill>
-                <a:schemeClr val="tx1"/>
-              </a:solidFill>
-            </a:ln>
-          </p:spPr>
-          <p:style>
-            <a:lnRef idx="2">
-              <a:schemeClr val="accent1">
-                <a:shade val="50000"/>
-              </a:schemeClr>
-            </a:lnRef>
-            <a:fillRef idx="1">
-              <a:schemeClr val="accent1"/>
-            </a:fillRef>
-            <a:effectRef idx="0">
-              <a:schemeClr val="accent1"/>
-            </a:effectRef>
-            <a:fontRef idx="minor">
-              <a:schemeClr val="lt1"/>
-            </a:fontRef>
-          </p:style>
-          <p:txBody>
-            <a:bodyPr rtlCol="0" anchor="ctr"/>
-            <a:lstStyle/>
-            <a:p>
-              <a:pPr algn="ctr"/>
-              <a:endParaRPr lang="zh-CN" altLang="en-US" sz="800" dirty="0"/>
-            </a:p>
-          </p:txBody>
-        </p:sp>
-        <p:sp>
-          <p:nvSpPr>
-            <p:cNvPr id="96" name="矩形 95">
-              <a:extLst>
-                <a:ext uri="{FF2B5EF4-FFF2-40B4-BE49-F238E27FC236}">
-                  <a16:creationId xmlns:a16="http://schemas.microsoft.com/office/drawing/2014/main" id="{7FE6E4CB-8B5A-4FFE-A861-B3C9D6E23AF2}"/>
-                </a:ext>
-              </a:extLst>
-            </p:cNvPr>
-            <p:cNvSpPr/>
-            <p:nvPr/>
-          </p:nvSpPr>
-          <p:spPr>
-            <a:xfrm>
-              <a:off x="5401993" y="2581129"/>
-              <a:ext cx="409264" cy="319726"/>
-            </a:xfrm>
-            <a:prstGeom prst="rect">
-              <a:avLst/>
-            </a:prstGeom>
-            <a:noFill/>
-          </p:spPr>
-          <p:txBody>
-            <a:bodyPr wrap="square" lIns="91440" tIns="45720" rIns="91440" bIns="45720">
-              <a:spAutoFit/>
-            </a:bodyPr>
-            <a:lstStyle/>
-            <a:p>
-              <a:r>
-                <a:rPr lang="en-US" altLang="zh-CN" sz="1600" dirty="0">
-                  <a:ln w="0"/>
-                  <a:effectLst>
-                    <a:outerShdw blurRad="38100" dist="19050" dir="2700000" algn="tl" rotWithShape="0">
-                      <a:schemeClr val="dk1">
-                        <a:alpha val="40000"/>
-                      </a:schemeClr>
-                    </a:outerShdw>
-                  </a:effectLst>
-                  <a:latin typeface="Times New Roman" panose="02020603050405020304" pitchFamily="18" charset="0"/>
-                  <a:cs typeface="Times New Roman" panose="02020603050405020304" pitchFamily="18" charset="0"/>
-                </a:rPr>
-                <a:t>Text X</a:t>
-              </a:r>
-            </a:p>
-            <a:p>
-              <a:endParaRPr lang="en-US" altLang="zh-CN" sz="1600" dirty="0">
-                <a:ln w="0"/>
-                <a:effectLst>
-                  <a:outerShdw blurRad="38100" dist="19050" dir="2700000" algn="tl" rotWithShape="0">
-                    <a:schemeClr val="dk1">
-                      <a:alpha val="40000"/>
-                    </a:schemeClr>
-                  </a:outerShdw>
-                </a:effectLst>
-                <a:latin typeface="Times New Roman" panose="02020603050405020304" pitchFamily="18" charset="0"/>
-                <a:cs typeface="Times New Roman" panose="02020603050405020304" pitchFamily="18" charset="0"/>
-              </a:endParaRPr>
-            </a:p>
-            <a:p>
-              <a:r>
-                <a:rPr lang="en-US" altLang="zh-CN" sz="1100" dirty="0" err="1">
-                  <a:ln w="0"/>
-                  <a:effectLst>
-                    <a:outerShdw blurRad="38100" dist="19050" dir="2700000" algn="tl" rotWithShape="0">
-                      <a:schemeClr val="dk1">
-                        <a:alpha val="40000"/>
-                      </a:schemeClr>
-                    </a:outerShdw>
-                  </a:effectLst>
-                  <a:latin typeface="Times New Roman" panose="02020603050405020304" pitchFamily="18" charset="0"/>
-                  <a:cs typeface="Times New Roman" panose="02020603050405020304" pitchFamily="18" charset="0"/>
-                </a:rPr>
-                <a:t>xxxxx</a:t>
-              </a:r>
-              <a:endParaRPr lang="en-US" altLang="zh-CN" sz="1100" dirty="0">
-                <a:ln w="0"/>
-                <a:effectLst>
-                  <a:outerShdw blurRad="38100" dist="19050" dir="2700000" algn="tl" rotWithShape="0">
-                    <a:schemeClr val="dk1">
-                      <a:alpha val="40000"/>
-                    </a:schemeClr>
-                  </a:outerShdw>
-                </a:effectLst>
-                <a:latin typeface="Times New Roman" panose="02020603050405020304" pitchFamily="18" charset="0"/>
-                <a:cs typeface="Times New Roman" panose="02020603050405020304" pitchFamily="18" charset="0"/>
-              </a:endParaRPr>
-            </a:p>
-            <a:p>
-              <a:r>
-                <a:rPr lang="en-US" altLang="zh-CN" sz="1100" dirty="0" err="1">
-                  <a:ln w="0"/>
-                  <a:effectLst>
-                    <a:outerShdw blurRad="38100" dist="19050" dir="2700000" algn="tl" rotWithShape="0">
-                      <a:schemeClr val="dk1">
-                        <a:alpha val="40000"/>
-                      </a:schemeClr>
-                    </a:outerShdw>
-                  </a:effectLst>
-                  <a:latin typeface="Times New Roman" panose="02020603050405020304" pitchFamily="18" charset="0"/>
-                  <a:cs typeface="Times New Roman" panose="02020603050405020304" pitchFamily="18" charset="0"/>
-                </a:rPr>
-                <a:t>xxxxxx</a:t>
-              </a:r>
-              <a:endParaRPr lang="en-US" altLang="zh-CN" sz="1100" dirty="0">
-                <a:ln w="0"/>
-                <a:effectLst>
-                  <a:outerShdw blurRad="38100" dist="19050" dir="2700000" algn="tl" rotWithShape="0">
-                    <a:schemeClr val="dk1">
-                      <a:alpha val="40000"/>
-                    </a:schemeClr>
-                  </a:outerShdw>
-                </a:effectLst>
-                <a:latin typeface="Times New Roman" panose="02020603050405020304" pitchFamily="18" charset="0"/>
-                <a:cs typeface="Times New Roman" panose="02020603050405020304" pitchFamily="18" charset="0"/>
-              </a:endParaRPr>
-            </a:p>
-            <a:p>
-              <a:r>
-                <a:rPr lang="en-US" altLang="zh-CN" sz="1100" dirty="0" err="1">
-                  <a:ln w="0"/>
-                  <a:effectLst>
-                    <a:outerShdw blurRad="38100" dist="19050" dir="2700000" algn="tl" rotWithShape="0">
-                      <a:schemeClr val="dk1">
-                        <a:alpha val="40000"/>
-                      </a:schemeClr>
-                    </a:outerShdw>
-                  </a:effectLst>
-                  <a:latin typeface="Times New Roman" panose="02020603050405020304" pitchFamily="18" charset="0"/>
-                  <a:cs typeface="Times New Roman" panose="02020603050405020304" pitchFamily="18" charset="0"/>
-                </a:rPr>
-                <a:t>xxxxxx</a:t>
-              </a:r>
-              <a:endParaRPr lang="en-US" altLang="zh-CN" sz="1100" dirty="0">
-                <a:ln w="0"/>
-                <a:effectLst>
-                  <a:outerShdw blurRad="38100" dist="19050" dir="2700000" algn="tl" rotWithShape="0">
-                    <a:schemeClr val="dk1">
-                      <a:alpha val="40000"/>
-                    </a:schemeClr>
-                  </a:outerShdw>
-                </a:effectLst>
-                <a:latin typeface="Times New Roman" panose="02020603050405020304" pitchFamily="18" charset="0"/>
-                <a:cs typeface="Times New Roman" panose="02020603050405020304" pitchFamily="18" charset="0"/>
-              </a:endParaRPr>
-            </a:p>
-            <a:p>
-              <a:r>
-                <a:rPr lang="en-US" altLang="zh-CN" sz="1100" dirty="0" err="1">
-                  <a:ln w="0"/>
-                  <a:effectLst>
-                    <a:outerShdw blurRad="38100" dist="19050" dir="2700000" algn="tl" rotWithShape="0">
-                      <a:schemeClr val="dk1">
-                        <a:alpha val="40000"/>
-                      </a:schemeClr>
-                    </a:outerShdw>
-                  </a:effectLst>
-                  <a:latin typeface="Times New Roman" panose="02020603050405020304" pitchFamily="18" charset="0"/>
-                  <a:cs typeface="Times New Roman" panose="02020603050405020304" pitchFamily="18" charset="0"/>
-                </a:rPr>
-                <a:t>xxxx</a:t>
-              </a:r>
-              <a:endParaRPr lang="en-US" altLang="zh-CN" sz="1100" dirty="0">
-                <a:ln w="0"/>
-                <a:effectLst>
-                  <a:outerShdw blurRad="38100" dist="19050" dir="2700000" algn="tl" rotWithShape="0">
-                    <a:schemeClr val="dk1">
-                      <a:alpha val="40000"/>
-                    </a:schemeClr>
-                  </a:outerShdw>
-                </a:effectLst>
-                <a:latin typeface="Times New Roman" panose="02020603050405020304" pitchFamily="18" charset="0"/>
-                <a:cs typeface="Times New Roman" panose="02020603050405020304" pitchFamily="18" charset="0"/>
-              </a:endParaRPr>
-            </a:p>
-            <a:p>
-              <a:endParaRPr lang="en-US" altLang="zh-CN" sz="1100" dirty="0">
-                <a:ln w="0"/>
-                <a:effectLst>
-                  <a:outerShdw blurRad="38100" dist="19050" dir="2700000" algn="tl" rotWithShape="0">
-                    <a:schemeClr val="dk1">
-                      <a:alpha val="40000"/>
-                    </a:schemeClr>
-                  </a:outerShdw>
-                </a:effectLst>
-                <a:latin typeface="Times New Roman" panose="02020603050405020304" pitchFamily="18" charset="0"/>
-                <a:cs typeface="Times New Roman" panose="02020603050405020304" pitchFamily="18" charset="0"/>
-              </a:endParaRPr>
-            </a:p>
-            <a:p>
-              <a:endParaRPr lang="zh-CN" altLang="en-US" sz="1600" b="0" cap="none" spc="0" dirty="0">
-                <a:ln w="0"/>
-                <a:effectLst>
-                  <a:outerShdw blurRad="38100" dist="19050" dir="2700000" algn="tl" rotWithShape="0">
-                    <a:schemeClr val="dk1">
-                      <a:alpha val="40000"/>
-                    </a:schemeClr>
-                  </a:outerShdw>
-                </a:effectLst>
-                <a:latin typeface="Times New Roman" panose="02020603050405020304" pitchFamily="18" charset="0"/>
-                <a:cs typeface="Times New Roman" panose="02020603050405020304" pitchFamily="18" charset="0"/>
-              </a:endParaRPr>
-            </a:p>
-          </p:txBody>
-        </p:sp>
-      </p:grpSp>
-      <p:cxnSp>
-        <p:nvCxnSpPr>
-          <p:cNvPr id="97" name="直接箭头连接符 96">
-            <a:extLst>
-              <a:ext uri="{FF2B5EF4-FFF2-40B4-BE49-F238E27FC236}">
-                <a16:creationId xmlns:a16="http://schemas.microsoft.com/office/drawing/2014/main" id="{2DC1A5E7-3FA2-452C-A4A4-3973414EFEB6}"/>
-              </a:ext>
-            </a:extLst>
-          </p:cNvPr>
-          <p:cNvCxnSpPr>
-            <a:cxnSpLocks/>
-          </p:cNvCxnSpPr>
-          <p:nvPr/>
-        </p:nvCxnSpPr>
-        <p:spPr>
-          <a:xfrm flipH="1">
-            <a:off x="6640949" y="466295"/>
-            <a:ext cx="1011482" cy="0"/>
-          </a:xfrm>
-          <a:prstGeom prst="straightConnector1">
-            <a:avLst/>
-          </a:prstGeom>
-          <a:ln w="19050">
-            <a:tailEnd type="triangle"/>
-          </a:ln>
-        </p:spPr>
-        <p:style>
-          <a:lnRef idx="1">
-            <a:schemeClr val="accent1"/>
-          </a:lnRef>
-          <a:fillRef idx="0">
-            <a:schemeClr val="accent1"/>
-          </a:fillRef>
-          <a:effectRef idx="0">
-            <a:schemeClr val="accent1"/>
-          </a:effectRef>
-          <a:fontRef idx="minor">
-            <a:schemeClr val="tx1"/>
-          </a:fontRef>
-        </p:style>
-      </p:cxnSp>
-      <p:sp>
-        <p:nvSpPr>
-          <p:cNvPr id="98" name="矩形 97">
-            <a:extLst>
-              <a:ext uri="{FF2B5EF4-FFF2-40B4-BE49-F238E27FC236}">
-                <a16:creationId xmlns:a16="http://schemas.microsoft.com/office/drawing/2014/main" id="{7CB6D79C-70C5-4F6B-9268-02BCDB890853}"/>
-              </a:ext>
-            </a:extLst>
-          </p:cNvPr>
-          <p:cNvSpPr/>
-          <p:nvPr/>
-        </p:nvSpPr>
-        <p:spPr>
-          <a:xfrm>
-            <a:off x="6872151" y="254297"/>
-            <a:ext cx="869524" cy="230832"/>
-          </a:xfrm>
-          <a:prstGeom prst="rect">
-            <a:avLst/>
-          </a:prstGeom>
-          <a:noFill/>
-        </p:spPr>
-        <p:txBody>
-          <a:bodyPr wrap="square" lIns="91440" tIns="45720" rIns="91440" bIns="45720">
-            <a:spAutoFit/>
-          </a:bodyPr>
-          <a:lstStyle/>
-          <a:p>
-            <a:pPr algn="ctr"/>
-            <a:r>
-              <a:rPr lang="en-US" altLang="zh-CN" sz="900" b="1" i="0" dirty="0">
-                <a:effectLst/>
-                <a:latin typeface="??"/>
-              </a:rPr>
-              <a:t>1️⃣</a:t>
-            </a:r>
-            <a:r>
-              <a:rPr lang="zh-CN" altLang="en-US" sz="900" b="1" i="0" dirty="0">
-                <a:effectLst/>
-                <a:latin typeface="??"/>
-              </a:rPr>
-              <a:t>文本嵌入</a:t>
-            </a:r>
-            <a:endParaRPr lang="zh-CN" altLang="en-US" sz="900" b="0" cap="none" spc="0" dirty="0">
-              <a:ln w="0"/>
-              <a:effectLst>
-                <a:outerShdw blurRad="38100" dist="19050" dir="2700000" algn="tl" rotWithShape="0">
-                  <a:schemeClr val="dk1">
-                    <a:alpha val="40000"/>
-                  </a:schemeClr>
-                </a:outerShdw>
-              </a:effectLst>
-              <a:latin typeface="Times New Roman" panose="02020603050405020304" pitchFamily="18" charset="0"/>
-              <a:cs typeface="Times New Roman" panose="02020603050405020304" pitchFamily="18" charset="0"/>
-            </a:endParaRPr>
           </a:p>
         </p:txBody>
       </p:sp>
@@ -31399,7 +31064,7 @@
           <a:graphicData uri="http://schemas.openxmlformats.org/presentationml/2006/ole">
             <mc:AlternateContent xmlns:mc="http://schemas.openxmlformats.org/markup-compatibility/2006">
               <mc:Choice xmlns:v="urn:schemas-microsoft-com:vml" Requires="v">
-                <p:oleObj spid="_x0000_s1833" name="Equation" r:id="rId4" imgW="368526" imgH="101647" progId="Equation.DSMT4">
+                <p:oleObj spid="_x0000_s2007" name="Equation" r:id="rId4" imgW="368526" imgH="101647" progId="Equation.DSMT4">
                   <p:embed/>
                 </p:oleObj>
               </mc:Choice>
@@ -31462,7 +31127,7 @@
           <a:graphicData uri="http://schemas.openxmlformats.org/presentationml/2006/ole">
             <mc:AlternateContent xmlns:mc="http://schemas.openxmlformats.org/markup-compatibility/2006">
               <mc:Choice xmlns:v="urn:schemas-microsoft-com:vml" Requires="v">
-                <p:oleObj spid="_x0000_s1834" name="Equation" r:id="rId6" imgW="406400" imgH="196915" progId="Equation.DSMT4">
+                <p:oleObj spid="_x0000_s2008" name="Equation" r:id="rId6" imgW="406400" imgH="196915" progId="Equation.DSMT4">
                   <p:embed/>
                 </p:oleObj>
               </mc:Choice>
@@ -31525,7 +31190,7 @@
           <a:graphicData uri="http://schemas.openxmlformats.org/presentationml/2006/ole">
             <mc:AlternateContent xmlns:mc="http://schemas.openxmlformats.org/markup-compatibility/2006">
               <mc:Choice xmlns:v="urn:schemas-microsoft-com:vml" Requires="v">
-                <p:oleObj spid="_x0000_s1835" name="Equation" r:id="rId8" imgW="419166" imgH="196915" progId="Equation.DSMT4">
+                <p:oleObj spid="_x0000_s2009" name="Equation" r:id="rId8" imgW="419166" imgH="196915" progId="Equation.DSMT4">
                   <p:embed/>
                 </p:oleObj>
               </mc:Choice>
@@ -31588,7 +31253,7 @@
           <a:graphicData uri="http://schemas.openxmlformats.org/presentationml/2006/ole">
             <mc:AlternateContent xmlns:mc="http://schemas.openxmlformats.org/markup-compatibility/2006">
               <mc:Choice xmlns:v="urn:schemas-microsoft-com:vml" Requires="v">
-                <p:oleObj spid="_x0000_s1836" name="Equation" r:id="rId10" imgW="406400" imgH="196915" progId="Equation.DSMT4">
+                <p:oleObj spid="_x0000_s2010" name="Equation" r:id="rId10" imgW="406400" imgH="196915" progId="Equation.DSMT4">
                   <p:embed/>
                 </p:oleObj>
               </mc:Choice>
@@ -31651,7 +31316,7 @@
           <a:graphicData uri="http://schemas.openxmlformats.org/presentationml/2006/ole">
             <mc:AlternateContent xmlns:mc="http://schemas.openxmlformats.org/markup-compatibility/2006">
               <mc:Choice xmlns:v="urn:schemas-microsoft-com:vml" Requires="v">
-                <p:oleObj spid="_x0000_s1837" name="Equation" r:id="rId12" imgW="419166" imgH="196915" progId="Equation.DSMT4">
+                <p:oleObj spid="_x0000_s2011" name="Equation" r:id="rId12" imgW="419166" imgH="196915" progId="Equation.DSMT4">
                   <p:embed/>
                 </p:oleObj>
               </mc:Choice>
@@ -31935,7 +31600,7 @@
             <a:graphicData uri="http://schemas.openxmlformats.org/presentationml/2006/ole">
               <mc:AlternateContent xmlns:mc="http://schemas.openxmlformats.org/markup-compatibility/2006">
                 <mc:Choice xmlns:v="urn:schemas-microsoft-com:vml" Requires="v">
-                  <p:oleObj spid="_x0000_s1838" name="Equation" r:id="rId14" imgW="545760" imgH="241200" progId="Equation.DSMT4">
+                  <p:oleObj spid="_x0000_s2012" name="Equation" r:id="rId14" imgW="545760" imgH="241200" progId="Equation.DSMT4">
                     <p:embed/>
                   </p:oleObj>
                 </mc:Choice>
@@ -32058,7 +31723,7 @@
             <a:graphicData uri="http://schemas.openxmlformats.org/presentationml/2006/ole">
               <mc:AlternateContent xmlns:mc="http://schemas.openxmlformats.org/markup-compatibility/2006">
                 <mc:Choice xmlns:v="urn:schemas-microsoft-com:vml" Requires="v">
-                  <p:oleObj spid="_x0000_s1839" name="Equation" r:id="rId16" imgW="545760" imgH="241200" progId="Equation.DSMT4">
+                  <p:oleObj spid="_x0000_s2013" name="Equation" r:id="rId16" imgW="545760" imgH="241200" progId="Equation.DSMT4">
                     <p:embed/>
                   </p:oleObj>
                 </mc:Choice>
@@ -32181,7 +31846,7 @@
             <a:graphicData uri="http://schemas.openxmlformats.org/presentationml/2006/ole">
               <mc:AlternateContent xmlns:mc="http://schemas.openxmlformats.org/markup-compatibility/2006">
                 <mc:Choice xmlns:v="urn:schemas-microsoft-com:vml" Requires="v">
-                  <p:oleObj spid="_x0000_s1840" name="Equation" r:id="rId18" imgW="545760" imgH="241200" progId="Equation.DSMT4">
+                  <p:oleObj spid="_x0000_s2014" name="Equation" r:id="rId18" imgW="545760" imgH="241200" progId="Equation.DSMT4">
                     <p:embed/>
                   </p:oleObj>
                 </mc:Choice>
@@ -32394,7 +32059,7 @@
           <a:graphicData uri="http://schemas.openxmlformats.org/presentationml/2006/ole">
             <mc:AlternateContent xmlns:mc="http://schemas.openxmlformats.org/markup-compatibility/2006">
               <mc:Choice xmlns:v="urn:schemas-microsoft-com:vml" Requires="v">
-                <p:oleObj spid="_x0000_s1841" name="Equation" r:id="rId20" imgW="533160" imgH="241200" progId="Equation.DSMT4">
+                <p:oleObj spid="_x0000_s2015" name="Equation" r:id="rId20" imgW="533160" imgH="241200" progId="Equation.DSMT4">
                   <p:embed/>
                 </p:oleObj>
               </mc:Choice>
@@ -32517,7 +32182,7 @@
           <a:graphicData uri="http://schemas.openxmlformats.org/presentationml/2006/ole">
             <mc:AlternateContent xmlns:mc="http://schemas.openxmlformats.org/markup-compatibility/2006">
               <mc:Choice xmlns:v="urn:schemas-microsoft-com:vml" Requires="v">
-                <p:oleObj spid="_x0000_s1842" name="Equation" r:id="rId22" imgW="545760" imgH="241200" progId="Equation.DSMT4">
+                <p:oleObj spid="_x0000_s2016" name="Equation" r:id="rId22" imgW="545760" imgH="241200" progId="Equation.DSMT4">
                   <p:embed/>
                 </p:oleObj>
               </mc:Choice>
@@ -32629,7 +32294,7 @@
           <a:graphicData uri="http://schemas.openxmlformats.org/presentationml/2006/ole">
             <mc:AlternateContent xmlns:mc="http://schemas.openxmlformats.org/markup-compatibility/2006">
               <mc:Choice xmlns:v="urn:schemas-microsoft-com:vml" Requires="v">
-                <p:oleObj spid="_x0000_s1843" name="Equation" r:id="rId24" imgW="368526" imgH="101647" progId="Equation.DSMT4">
+                <p:oleObj spid="_x0000_s2017" name="Equation" r:id="rId24" imgW="368526" imgH="101647" progId="Equation.DSMT4">
                   <p:embed/>
                 </p:oleObj>
               </mc:Choice>
@@ -32841,7 +32506,7 @@
           <a:graphicData uri="http://schemas.openxmlformats.org/presentationml/2006/ole">
             <mc:AlternateContent xmlns:mc="http://schemas.openxmlformats.org/markup-compatibility/2006">
               <mc:Choice xmlns:v="urn:schemas-microsoft-com:vml" Requires="v">
-                <p:oleObj spid="_x0000_s1844" name="Equation" r:id="rId26" imgW="558720" imgH="241200" progId="Equation.DSMT4">
+                <p:oleObj spid="_x0000_s2018" name="Equation" r:id="rId26" imgW="558720" imgH="241200" progId="Equation.DSMT4">
                   <p:embed/>
                 </p:oleObj>
               </mc:Choice>
@@ -33154,7 +32819,7 @@
           <a:graphicData uri="http://schemas.openxmlformats.org/presentationml/2006/ole">
             <mc:AlternateContent xmlns:mc="http://schemas.openxmlformats.org/markup-compatibility/2006">
               <mc:Choice xmlns:v="urn:schemas-microsoft-com:vml" Requires="v">
-                <p:oleObj spid="_x0000_s1845" name="Equation" r:id="rId28" imgW="571320" imgH="253800" progId="Equation.DSMT4">
+                <p:oleObj spid="_x0000_s2019" name="Equation" r:id="rId28" imgW="571320" imgH="253800" progId="Equation.DSMT4">
                   <p:embed/>
                 </p:oleObj>
               </mc:Choice>
@@ -33280,7 +32945,7 @@
           <a:graphicData uri="http://schemas.openxmlformats.org/presentationml/2006/ole">
             <mc:AlternateContent xmlns:mc="http://schemas.openxmlformats.org/markup-compatibility/2006">
               <mc:Choice xmlns:v="urn:schemas-microsoft-com:vml" Requires="v">
-                <p:oleObj spid="_x0000_s1846" name="Equation" r:id="rId30" imgW="583920" imgH="253800" progId="Equation.DSMT4">
+                <p:oleObj spid="_x0000_s2020" name="Equation" r:id="rId30" imgW="583920" imgH="253800" progId="Equation.DSMT4">
                   <p:embed/>
                 </p:oleObj>
               </mc:Choice>
@@ -33406,7 +33071,7 @@
           <a:graphicData uri="http://schemas.openxmlformats.org/presentationml/2006/ole">
             <mc:AlternateContent xmlns:mc="http://schemas.openxmlformats.org/markup-compatibility/2006">
               <mc:Choice xmlns:v="urn:schemas-microsoft-com:vml" Requires="v">
-                <p:oleObj spid="_x0000_s1847" name="Equation" r:id="rId32" imgW="596880" imgH="253800" progId="Equation.DSMT4">
+                <p:oleObj spid="_x0000_s2021" name="Equation" r:id="rId32" imgW="596880" imgH="253800" progId="Equation.DSMT4">
                   <p:embed/>
                 </p:oleObj>
               </mc:Choice>
@@ -33762,7 +33427,7 @@
           <a:graphicData uri="http://schemas.openxmlformats.org/presentationml/2006/ole">
             <mc:AlternateContent xmlns:mc="http://schemas.openxmlformats.org/markup-compatibility/2006">
               <mc:Choice xmlns:v="urn:schemas-microsoft-com:vml" Requires="v">
-                <p:oleObj spid="_x0000_s1848" name="Equation" r:id="rId34" imgW="368526" imgH="101647" progId="Equation.DSMT4">
+                <p:oleObj spid="_x0000_s2022" name="Equation" r:id="rId34" imgW="368526" imgH="101647" progId="Equation.DSMT4">
                   <p:embed/>
                 </p:oleObj>
               </mc:Choice>
@@ -33885,7 +33550,7 @@
           <a:graphicData uri="http://schemas.openxmlformats.org/presentationml/2006/ole">
             <mc:AlternateContent xmlns:mc="http://schemas.openxmlformats.org/markup-compatibility/2006">
               <mc:Choice xmlns:v="urn:schemas-microsoft-com:vml" Requires="v">
-                <p:oleObj spid="_x0000_s1849" name="Equation" r:id="rId36" imgW="609813" imgH="196915" progId="Equation.DSMT4">
+                <p:oleObj spid="_x0000_s2023" name="Equation" r:id="rId36" imgW="609813" imgH="196915" progId="Equation.DSMT4">
                   <p:embed/>
                 </p:oleObj>
               </mc:Choice>
@@ -34184,7 +33849,7 @@
           <a:graphicData uri="http://schemas.openxmlformats.org/presentationml/2006/ole">
             <mc:AlternateContent xmlns:mc="http://schemas.openxmlformats.org/markup-compatibility/2006">
               <mc:Choice xmlns:v="urn:schemas-microsoft-com:vml" Requires="v">
-                <p:oleObj spid="_x0000_s1850" name="Equation" r:id="rId38" imgW="597046" imgH="196915" progId="Equation.DSMT4">
+                <p:oleObj spid="_x0000_s2024" name="Equation" r:id="rId38" imgW="597046" imgH="196915" progId="Equation.DSMT4">
                   <p:embed/>
                 </p:oleObj>
               </mc:Choice>
@@ -34247,7 +33912,7 @@
           <a:graphicData uri="http://schemas.openxmlformats.org/presentationml/2006/ole">
             <mc:AlternateContent xmlns:mc="http://schemas.openxmlformats.org/markup-compatibility/2006">
               <mc:Choice xmlns:v="urn:schemas-microsoft-com:vml" Requires="v">
-                <p:oleObj spid="_x0000_s1851" name="Equation" r:id="rId40" imgW="584280" imgH="196915" progId="Equation.DSMT4">
+                <p:oleObj spid="_x0000_s2025" name="Equation" r:id="rId40" imgW="584280" imgH="196915" progId="Equation.DSMT4">
                   <p:embed/>
                 </p:oleObj>
               </mc:Choice>
@@ -34310,7 +33975,7 @@
           <a:graphicData uri="http://schemas.openxmlformats.org/presentationml/2006/ole">
             <mc:AlternateContent xmlns:mc="http://schemas.openxmlformats.org/markup-compatibility/2006">
               <mc:Choice xmlns:v="urn:schemas-microsoft-com:vml" Requires="v">
-                <p:oleObj spid="_x0000_s1852" name="Equation" r:id="rId42" imgW="228600" imgH="101520" progId="Equation.DSMT4">
+                <p:oleObj spid="_x0000_s2026" name="Equation" r:id="rId42" imgW="228600" imgH="101520" progId="Equation.DSMT4">
                   <p:embed/>
                 </p:oleObj>
               </mc:Choice>
@@ -34644,7 +34309,7 @@
           <a:graphicData uri="http://schemas.openxmlformats.org/presentationml/2006/ole">
             <mc:AlternateContent xmlns:mc="http://schemas.openxmlformats.org/markup-compatibility/2006">
               <mc:Choice xmlns:v="urn:schemas-microsoft-com:vml" Requires="v">
-                <p:oleObj spid="_x0000_s1853" name="Equation" r:id="rId44" imgW="1777680" imgH="330120" progId="Equation.DSMT4">
+                <p:oleObj spid="_x0000_s2027" name="Equation" r:id="rId44" imgW="1777680" imgH="330120" progId="Equation.DSMT4">
                   <p:embed/>
                 </p:oleObj>
               </mc:Choice>
@@ -35086,7 +34751,7 @@
           <a:graphicData uri="http://schemas.openxmlformats.org/presentationml/2006/ole">
             <mc:AlternateContent xmlns:mc="http://schemas.openxmlformats.org/markup-compatibility/2006">
               <mc:Choice xmlns:v="urn:schemas-microsoft-com:vml" Requires="v">
-                <p:oleObj spid="_x0000_s1854" name="Equation" r:id="rId46" imgW="749160" imgH="253800" progId="Equation.DSMT4">
+                <p:oleObj spid="_x0000_s2028" name="Equation" r:id="rId46" imgW="749160" imgH="253800" progId="Equation.DSMT4">
                   <p:embed/>
                 </p:oleObj>
               </mc:Choice>
@@ -35215,7 +34880,7 @@
           <a:graphicData uri="http://schemas.openxmlformats.org/presentationml/2006/ole">
             <mc:AlternateContent xmlns:mc="http://schemas.openxmlformats.org/markup-compatibility/2006">
               <mc:Choice xmlns:v="urn:schemas-microsoft-com:vml" Requires="v">
-                <p:oleObj spid="_x0000_s1855" name="Equation" r:id="rId48" imgW="761760" imgH="253800" progId="Equation.DSMT4">
+                <p:oleObj spid="_x0000_s2029" name="Equation" r:id="rId48" imgW="761760" imgH="253800" progId="Equation.DSMT4">
                   <p:embed/>
                 </p:oleObj>
               </mc:Choice>
@@ -35344,7 +35009,7 @@
           <a:graphicData uri="http://schemas.openxmlformats.org/presentationml/2006/ole">
             <mc:AlternateContent xmlns:mc="http://schemas.openxmlformats.org/markup-compatibility/2006">
               <mc:Choice xmlns:v="urn:schemas-microsoft-com:vml" Requires="v">
-                <p:oleObj spid="_x0000_s1856" name="Equation" r:id="rId50" imgW="761760" imgH="253800" progId="Equation.DSMT4">
+                <p:oleObj spid="_x0000_s2030" name="Equation" r:id="rId50" imgW="761760" imgH="253800" progId="Equation.DSMT4">
                   <p:embed/>
                 </p:oleObj>
               </mc:Choice>
@@ -35413,7 +35078,7 @@
           <a:graphicData uri="http://schemas.openxmlformats.org/presentationml/2006/ole">
             <mc:AlternateContent xmlns:mc="http://schemas.openxmlformats.org/markup-compatibility/2006">
               <mc:Choice xmlns:v="urn:schemas-microsoft-com:vml" Requires="v">
-                <p:oleObj spid="_x0000_s1857" name="Equation" r:id="rId52" imgW="317160" imgH="101520" progId="Equation.DSMT4">
+                <p:oleObj spid="_x0000_s2031" name="Equation" r:id="rId52" imgW="317160" imgH="101520" progId="Equation.DSMT4">
                   <p:embed/>
                 </p:oleObj>
               </mc:Choice>
@@ -35536,7 +35201,7 @@
           <a:graphicData uri="http://schemas.openxmlformats.org/presentationml/2006/ole">
             <mc:AlternateContent xmlns:mc="http://schemas.openxmlformats.org/markup-compatibility/2006">
               <mc:Choice xmlns:v="urn:schemas-microsoft-com:vml" Requires="v">
-                <p:oleObj spid="_x0000_s1858" name="Equation" r:id="rId54" imgW="901440" imgH="266400" progId="Equation.DSMT4">
+                <p:oleObj spid="_x0000_s2032" name="Equation" r:id="rId54" imgW="901440" imgH="266400" progId="Equation.DSMT4">
                   <p:embed/>
                 </p:oleObj>
               </mc:Choice>
@@ -35792,168 +35457,6 @@
       </p:sp>
       <p:cxnSp>
         <p:nvCxnSpPr>
-          <p:cNvPr id="150" name="直接箭头连接符 149">
-            <a:extLst>
-              <a:ext uri="{FF2B5EF4-FFF2-40B4-BE49-F238E27FC236}">
-                <a16:creationId xmlns:a16="http://schemas.microsoft.com/office/drawing/2014/main" id="{2CC6A8B1-51F6-41E7-898B-4D4BDB6E2DB1}"/>
-              </a:ext>
-            </a:extLst>
-          </p:cNvPr>
-          <p:cNvCxnSpPr>
-            <a:cxnSpLocks/>
-          </p:cNvCxnSpPr>
-          <p:nvPr/>
-        </p:nvCxnSpPr>
-        <p:spPr>
-          <a:xfrm flipH="1" flipV="1">
-            <a:off x="6765537" y="541379"/>
-            <a:ext cx="883768" cy="9620"/>
-          </a:xfrm>
-          <a:prstGeom prst="straightConnector1">
-            <a:avLst/>
-          </a:prstGeom>
-          <a:ln w="19050">
-            <a:tailEnd type="triangle"/>
-          </a:ln>
-        </p:spPr>
-        <p:style>
-          <a:lnRef idx="1">
-            <a:schemeClr val="accent1"/>
-          </a:lnRef>
-          <a:fillRef idx="0">
-            <a:schemeClr val="accent1"/>
-          </a:fillRef>
-          <a:effectRef idx="0">
-            <a:schemeClr val="accent1"/>
-          </a:effectRef>
-          <a:fontRef idx="minor">
-            <a:schemeClr val="tx1"/>
-          </a:fontRef>
-        </p:style>
-      </p:cxnSp>
-      <p:cxnSp>
-        <p:nvCxnSpPr>
-          <p:cNvPr id="151" name="直接箭头连接符 150">
-            <a:extLst>
-              <a:ext uri="{FF2B5EF4-FFF2-40B4-BE49-F238E27FC236}">
-                <a16:creationId xmlns:a16="http://schemas.microsoft.com/office/drawing/2014/main" id="{6A043640-A248-4BD1-8919-48D8065E0FA6}"/>
-              </a:ext>
-            </a:extLst>
-          </p:cNvPr>
-          <p:cNvCxnSpPr>
-            <a:cxnSpLocks/>
-          </p:cNvCxnSpPr>
-          <p:nvPr/>
-        </p:nvCxnSpPr>
-        <p:spPr>
-          <a:xfrm flipH="1">
-            <a:off x="6839411" y="629459"/>
-            <a:ext cx="813586" cy="0"/>
-          </a:xfrm>
-          <a:prstGeom prst="straightConnector1">
-            <a:avLst/>
-          </a:prstGeom>
-          <a:ln w="19050">
-            <a:tailEnd type="triangle"/>
-          </a:ln>
-        </p:spPr>
-        <p:style>
-          <a:lnRef idx="1">
-            <a:schemeClr val="accent1"/>
-          </a:lnRef>
-          <a:fillRef idx="0">
-            <a:schemeClr val="accent1"/>
-          </a:fillRef>
-          <a:effectRef idx="0">
-            <a:schemeClr val="accent1"/>
-          </a:effectRef>
-          <a:fontRef idx="minor">
-            <a:schemeClr val="tx1"/>
-          </a:fontRef>
-        </p:style>
-      </p:cxnSp>
-      <p:cxnSp>
-        <p:nvCxnSpPr>
-          <p:cNvPr id="152" name="直接箭头连接符 151">
-            <a:extLst>
-              <a:ext uri="{FF2B5EF4-FFF2-40B4-BE49-F238E27FC236}">
-                <a16:creationId xmlns:a16="http://schemas.microsoft.com/office/drawing/2014/main" id="{A2BC1A19-FE98-4182-9365-01EAE8C6BDED}"/>
-              </a:ext>
-            </a:extLst>
-          </p:cNvPr>
-          <p:cNvCxnSpPr>
-            <a:cxnSpLocks/>
-          </p:cNvCxnSpPr>
-          <p:nvPr/>
-        </p:nvCxnSpPr>
-        <p:spPr>
-          <a:xfrm flipH="1">
-            <a:off x="7198717" y="864187"/>
-            <a:ext cx="454280" cy="0"/>
-          </a:xfrm>
-          <a:prstGeom prst="straightConnector1">
-            <a:avLst/>
-          </a:prstGeom>
-          <a:ln w="19050">
-            <a:tailEnd type="triangle"/>
-          </a:ln>
-        </p:spPr>
-        <p:style>
-          <a:lnRef idx="1">
-            <a:schemeClr val="accent1"/>
-          </a:lnRef>
-          <a:fillRef idx="0">
-            <a:schemeClr val="accent1"/>
-          </a:fillRef>
-          <a:effectRef idx="0">
-            <a:schemeClr val="accent1"/>
-          </a:effectRef>
-          <a:fontRef idx="minor">
-            <a:schemeClr val="tx1"/>
-          </a:fontRef>
-        </p:style>
-      </p:cxnSp>
-      <p:cxnSp>
-        <p:nvCxnSpPr>
-          <p:cNvPr id="48" name="直接连接符 47">
-            <a:extLst>
-              <a:ext uri="{FF2B5EF4-FFF2-40B4-BE49-F238E27FC236}">
-                <a16:creationId xmlns:a16="http://schemas.microsoft.com/office/drawing/2014/main" id="{C3DEFE05-56E0-458C-8DAD-D9EA7098A07E}"/>
-              </a:ext>
-            </a:extLst>
-          </p:cNvPr>
-          <p:cNvCxnSpPr>
-            <a:cxnSpLocks/>
-          </p:cNvCxnSpPr>
-          <p:nvPr/>
-        </p:nvCxnSpPr>
-        <p:spPr>
-          <a:xfrm flipH="1">
-            <a:off x="7646292" y="456400"/>
-            <a:ext cx="3012" cy="414972"/>
-          </a:xfrm>
-          <a:prstGeom prst="line">
-            <a:avLst/>
-          </a:prstGeom>
-          <a:ln w="19050"/>
-        </p:spPr>
-        <p:style>
-          <a:lnRef idx="1">
-            <a:schemeClr val="accent1"/>
-          </a:lnRef>
-          <a:fillRef idx="0">
-            <a:schemeClr val="accent1"/>
-          </a:fillRef>
-          <a:effectRef idx="0">
-            <a:schemeClr val="accent1"/>
-          </a:effectRef>
-          <a:fontRef idx="minor">
-            <a:schemeClr val="tx1"/>
-          </a:fontRef>
-        </p:style>
-      </p:cxnSp>
-      <p:cxnSp>
-        <p:nvCxnSpPr>
           <p:cNvPr id="166" name="直接箭头连接符 165">
             <a:extLst>
               <a:ext uri="{FF2B5EF4-FFF2-40B4-BE49-F238E27FC236}">
@@ -36065,25 +35568,25 @@
           <p:nvPr>
             <p:extLst>
               <p:ext uri="{D42A27DB-BD31-4B8C-83A1-F6EECF244321}">
-                <p14:modId xmlns:p14="http://schemas.microsoft.com/office/powerpoint/2010/main" val="3269722711"/>
+                <p14:modId xmlns:p14="http://schemas.microsoft.com/office/powerpoint/2010/main" val="2774568190"/>
               </p:ext>
             </p:extLst>
           </p:nvPr>
         </p:nvGraphicFramePr>
         <p:xfrm>
-          <a:off x="3544515" y="5979822"/>
-          <a:ext cx="2108200" cy="304800"/>
+          <a:off x="3538538" y="5980113"/>
+          <a:ext cx="2120900" cy="304800"/>
         </p:xfrm>
         <a:graphic>
           <a:graphicData uri="http://schemas.openxmlformats.org/presentationml/2006/ole">
             <mc:AlternateContent xmlns:mc="http://schemas.openxmlformats.org/markup-compatibility/2006">
               <mc:Choice xmlns:v="urn:schemas-microsoft-com:vml" Requires="v">
-                <p:oleObj spid="_x0000_s1859" name="Equation" r:id="rId56" imgW="2108160" imgH="304560" progId="Equation.DSMT4">
+                <p:oleObj spid="_x0000_s2033" name="Equation" r:id="rId56" imgW="2120760" imgH="304560" progId="Equation.DSMT4">
                   <p:embed/>
                 </p:oleObj>
               </mc:Choice>
               <mc:Fallback>
-                <p:oleObj name="Equation" r:id="rId56" imgW="2108160" imgH="304560" progId="Equation.DSMT4">
+                <p:oleObj name="Equation" r:id="rId56" imgW="2120760" imgH="304560" progId="Equation.DSMT4">
                   <p:embed/>
                   <p:pic>
                     <p:nvPicPr>
@@ -36099,8 +35602,8 @@
                     </p:blipFill>
                     <p:spPr>
                       <a:xfrm>
-                        <a:off x="3544515" y="5979822"/>
-                        <a:ext cx="2108200" cy="304800"/>
+                        <a:off x="3538538" y="5980113"/>
+                        <a:ext cx="2120900" cy="304800"/>
                       </a:xfrm>
                       <a:prstGeom prst="rect">
                         <a:avLst/>
@@ -36438,10 +35941,1640 @@
           </a:p>
         </p:txBody>
       </p:sp>
+      <p:pic>
+        <p:nvPicPr>
+          <p:cNvPr id="8" name="图片 7">
+            <a:extLst>
+              <a:ext uri="{FF2B5EF4-FFF2-40B4-BE49-F238E27FC236}">
+                <a16:creationId xmlns:a16="http://schemas.microsoft.com/office/drawing/2014/main" id="{27991D22-475E-4FFF-8328-A5E6684E1D9D}"/>
+              </a:ext>
+            </a:extLst>
+          </p:cNvPr>
+          <p:cNvPicPr>
+            <a:picLocks noChangeAspect="1"/>
+          </p:cNvPicPr>
+          <p:nvPr/>
+        </p:nvPicPr>
+        <p:blipFill>
+          <a:blip r:embed="rId58"/>
+          <a:stretch>
+            <a:fillRect/>
+          </a:stretch>
+        </p:blipFill>
+        <p:spPr>
+          <a:xfrm>
+            <a:off x="2860807" y="2401409"/>
+            <a:ext cx="466512" cy="150312"/>
+          </a:xfrm>
+          <a:prstGeom prst="rect">
+            <a:avLst/>
+          </a:prstGeom>
+        </p:spPr>
+      </p:pic>
+      <p:pic>
+        <p:nvPicPr>
+          <p:cNvPr id="136" name="图片 135">
+            <a:extLst>
+              <a:ext uri="{FF2B5EF4-FFF2-40B4-BE49-F238E27FC236}">
+                <a16:creationId xmlns:a16="http://schemas.microsoft.com/office/drawing/2014/main" id="{2998672C-1E9A-47CA-9541-8A603390D357}"/>
+              </a:ext>
+            </a:extLst>
+          </p:cNvPr>
+          <p:cNvPicPr>
+            <a:picLocks noChangeAspect="1"/>
+          </p:cNvPicPr>
+          <p:nvPr/>
+        </p:nvPicPr>
+        <p:blipFill>
+          <a:blip r:embed="rId58"/>
+          <a:stretch>
+            <a:fillRect/>
+          </a:stretch>
+        </p:blipFill>
+        <p:spPr>
+          <a:xfrm>
+            <a:off x="4062192" y="2408084"/>
+            <a:ext cx="466512" cy="150312"/>
+          </a:xfrm>
+          <a:prstGeom prst="rect">
+            <a:avLst/>
+          </a:prstGeom>
+        </p:spPr>
+      </p:pic>
+      <p:pic>
+        <p:nvPicPr>
+          <p:cNvPr id="153" name="图片 152">
+            <a:extLst>
+              <a:ext uri="{FF2B5EF4-FFF2-40B4-BE49-F238E27FC236}">
+                <a16:creationId xmlns:a16="http://schemas.microsoft.com/office/drawing/2014/main" id="{81CDC2F1-7C64-4186-AE58-F39E42F41120}"/>
+              </a:ext>
+            </a:extLst>
+          </p:cNvPr>
+          <p:cNvPicPr>
+            <a:picLocks noChangeAspect="1"/>
+          </p:cNvPicPr>
+          <p:nvPr/>
+        </p:nvPicPr>
+        <p:blipFill>
+          <a:blip r:embed="rId58"/>
+          <a:stretch>
+            <a:fillRect/>
+          </a:stretch>
+        </p:blipFill>
+        <p:spPr>
+          <a:xfrm>
+            <a:off x="5600537" y="2401409"/>
+            <a:ext cx="466512" cy="150312"/>
+          </a:xfrm>
+          <a:prstGeom prst="rect">
+            <a:avLst/>
+          </a:prstGeom>
+        </p:spPr>
+      </p:pic>
+      <p:graphicFrame>
+        <p:nvGraphicFramePr>
+          <p:cNvPr id="11" name="对象 10">
+            <a:extLst>
+              <a:ext uri="{FF2B5EF4-FFF2-40B4-BE49-F238E27FC236}">
+                <a16:creationId xmlns:a16="http://schemas.microsoft.com/office/drawing/2014/main" id="{C963CE6E-AE0D-41C6-8791-FF6F3F7B3578}"/>
+              </a:ext>
+            </a:extLst>
+          </p:cNvPr>
+          <p:cNvGraphicFramePr>
+            <a:graphicFrameLocks noChangeAspect="1"/>
+          </p:cNvGraphicFramePr>
+          <p:nvPr>
+            <p:extLst>
+              <p:ext uri="{D42A27DB-BD31-4B8C-83A1-F6EECF244321}">
+                <p14:modId xmlns:p14="http://schemas.microsoft.com/office/powerpoint/2010/main" val="2788893650"/>
+              </p:ext>
+            </p:extLst>
+          </p:nvPr>
+        </p:nvGraphicFramePr>
+        <p:xfrm>
+          <a:off x="4106348" y="2371636"/>
+          <a:ext cx="348296" cy="195917"/>
+        </p:xfrm>
+        <a:graphic>
+          <a:graphicData uri="http://schemas.openxmlformats.org/presentationml/2006/ole">
+            <mc:AlternateContent xmlns:mc="http://schemas.openxmlformats.org/markup-compatibility/2006">
+              <mc:Choice xmlns:v="urn:schemas-microsoft-com:vml" Requires="v">
+                <p:oleObj spid="_x0000_s2034" name="Equation" r:id="rId59" imgW="406080" imgH="228600" progId="Equation.DSMT4">
+                  <p:embed/>
+                </p:oleObj>
+              </mc:Choice>
+              <mc:Fallback>
+                <p:oleObj name="Equation" r:id="rId59" imgW="406080" imgH="228600" progId="Equation.DSMT4">
+                  <p:embed/>
+                  <p:pic>
+                    <p:nvPicPr>
+                      <p:cNvPr id="0" name=""/>
+                      <p:cNvPicPr/>
+                      <p:nvPr/>
+                    </p:nvPicPr>
+                    <p:blipFill>
+                      <a:blip r:embed="rId60"/>
+                      <a:stretch>
+                        <a:fillRect/>
+                      </a:stretch>
+                    </p:blipFill>
+                    <p:spPr>
+                      <a:xfrm>
+                        <a:off x="4106348" y="2371636"/>
+                        <a:ext cx="348296" cy="195917"/>
+                      </a:xfrm>
+                      <a:prstGeom prst="rect">
+                        <a:avLst/>
+                      </a:prstGeom>
+                    </p:spPr>
+                  </p:pic>
+                </p:oleObj>
+              </mc:Fallback>
+            </mc:AlternateContent>
+          </a:graphicData>
+        </a:graphic>
+      </p:graphicFrame>
+      <p:graphicFrame>
+        <p:nvGraphicFramePr>
+          <p:cNvPr id="12" name="对象 11">
+            <a:extLst>
+              <a:ext uri="{FF2B5EF4-FFF2-40B4-BE49-F238E27FC236}">
+                <a16:creationId xmlns:a16="http://schemas.microsoft.com/office/drawing/2014/main" id="{8840EAE4-5A91-41F2-8838-BFE707E5B6CB}"/>
+              </a:ext>
+            </a:extLst>
+          </p:cNvPr>
+          <p:cNvGraphicFramePr>
+            <a:graphicFrameLocks noChangeAspect="1"/>
+          </p:cNvGraphicFramePr>
+          <p:nvPr>
+            <p:extLst>
+              <p:ext uri="{D42A27DB-BD31-4B8C-83A1-F6EECF244321}">
+                <p14:modId xmlns:p14="http://schemas.microsoft.com/office/powerpoint/2010/main" val="2273244922"/>
+              </p:ext>
+            </p:extLst>
+          </p:nvPr>
+        </p:nvGraphicFramePr>
+        <p:xfrm>
+          <a:off x="5633866" y="2363114"/>
+          <a:ext cx="363537" cy="211137"/>
+        </p:xfrm>
+        <a:graphic>
+          <a:graphicData uri="http://schemas.openxmlformats.org/presentationml/2006/ole">
+            <mc:AlternateContent xmlns:mc="http://schemas.openxmlformats.org/markup-compatibility/2006">
+              <mc:Choice xmlns:v="urn:schemas-microsoft-com:vml" Requires="v">
+                <p:oleObj spid="_x0000_s2035" name="Equation" r:id="rId61" imgW="393480" imgH="228600" progId="Equation.DSMT4">
+                  <p:embed/>
+                </p:oleObj>
+              </mc:Choice>
+              <mc:Fallback>
+                <p:oleObj name="Equation" r:id="rId61" imgW="393480" imgH="228600" progId="Equation.DSMT4">
+                  <p:embed/>
+                  <p:pic>
+                    <p:nvPicPr>
+                      <p:cNvPr id="0" name=""/>
+                      <p:cNvPicPr/>
+                      <p:nvPr/>
+                    </p:nvPicPr>
+                    <p:blipFill>
+                      <a:blip r:embed="rId62"/>
+                      <a:stretch>
+                        <a:fillRect/>
+                      </a:stretch>
+                    </p:blipFill>
+                    <p:spPr>
+                      <a:xfrm>
+                        <a:off x="5633866" y="2363114"/>
+                        <a:ext cx="363537" cy="211137"/>
+                      </a:xfrm>
+                      <a:prstGeom prst="rect">
+                        <a:avLst/>
+                      </a:prstGeom>
+                    </p:spPr>
+                  </p:pic>
+                </p:oleObj>
+              </mc:Fallback>
+            </mc:AlternateContent>
+          </a:graphicData>
+        </a:graphic>
+      </p:graphicFrame>
     </p:spTree>
     <p:extLst>
       <p:ext uri="{BB962C8B-B14F-4D97-AF65-F5344CB8AC3E}">
         <p14:creationId xmlns:p14="http://schemas.microsoft.com/office/powerpoint/2010/main" val="841068632"/>
+      </p:ext>
+    </p:extLst>
+  </p:cSld>
+  <p:clrMapOvr>
+    <a:masterClrMapping/>
+  </p:clrMapOvr>
+</p:sld>
+</file>
+
+<file path=ppt/slides/slide8.xml><?xml version="1.0" encoding="utf-8"?>
+<p:sld xmlns:a="http://schemas.openxmlformats.org/drawingml/2006/main" xmlns:r="http://schemas.openxmlformats.org/officeDocument/2006/relationships" xmlns:p="http://schemas.openxmlformats.org/presentationml/2006/main">
+  <p:cSld>
+    <p:spTree>
+      <p:nvGrpSpPr>
+        <p:cNvPr id="1" name=""/>
+        <p:cNvGrpSpPr/>
+        <p:nvPr/>
+      </p:nvGrpSpPr>
+      <p:grpSpPr>
+        <a:xfrm>
+          <a:off x="0" y="0"/>
+          <a:ext cx="0" cy="0"/>
+          <a:chOff x="0" y="0"/>
+          <a:chExt cx="0" cy="0"/>
+        </a:xfrm>
+      </p:grpSpPr>
+      <p:pic>
+        <p:nvPicPr>
+          <p:cNvPr id="4" name="图片 3">
+            <a:extLst>
+              <a:ext uri="{FF2B5EF4-FFF2-40B4-BE49-F238E27FC236}">
+                <a16:creationId xmlns:a16="http://schemas.microsoft.com/office/drawing/2014/main" id="{C2B92AC2-CC34-4BAF-B632-6C597435E437}"/>
+              </a:ext>
+            </a:extLst>
+          </p:cNvPr>
+          <p:cNvPicPr>
+            <a:picLocks noChangeAspect="1"/>
+          </p:cNvPicPr>
+          <p:nvPr/>
+        </p:nvPicPr>
+        <p:blipFill rotWithShape="1">
+          <a:blip r:embed="rId4">
+            <a:extLst>
+              <a:ext uri="{28A0092B-C50C-407E-A947-70E740481C1C}">
+                <a14:useLocalDpi xmlns:a14="http://schemas.microsoft.com/office/drawing/2010/main" val="0"/>
+              </a:ext>
+            </a:extLst>
+          </a:blip>
+          <a:srcRect b="10984"/>
+          <a:stretch/>
+        </p:blipFill>
+        <p:spPr>
+          <a:xfrm>
+            <a:off x="787650" y="55170"/>
+            <a:ext cx="5666564" cy="5406749"/>
+          </a:xfrm>
+          <a:prstGeom prst="rect">
+            <a:avLst/>
+          </a:prstGeom>
+        </p:spPr>
+      </p:pic>
+      <p:pic>
+        <p:nvPicPr>
+          <p:cNvPr id="160" name="图片 159">
+            <a:extLst>
+              <a:ext uri="{FF2B5EF4-FFF2-40B4-BE49-F238E27FC236}">
+                <a16:creationId xmlns:a16="http://schemas.microsoft.com/office/drawing/2014/main" id="{05626908-E856-4A10-8309-C08274E41D4B}"/>
+              </a:ext>
+            </a:extLst>
+          </p:cNvPr>
+          <p:cNvPicPr>
+            <a:picLocks noChangeAspect="1"/>
+          </p:cNvPicPr>
+          <p:nvPr/>
+        </p:nvPicPr>
+        <p:blipFill>
+          <a:blip r:embed="rId5"/>
+          <a:stretch>
+            <a:fillRect/>
+          </a:stretch>
+        </p:blipFill>
+        <p:spPr>
+          <a:xfrm>
+            <a:off x="4416116" y="2441156"/>
+            <a:ext cx="466512" cy="150312"/>
+          </a:xfrm>
+          <a:prstGeom prst="rect">
+            <a:avLst/>
+          </a:prstGeom>
+        </p:spPr>
+      </p:pic>
+      <p:pic>
+        <p:nvPicPr>
+          <p:cNvPr id="161" name="图片 160">
+            <a:extLst>
+              <a:ext uri="{FF2B5EF4-FFF2-40B4-BE49-F238E27FC236}">
+                <a16:creationId xmlns:a16="http://schemas.microsoft.com/office/drawing/2014/main" id="{45D7670A-3D85-455F-8FC3-07E82C0103A5}"/>
+              </a:ext>
+            </a:extLst>
+          </p:cNvPr>
+          <p:cNvPicPr>
+            <a:picLocks noChangeAspect="1"/>
+          </p:cNvPicPr>
+          <p:nvPr/>
+        </p:nvPicPr>
+        <p:blipFill>
+          <a:blip r:embed="rId5"/>
+          <a:stretch>
+            <a:fillRect/>
+          </a:stretch>
+        </p:blipFill>
+        <p:spPr>
+          <a:xfrm>
+            <a:off x="2917516" y="2443103"/>
+            <a:ext cx="466512" cy="150312"/>
+          </a:xfrm>
+          <a:prstGeom prst="rect">
+            <a:avLst/>
+          </a:prstGeom>
+        </p:spPr>
+      </p:pic>
+      <p:pic>
+        <p:nvPicPr>
+          <p:cNvPr id="162" name="图片 161">
+            <a:extLst>
+              <a:ext uri="{FF2B5EF4-FFF2-40B4-BE49-F238E27FC236}">
+                <a16:creationId xmlns:a16="http://schemas.microsoft.com/office/drawing/2014/main" id="{11335473-3B7B-4019-944C-EF0CB21E632A}"/>
+              </a:ext>
+            </a:extLst>
+          </p:cNvPr>
+          <p:cNvPicPr>
+            <a:picLocks noChangeAspect="1"/>
+          </p:cNvPicPr>
+          <p:nvPr/>
+        </p:nvPicPr>
+        <p:blipFill>
+          <a:blip r:embed="rId5"/>
+          <a:stretch>
+            <a:fillRect/>
+          </a:stretch>
+        </p:blipFill>
+        <p:spPr>
+          <a:xfrm>
+            <a:off x="1721512" y="2441156"/>
+            <a:ext cx="466512" cy="150312"/>
+          </a:xfrm>
+          <a:prstGeom prst="rect">
+            <a:avLst/>
+          </a:prstGeom>
+        </p:spPr>
+      </p:pic>
+      <p:graphicFrame>
+        <p:nvGraphicFramePr>
+          <p:cNvPr id="5" name="对象 4">
+            <a:extLst>
+              <a:ext uri="{FF2B5EF4-FFF2-40B4-BE49-F238E27FC236}">
+                <a16:creationId xmlns:a16="http://schemas.microsoft.com/office/drawing/2014/main" id="{AE3A8FB0-7372-4048-90C5-D75F6A9B9286}"/>
+              </a:ext>
+            </a:extLst>
+          </p:cNvPr>
+          <p:cNvGraphicFramePr>
+            <a:graphicFrameLocks noChangeAspect="1"/>
+          </p:cNvGraphicFramePr>
+          <p:nvPr>
+            <p:extLst>
+              <p:ext uri="{D42A27DB-BD31-4B8C-83A1-F6EECF244321}">
+                <p14:modId xmlns:p14="http://schemas.microsoft.com/office/powerpoint/2010/main" val="763784877"/>
+              </p:ext>
+            </p:extLst>
+          </p:nvPr>
+        </p:nvGraphicFramePr>
+        <p:xfrm>
+          <a:off x="1727200" y="2401888"/>
+          <a:ext cx="403225" cy="212725"/>
+        </p:xfrm>
+        <a:graphic>
+          <a:graphicData uri="http://schemas.openxmlformats.org/presentationml/2006/ole">
+            <mc:AlternateContent xmlns:mc="http://schemas.openxmlformats.org/markup-compatibility/2006">
+              <mc:Choice xmlns:v="urn:schemas-microsoft-com:vml" Requires="v">
+                <p:oleObj spid="_x0000_s8231" name="Equation" r:id="rId6" imgW="431640" imgH="228600" progId="Equation.DSMT4">
+                  <p:embed/>
+                </p:oleObj>
+              </mc:Choice>
+              <mc:Fallback>
+                <p:oleObj name="Equation" r:id="rId6" imgW="431640" imgH="228600" progId="Equation.DSMT4">
+                  <p:embed/>
+                  <p:pic>
+                    <p:nvPicPr>
+                      <p:cNvPr id="0" name=""/>
+                      <p:cNvPicPr/>
+                      <p:nvPr/>
+                    </p:nvPicPr>
+                    <p:blipFill>
+                      <a:blip r:embed="rId7"/>
+                      <a:stretch>
+                        <a:fillRect/>
+                      </a:stretch>
+                    </p:blipFill>
+                    <p:spPr>
+                      <a:xfrm>
+                        <a:off x="1727200" y="2401888"/>
+                        <a:ext cx="403225" cy="212725"/>
+                      </a:xfrm>
+                      <a:prstGeom prst="rect">
+                        <a:avLst/>
+                      </a:prstGeom>
+                    </p:spPr>
+                  </p:pic>
+                </p:oleObj>
+              </mc:Fallback>
+            </mc:AlternateContent>
+          </a:graphicData>
+        </a:graphic>
+      </p:graphicFrame>
+      <p:graphicFrame>
+        <p:nvGraphicFramePr>
+          <p:cNvPr id="6" name="对象 5">
+            <a:extLst>
+              <a:ext uri="{FF2B5EF4-FFF2-40B4-BE49-F238E27FC236}">
+                <a16:creationId xmlns:a16="http://schemas.microsoft.com/office/drawing/2014/main" id="{B4997939-8E6B-4684-AB84-E3CFE4DF78D2}"/>
+              </a:ext>
+            </a:extLst>
+          </p:cNvPr>
+          <p:cNvGraphicFramePr>
+            <a:graphicFrameLocks noChangeAspect="1"/>
+          </p:cNvGraphicFramePr>
+          <p:nvPr>
+            <p:extLst>
+              <p:ext uri="{D42A27DB-BD31-4B8C-83A1-F6EECF244321}">
+                <p14:modId xmlns:p14="http://schemas.microsoft.com/office/powerpoint/2010/main" val="2962092082"/>
+              </p:ext>
+            </p:extLst>
+          </p:nvPr>
+        </p:nvGraphicFramePr>
+        <p:xfrm>
+          <a:off x="2933700" y="2401888"/>
+          <a:ext cx="401638" cy="212725"/>
+        </p:xfrm>
+        <a:graphic>
+          <a:graphicData uri="http://schemas.openxmlformats.org/presentationml/2006/ole">
+            <mc:AlternateContent xmlns:mc="http://schemas.openxmlformats.org/markup-compatibility/2006">
+              <mc:Choice xmlns:v="urn:schemas-microsoft-com:vml" Requires="v">
+                <p:oleObj spid="_x0000_s8232" name="Equation" r:id="rId8" imgW="431640" imgH="228600" progId="Equation.DSMT4">
+                  <p:embed/>
+                </p:oleObj>
+              </mc:Choice>
+              <mc:Fallback>
+                <p:oleObj name="Equation" r:id="rId8" imgW="431640" imgH="228600" progId="Equation.DSMT4">
+                  <p:embed/>
+                  <p:pic>
+                    <p:nvPicPr>
+                      <p:cNvPr id="0" name=""/>
+                      <p:cNvPicPr/>
+                      <p:nvPr/>
+                    </p:nvPicPr>
+                    <p:blipFill>
+                      <a:blip r:embed="rId9"/>
+                      <a:stretch>
+                        <a:fillRect/>
+                      </a:stretch>
+                    </p:blipFill>
+                    <p:spPr>
+                      <a:xfrm>
+                        <a:off x="2933700" y="2401888"/>
+                        <a:ext cx="401638" cy="212725"/>
+                      </a:xfrm>
+                      <a:prstGeom prst="rect">
+                        <a:avLst/>
+                      </a:prstGeom>
+                    </p:spPr>
+                  </p:pic>
+                </p:oleObj>
+              </mc:Fallback>
+            </mc:AlternateContent>
+          </a:graphicData>
+        </a:graphic>
+      </p:graphicFrame>
+      <p:graphicFrame>
+        <p:nvGraphicFramePr>
+          <p:cNvPr id="7" name="对象 6">
+            <a:extLst>
+              <a:ext uri="{FF2B5EF4-FFF2-40B4-BE49-F238E27FC236}">
+                <a16:creationId xmlns:a16="http://schemas.microsoft.com/office/drawing/2014/main" id="{FEC91F76-CBF3-42DE-919C-D64DE983FFC3}"/>
+              </a:ext>
+            </a:extLst>
+          </p:cNvPr>
+          <p:cNvGraphicFramePr>
+            <a:graphicFrameLocks noChangeAspect="1"/>
+          </p:cNvGraphicFramePr>
+          <p:nvPr>
+            <p:extLst>
+              <p:ext uri="{D42A27DB-BD31-4B8C-83A1-F6EECF244321}">
+                <p14:modId xmlns:p14="http://schemas.microsoft.com/office/powerpoint/2010/main" val="2540694179"/>
+              </p:ext>
+            </p:extLst>
+          </p:nvPr>
+        </p:nvGraphicFramePr>
+        <p:xfrm>
+          <a:off x="4441825" y="2392363"/>
+          <a:ext cx="414338" cy="212725"/>
+        </p:xfrm>
+        <a:graphic>
+          <a:graphicData uri="http://schemas.openxmlformats.org/presentationml/2006/ole">
+            <mc:AlternateContent xmlns:mc="http://schemas.openxmlformats.org/markup-compatibility/2006">
+              <mc:Choice xmlns:v="urn:schemas-microsoft-com:vml" Requires="v">
+                <p:oleObj spid="_x0000_s8233" name="Equation" r:id="rId10" imgW="444240" imgH="228600" progId="Equation.DSMT4">
+                  <p:embed/>
+                </p:oleObj>
+              </mc:Choice>
+              <mc:Fallback>
+                <p:oleObj name="Equation" r:id="rId10" imgW="444240" imgH="228600" progId="Equation.DSMT4">
+                  <p:embed/>
+                  <p:pic>
+                    <p:nvPicPr>
+                      <p:cNvPr id="0" name=""/>
+                      <p:cNvPicPr/>
+                      <p:nvPr/>
+                    </p:nvPicPr>
+                    <p:blipFill>
+                      <a:blip r:embed="rId11"/>
+                      <a:stretch>
+                        <a:fillRect/>
+                      </a:stretch>
+                    </p:blipFill>
+                    <p:spPr>
+                      <a:xfrm>
+                        <a:off x="4441825" y="2392363"/>
+                        <a:ext cx="414338" cy="212725"/>
+                      </a:xfrm>
+                      <a:prstGeom prst="rect">
+                        <a:avLst/>
+                      </a:prstGeom>
+                    </p:spPr>
+                  </p:pic>
+                </p:oleObj>
+              </mc:Fallback>
+            </mc:AlternateContent>
+          </a:graphicData>
+        </a:graphic>
+      </p:graphicFrame>
+      <p:pic>
+        <p:nvPicPr>
+          <p:cNvPr id="8" name="图片 7">
+            <a:extLst>
+              <a:ext uri="{FF2B5EF4-FFF2-40B4-BE49-F238E27FC236}">
+                <a16:creationId xmlns:a16="http://schemas.microsoft.com/office/drawing/2014/main" id="{AC4DCF4D-1645-4E1F-8070-3B92CAE47F81}"/>
+              </a:ext>
+            </a:extLst>
+          </p:cNvPr>
+          <p:cNvPicPr>
+            <a:picLocks noChangeAspect="1"/>
+          </p:cNvPicPr>
+          <p:nvPr/>
+        </p:nvPicPr>
+        <p:blipFill>
+          <a:blip r:embed="rId12"/>
+          <a:stretch>
+            <a:fillRect/>
+          </a:stretch>
+        </p:blipFill>
+        <p:spPr>
+          <a:xfrm>
+            <a:off x="4238516" y="1427163"/>
+            <a:ext cx="866883" cy="490651"/>
+          </a:xfrm>
+          <a:prstGeom prst="rect">
+            <a:avLst/>
+          </a:prstGeom>
+        </p:spPr>
+      </p:pic>
+      <p:pic>
+        <p:nvPicPr>
+          <p:cNvPr id="163" name="图片 162">
+            <a:extLst>
+              <a:ext uri="{FF2B5EF4-FFF2-40B4-BE49-F238E27FC236}">
+                <a16:creationId xmlns:a16="http://schemas.microsoft.com/office/drawing/2014/main" id="{4AA32F44-DA8A-4B4B-A08A-FD3CF066BF2A}"/>
+              </a:ext>
+            </a:extLst>
+          </p:cNvPr>
+          <p:cNvPicPr>
+            <a:picLocks noChangeAspect="1"/>
+          </p:cNvPicPr>
+          <p:nvPr/>
+        </p:nvPicPr>
+        <p:blipFill>
+          <a:blip r:embed="rId12"/>
+          <a:stretch>
+            <a:fillRect/>
+          </a:stretch>
+        </p:blipFill>
+        <p:spPr>
+          <a:xfrm>
+            <a:off x="4219467" y="1396081"/>
+            <a:ext cx="138222" cy="490651"/>
+          </a:xfrm>
+          <a:prstGeom prst="rect">
+            <a:avLst/>
+          </a:prstGeom>
+        </p:spPr>
+      </p:pic>
+      <p:pic>
+        <p:nvPicPr>
+          <p:cNvPr id="9" name="图片 8">
+            <a:extLst>
+              <a:ext uri="{FF2B5EF4-FFF2-40B4-BE49-F238E27FC236}">
+                <a16:creationId xmlns:a16="http://schemas.microsoft.com/office/drawing/2014/main" id="{0F086662-4859-4A78-A9AE-7125494526DC}"/>
+              </a:ext>
+            </a:extLst>
+          </p:cNvPr>
+          <p:cNvPicPr>
+            <a:picLocks noChangeAspect="1"/>
+          </p:cNvPicPr>
+          <p:nvPr/>
+        </p:nvPicPr>
+        <p:blipFill>
+          <a:blip r:embed="rId13"/>
+          <a:stretch>
+            <a:fillRect/>
+          </a:stretch>
+        </p:blipFill>
+        <p:spPr>
+          <a:xfrm>
+            <a:off x="3607440" y="1519552"/>
+            <a:ext cx="597848" cy="507686"/>
+          </a:xfrm>
+          <a:prstGeom prst="rect">
+            <a:avLst/>
+          </a:prstGeom>
+        </p:spPr>
+      </p:pic>
+      <p:pic>
+        <p:nvPicPr>
+          <p:cNvPr id="13" name="图片 12">
+            <a:extLst>
+              <a:ext uri="{FF2B5EF4-FFF2-40B4-BE49-F238E27FC236}">
+                <a16:creationId xmlns:a16="http://schemas.microsoft.com/office/drawing/2014/main" id="{59F058EA-9DAB-4096-B030-6970232B3976}"/>
+              </a:ext>
+            </a:extLst>
+          </p:cNvPr>
+          <p:cNvPicPr>
+            <a:picLocks noChangeAspect="1"/>
+          </p:cNvPicPr>
+          <p:nvPr/>
+        </p:nvPicPr>
+        <p:blipFill>
+          <a:blip r:embed="rId14"/>
+          <a:stretch>
+            <a:fillRect/>
+          </a:stretch>
+        </p:blipFill>
+        <p:spPr>
+          <a:xfrm>
+            <a:off x="2017867" y="2891301"/>
+            <a:ext cx="2357484" cy="551888"/>
+          </a:xfrm>
+          <a:prstGeom prst="rect">
+            <a:avLst/>
+          </a:prstGeom>
+        </p:spPr>
+      </p:pic>
+      <p:pic>
+        <p:nvPicPr>
+          <p:cNvPr id="14" name="图片 13">
+            <a:extLst>
+              <a:ext uri="{FF2B5EF4-FFF2-40B4-BE49-F238E27FC236}">
+                <a16:creationId xmlns:a16="http://schemas.microsoft.com/office/drawing/2014/main" id="{80191CFC-2B19-4A78-A8C2-A92ECF6B1695}"/>
+              </a:ext>
+            </a:extLst>
+          </p:cNvPr>
+          <p:cNvPicPr>
+            <a:picLocks noChangeAspect="1"/>
+          </p:cNvPicPr>
+          <p:nvPr/>
+        </p:nvPicPr>
+        <p:blipFill>
+          <a:blip r:embed="rId15"/>
+          <a:stretch>
+            <a:fillRect/>
+          </a:stretch>
+        </p:blipFill>
+        <p:spPr>
+          <a:xfrm>
+            <a:off x="1574172" y="2868156"/>
+            <a:ext cx="466512" cy="641808"/>
+          </a:xfrm>
+          <a:prstGeom prst="rect">
+            <a:avLst/>
+          </a:prstGeom>
+        </p:spPr>
+      </p:pic>
+      <p:pic>
+        <p:nvPicPr>
+          <p:cNvPr id="165" name="图片 164">
+            <a:extLst>
+              <a:ext uri="{FF2B5EF4-FFF2-40B4-BE49-F238E27FC236}">
+                <a16:creationId xmlns:a16="http://schemas.microsoft.com/office/drawing/2014/main" id="{B96FE3F1-D4D4-4CE4-A283-A1A44D70DFFD}"/>
+              </a:ext>
+            </a:extLst>
+          </p:cNvPr>
+          <p:cNvPicPr>
+            <a:picLocks noChangeAspect="1"/>
+          </p:cNvPicPr>
+          <p:nvPr/>
+        </p:nvPicPr>
+        <p:blipFill>
+          <a:blip r:embed="rId15"/>
+          <a:stretch>
+            <a:fillRect/>
+          </a:stretch>
+        </p:blipFill>
+        <p:spPr>
+          <a:xfrm>
+            <a:off x="1807428" y="3442603"/>
+            <a:ext cx="2745522" cy="135972"/>
+          </a:xfrm>
+          <a:prstGeom prst="rect">
+            <a:avLst/>
+          </a:prstGeom>
+        </p:spPr>
+      </p:pic>
+      <p:pic>
+        <p:nvPicPr>
+          <p:cNvPr id="167" name="图片 166">
+            <a:extLst>
+              <a:ext uri="{FF2B5EF4-FFF2-40B4-BE49-F238E27FC236}">
+                <a16:creationId xmlns:a16="http://schemas.microsoft.com/office/drawing/2014/main" id="{AA79B1A8-8393-432B-863F-FB4EFDA57C1E}"/>
+              </a:ext>
+            </a:extLst>
+          </p:cNvPr>
+          <p:cNvPicPr>
+            <a:picLocks noChangeAspect="1"/>
+          </p:cNvPicPr>
+          <p:nvPr/>
+        </p:nvPicPr>
+        <p:blipFill>
+          <a:blip r:embed="rId15"/>
+          <a:stretch>
+            <a:fillRect/>
+          </a:stretch>
+        </p:blipFill>
+        <p:spPr>
+          <a:xfrm>
+            <a:off x="4375350" y="2863815"/>
+            <a:ext cx="669675" cy="641808"/>
+          </a:xfrm>
+          <a:prstGeom prst="rect">
+            <a:avLst/>
+          </a:prstGeom>
+        </p:spPr>
+      </p:pic>
+      <p:pic>
+        <p:nvPicPr>
+          <p:cNvPr id="15" name="图片 14">
+            <a:extLst>
+              <a:ext uri="{FF2B5EF4-FFF2-40B4-BE49-F238E27FC236}">
+                <a16:creationId xmlns:a16="http://schemas.microsoft.com/office/drawing/2014/main" id="{55652D89-507A-49B7-AB72-6BA9E73FCEE1}"/>
+              </a:ext>
+            </a:extLst>
+          </p:cNvPr>
+          <p:cNvPicPr>
+            <a:picLocks noChangeAspect="1"/>
+          </p:cNvPicPr>
+          <p:nvPr/>
+        </p:nvPicPr>
+        <p:blipFill>
+          <a:blip r:embed="rId16"/>
+          <a:stretch>
+            <a:fillRect/>
+          </a:stretch>
+        </p:blipFill>
+        <p:spPr>
+          <a:xfrm>
+            <a:off x="1511300" y="3437368"/>
+            <a:ext cx="3581400" cy="78418"/>
+          </a:xfrm>
+          <a:prstGeom prst="rect">
+            <a:avLst/>
+          </a:prstGeom>
+        </p:spPr>
+      </p:pic>
+      <p:pic>
+        <p:nvPicPr>
+          <p:cNvPr id="16" name="图片 15">
+            <a:extLst>
+              <a:ext uri="{FF2B5EF4-FFF2-40B4-BE49-F238E27FC236}">
+                <a16:creationId xmlns:a16="http://schemas.microsoft.com/office/drawing/2014/main" id="{E7F32EBB-A3B0-4A0D-AA61-EB4C521B4854}"/>
+              </a:ext>
+            </a:extLst>
+          </p:cNvPr>
+          <p:cNvPicPr>
+            <a:picLocks noChangeAspect="1"/>
+          </p:cNvPicPr>
+          <p:nvPr/>
+        </p:nvPicPr>
+        <p:blipFill>
+          <a:blip r:embed="rId17"/>
+          <a:stretch>
+            <a:fillRect/>
+          </a:stretch>
+        </p:blipFill>
+        <p:spPr>
+          <a:xfrm>
+            <a:off x="1511300" y="3502239"/>
+            <a:ext cx="3797300" cy="608783"/>
+          </a:xfrm>
+          <a:prstGeom prst="rect">
+            <a:avLst/>
+          </a:prstGeom>
+        </p:spPr>
+      </p:pic>
+      <p:pic>
+        <p:nvPicPr>
+          <p:cNvPr id="17" name="图片 16">
+            <a:extLst>
+              <a:ext uri="{FF2B5EF4-FFF2-40B4-BE49-F238E27FC236}">
+                <a16:creationId xmlns:a16="http://schemas.microsoft.com/office/drawing/2014/main" id="{1BB28A05-BB74-430E-B6D4-66FFDA4E8668}"/>
+              </a:ext>
+            </a:extLst>
+          </p:cNvPr>
+          <p:cNvPicPr>
+            <a:picLocks noChangeAspect="1"/>
+          </p:cNvPicPr>
+          <p:nvPr/>
+        </p:nvPicPr>
+        <p:blipFill>
+          <a:blip r:embed="rId18"/>
+          <a:stretch>
+            <a:fillRect/>
+          </a:stretch>
+        </p:blipFill>
+        <p:spPr>
+          <a:xfrm>
+            <a:off x="2166165" y="3139168"/>
+            <a:ext cx="2155211" cy="243028"/>
+          </a:xfrm>
+          <a:prstGeom prst="rect">
+            <a:avLst/>
+          </a:prstGeom>
+        </p:spPr>
+      </p:pic>
+      <p:graphicFrame>
+        <p:nvGraphicFramePr>
+          <p:cNvPr id="18" name="对象 17">
+            <a:extLst>
+              <a:ext uri="{FF2B5EF4-FFF2-40B4-BE49-F238E27FC236}">
+                <a16:creationId xmlns:a16="http://schemas.microsoft.com/office/drawing/2014/main" id="{E2219F25-11BB-402B-BAEE-3623D3CE2FEA}"/>
+              </a:ext>
+            </a:extLst>
+          </p:cNvPr>
+          <p:cNvGraphicFramePr>
+            <a:graphicFrameLocks noChangeAspect="1"/>
+          </p:cNvGraphicFramePr>
+          <p:nvPr>
+            <p:extLst>
+              <p:ext uri="{D42A27DB-BD31-4B8C-83A1-F6EECF244321}">
+                <p14:modId xmlns:p14="http://schemas.microsoft.com/office/powerpoint/2010/main" val="3424411160"/>
+              </p:ext>
+            </p:extLst>
+          </p:nvPr>
+        </p:nvGraphicFramePr>
+        <p:xfrm>
+          <a:off x="2439988" y="3109913"/>
+          <a:ext cx="1625600" cy="254000"/>
+        </p:xfrm>
+        <a:graphic>
+          <a:graphicData uri="http://schemas.openxmlformats.org/presentationml/2006/ole">
+            <mc:AlternateContent xmlns:mc="http://schemas.openxmlformats.org/markup-compatibility/2006">
+              <mc:Choice xmlns:v="urn:schemas-microsoft-com:vml" Requires="v">
+                <p:oleObj spid="_x0000_s8234" name="Equation" r:id="rId19" imgW="1625400" imgH="253800" progId="Equation.DSMT4">
+                  <p:embed/>
+                </p:oleObj>
+              </mc:Choice>
+              <mc:Fallback>
+                <p:oleObj name="Equation" r:id="rId19" imgW="1625400" imgH="253800" progId="Equation.DSMT4">
+                  <p:embed/>
+                  <p:pic>
+                    <p:nvPicPr>
+                      <p:cNvPr id="0" name=""/>
+                      <p:cNvPicPr/>
+                      <p:nvPr/>
+                    </p:nvPicPr>
+                    <p:blipFill>
+                      <a:blip r:embed="rId20"/>
+                      <a:stretch>
+                        <a:fillRect/>
+                      </a:stretch>
+                    </p:blipFill>
+                    <p:spPr>
+                      <a:xfrm>
+                        <a:off x="2439988" y="3109913"/>
+                        <a:ext cx="1625600" cy="254000"/>
+                      </a:xfrm>
+                      <a:prstGeom prst="rect">
+                        <a:avLst/>
+                      </a:prstGeom>
+                    </p:spPr>
+                  </p:pic>
+                </p:oleObj>
+              </mc:Fallback>
+            </mc:AlternateContent>
+          </a:graphicData>
+        </a:graphic>
+      </p:graphicFrame>
+      <p:pic>
+        <p:nvPicPr>
+          <p:cNvPr id="169" name="图片 168">
+            <a:extLst>
+              <a:ext uri="{FF2B5EF4-FFF2-40B4-BE49-F238E27FC236}">
+                <a16:creationId xmlns:a16="http://schemas.microsoft.com/office/drawing/2014/main" id="{9CCAC83E-2A9E-4B49-A980-B0FBE4FEC5B1}"/>
+              </a:ext>
+            </a:extLst>
+          </p:cNvPr>
+          <p:cNvPicPr>
+            <a:picLocks noChangeAspect="1"/>
+          </p:cNvPicPr>
+          <p:nvPr/>
+        </p:nvPicPr>
+        <p:blipFill>
+          <a:blip r:embed="rId16"/>
+          <a:stretch>
+            <a:fillRect/>
+          </a:stretch>
+        </p:blipFill>
+        <p:spPr>
+          <a:xfrm rot="10800000">
+            <a:off x="1511300" y="2837308"/>
+            <a:ext cx="3581400" cy="78418"/>
+          </a:xfrm>
+          <a:prstGeom prst="rect">
+            <a:avLst/>
+          </a:prstGeom>
+        </p:spPr>
+      </p:pic>
+      <p:pic>
+        <p:nvPicPr>
+          <p:cNvPr id="19" name="图片 18">
+            <a:extLst>
+              <a:ext uri="{FF2B5EF4-FFF2-40B4-BE49-F238E27FC236}">
+                <a16:creationId xmlns:a16="http://schemas.microsoft.com/office/drawing/2014/main" id="{71CD2EF1-3A35-410F-8FA4-244CA2671481}"/>
+              </a:ext>
+            </a:extLst>
+          </p:cNvPr>
+          <p:cNvPicPr>
+            <a:picLocks noChangeAspect="1"/>
+          </p:cNvPicPr>
+          <p:nvPr/>
+        </p:nvPicPr>
+        <p:blipFill>
+          <a:blip r:embed="rId21"/>
+          <a:stretch>
+            <a:fillRect/>
+          </a:stretch>
+        </p:blipFill>
+        <p:spPr>
+          <a:xfrm>
+            <a:off x="5071913" y="2837308"/>
+            <a:ext cx="352474" cy="876422"/>
+          </a:xfrm>
+          <a:prstGeom prst="rect">
+            <a:avLst/>
+          </a:prstGeom>
+        </p:spPr>
+      </p:pic>
+      <p:cxnSp>
+        <p:nvCxnSpPr>
+          <p:cNvPr id="22" name="直接连接符 21">
+            <a:extLst>
+              <a:ext uri="{FF2B5EF4-FFF2-40B4-BE49-F238E27FC236}">
+                <a16:creationId xmlns:a16="http://schemas.microsoft.com/office/drawing/2014/main" id="{793C8849-DF5D-4D82-AADB-4CA972E966EC}"/>
+              </a:ext>
+            </a:extLst>
+          </p:cNvPr>
+          <p:cNvCxnSpPr>
+            <a:cxnSpLocks/>
+          </p:cNvCxnSpPr>
+          <p:nvPr/>
+        </p:nvCxnSpPr>
+        <p:spPr>
+          <a:xfrm>
+            <a:off x="5059212" y="2874600"/>
+            <a:ext cx="0" cy="604873"/>
+          </a:xfrm>
+          <a:prstGeom prst="line">
+            <a:avLst/>
+          </a:prstGeom>
+          <a:ln w="19050">
+            <a:solidFill>
+              <a:srgbClr val="757070"/>
+            </a:solidFill>
+          </a:ln>
+        </p:spPr>
+        <p:style>
+          <a:lnRef idx="1">
+            <a:schemeClr val="accent1"/>
+          </a:lnRef>
+          <a:fillRef idx="0">
+            <a:schemeClr val="accent1"/>
+          </a:fillRef>
+          <a:effectRef idx="0">
+            <a:schemeClr val="accent1"/>
+          </a:effectRef>
+          <a:fontRef idx="minor">
+            <a:schemeClr val="tx1"/>
+          </a:fontRef>
+        </p:style>
+      </p:cxnSp>
+      <p:pic>
+        <p:nvPicPr>
+          <p:cNvPr id="26" name="图片 25">
+            <a:extLst>
+              <a:ext uri="{FF2B5EF4-FFF2-40B4-BE49-F238E27FC236}">
+                <a16:creationId xmlns:a16="http://schemas.microsoft.com/office/drawing/2014/main" id="{89EE1A5A-AD8A-4B46-A607-CA64A5A1556A}"/>
+              </a:ext>
+            </a:extLst>
+          </p:cNvPr>
+          <p:cNvPicPr>
+            <a:picLocks noChangeAspect="1"/>
+          </p:cNvPicPr>
+          <p:nvPr/>
+        </p:nvPicPr>
+        <p:blipFill>
+          <a:blip r:embed="rId22"/>
+          <a:stretch>
+            <a:fillRect/>
+          </a:stretch>
+        </p:blipFill>
+        <p:spPr>
+          <a:xfrm>
+            <a:off x="1685950" y="2709827"/>
+            <a:ext cx="3090837" cy="148679"/>
+          </a:xfrm>
+          <a:prstGeom prst="rect">
+            <a:avLst/>
+          </a:prstGeom>
+        </p:spPr>
+      </p:pic>
+      <p:cxnSp>
+        <p:nvCxnSpPr>
+          <p:cNvPr id="170" name="直接连接符 169">
+            <a:extLst>
+              <a:ext uri="{FF2B5EF4-FFF2-40B4-BE49-F238E27FC236}">
+                <a16:creationId xmlns:a16="http://schemas.microsoft.com/office/drawing/2014/main" id="{873EFD28-7BA2-4C61-969B-C6D42E71BE69}"/>
+              </a:ext>
+            </a:extLst>
+          </p:cNvPr>
+          <p:cNvCxnSpPr>
+            <a:cxnSpLocks/>
+          </p:cNvCxnSpPr>
+          <p:nvPr/>
+        </p:nvCxnSpPr>
+        <p:spPr>
+          <a:xfrm>
+            <a:off x="3140990" y="2605088"/>
+            <a:ext cx="0" cy="398462"/>
+          </a:xfrm>
+          <a:prstGeom prst="line">
+            <a:avLst/>
+          </a:prstGeom>
+          <a:ln w="28575">
+            <a:solidFill>
+              <a:srgbClr val="4472C4"/>
+            </a:solidFill>
+          </a:ln>
+        </p:spPr>
+        <p:style>
+          <a:lnRef idx="1">
+            <a:schemeClr val="accent1"/>
+          </a:lnRef>
+          <a:fillRef idx="0">
+            <a:schemeClr val="accent1"/>
+          </a:fillRef>
+          <a:effectRef idx="0">
+            <a:schemeClr val="accent1"/>
+          </a:effectRef>
+          <a:fontRef idx="minor">
+            <a:schemeClr val="tx1"/>
+          </a:fontRef>
+        </p:style>
+      </p:cxnSp>
+      <p:pic>
+        <p:nvPicPr>
+          <p:cNvPr id="28" name="图片 27">
+            <a:extLst>
+              <a:ext uri="{FF2B5EF4-FFF2-40B4-BE49-F238E27FC236}">
+                <a16:creationId xmlns:a16="http://schemas.microsoft.com/office/drawing/2014/main" id="{74DC9ACC-3F6C-435F-B69F-30CA562F85E6}"/>
+              </a:ext>
+            </a:extLst>
+          </p:cNvPr>
+          <p:cNvPicPr>
+            <a:picLocks noChangeAspect="1"/>
+          </p:cNvPicPr>
+          <p:nvPr/>
+        </p:nvPicPr>
+        <p:blipFill>
+          <a:blip r:embed="rId23"/>
+          <a:stretch>
+            <a:fillRect/>
+          </a:stretch>
+        </p:blipFill>
+        <p:spPr>
+          <a:xfrm>
+            <a:off x="1752586" y="2609956"/>
+            <a:ext cx="457264" cy="83401"/>
+          </a:xfrm>
+          <a:prstGeom prst="rect">
+            <a:avLst/>
+          </a:prstGeom>
+        </p:spPr>
+      </p:pic>
+      <p:pic>
+        <p:nvPicPr>
+          <p:cNvPr id="171" name="图片 170">
+            <a:extLst>
+              <a:ext uri="{FF2B5EF4-FFF2-40B4-BE49-F238E27FC236}">
+                <a16:creationId xmlns:a16="http://schemas.microsoft.com/office/drawing/2014/main" id="{1A02E8AF-1F2E-43A5-B22B-1100A2E2DCB7}"/>
+              </a:ext>
+            </a:extLst>
+          </p:cNvPr>
+          <p:cNvPicPr>
+            <a:picLocks noChangeAspect="1"/>
+          </p:cNvPicPr>
+          <p:nvPr/>
+        </p:nvPicPr>
+        <p:blipFill>
+          <a:blip r:embed="rId23"/>
+          <a:stretch>
+            <a:fillRect/>
+          </a:stretch>
+        </p:blipFill>
+        <p:spPr>
+          <a:xfrm>
+            <a:off x="4481555" y="2607299"/>
+            <a:ext cx="457264" cy="83401"/>
+          </a:xfrm>
+          <a:prstGeom prst="rect">
+            <a:avLst/>
+          </a:prstGeom>
+        </p:spPr>
+      </p:pic>
+      <p:cxnSp>
+        <p:nvCxnSpPr>
+          <p:cNvPr id="172" name="直接连接符 171">
+            <a:extLst>
+              <a:ext uri="{FF2B5EF4-FFF2-40B4-BE49-F238E27FC236}">
+                <a16:creationId xmlns:a16="http://schemas.microsoft.com/office/drawing/2014/main" id="{D8ABC7C8-5F1D-427C-AB8A-1BA8B92264AB}"/>
+              </a:ext>
+            </a:extLst>
+          </p:cNvPr>
+          <p:cNvCxnSpPr>
+            <a:cxnSpLocks/>
+          </p:cNvCxnSpPr>
+          <p:nvPr/>
+        </p:nvCxnSpPr>
+        <p:spPr>
+          <a:xfrm flipV="1">
+            <a:off x="1443890" y="2699923"/>
+            <a:ext cx="3685323" cy="2401"/>
+          </a:xfrm>
+          <a:prstGeom prst="line">
+            <a:avLst/>
+          </a:prstGeom>
+          <a:ln w="12700">
+            <a:solidFill>
+              <a:srgbClr val="736E6E"/>
+            </a:solidFill>
+          </a:ln>
+        </p:spPr>
+        <p:style>
+          <a:lnRef idx="1">
+            <a:schemeClr val="accent1"/>
+          </a:lnRef>
+          <a:fillRef idx="0">
+            <a:schemeClr val="accent1"/>
+          </a:fillRef>
+          <a:effectRef idx="0">
+            <a:schemeClr val="accent1"/>
+          </a:effectRef>
+          <a:fontRef idx="minor">
+            <a:schemeClr val="tx1"/>
+          </a:fontRef>
+        </p:style>
+      </p:cxnSp>
+      <p:pic>
+        <p:nvPicPr>
+          <p:cNvPr id="32" name="图片 31">
+            <a:extLst>
+              <a:ext uri="{FF2B5EF4-FFF2-40B4-BE49-F238E27FC236}">
+                <a16:creationId xmlns:a16="http://schemas.microsoft.com/office/drawing/2014/main" id="{8FDFC630-61C2-4EBA-BC90-8A31AE1312C0}"/>
+              </a:ext>
+            </a:extLst>
+          </p:cNvPr>
+          <p:cNvPicPr>
+            <a:picLocks noChangeAspect="1"/>
+          </p:cNvPicPr>
+          <p:nvPr/>
+        </p:nvPicPr>
+        <p:blipFill>
+          <a:blip r:embed="rId24"/>
+          <a:stretch>
+            <a:fillRect/>
+          </a:stretch>
+        </p:blipFill>
+        <p:spPr>
+          <a:xfrm>
+            <a:off x="602503" y="3512268"/>
+            <a:ext cx="5941171" cy="2141865"/>
+          </a:xfrm>
+          <a:prstGeom prst="rect">
+            <a:avLst/>
+          </a:prstGeom>
+        </p:spPr>
+      </p:pic>
+      <p:pic>
+        <p:nvPicPr>
+          <p:cNvPr id="33" name="图片 32">
+            <a:extLst>
+              <a:ext uri="{FF2B5EF4-FFF2-40B4-BE49-F238E27FC236}">
+                <a16:creationId xmlns:a16="http://schemas.microsoft.com/office/drawing/2014/main" id="{9F88C54A-40A4-413A-92B5-31258AA58ADB}"/>
+              </a:ext>
+            </a:extLst>
+          </p:cNvPr>
+          <p:cNvPicPr>
+            <a:picLocks noChangeAspect="1"/>
+          </p:cNvPicPr>
+          <p:nvPr/>
+        </p:nvPicPr>
+        <p:blipFill>
+          <a:blip r:embed="rId25"/>
+          <a:stretch>
+            <a:fillRect/>
+          </a:stretch>
+        </p:blipFill>
+        <p:spPr>
+          <a:xfrm>
+            <a:off x="4629978" y="4092413"/>
+            <a:ext cx="80112" cy="92678"/>
+          </a:xfrm>
+          <a:prstGeom prst="rect">
+            <a:avLst/>
+          </a:prstGeom>
+        </p:spPr>
+      </p:pic>
+      <p:pic>
+        <p:nvPicPr>
+          <p:cNvPr id="37" name="图片 36">
+            <a:extLst>
+              <a:ext uri="{FF2B5EF4-FFF2-40B4-BE49-F238E27FC236}">
+                <a16:creationId xmlns:a16="http://schemas.microsoft.com/office/drawing/2014/main" id="{B090A9E5-9003-4DCD-8800-10A35972A9D5}"/>
+              </a:ext>
+            </a:extLst>
+          </p:cNvPr>
+          <p:cNvPicPr>
+            <a:picLocks noChangeAspect="1"/>
+          </p:cNvPicPr>
+          <p:nvPr/>
+        </p:nvPicPr>
+        <p:blipFill>
+          <a:blip r:embed="rId26"/>
+          <a:stretch>
+            <a:fillRect/>
+          </a:stretch>
+        </p:blipFill>
+        <p:spPr>
+          <a:xfrm>
+            <a:off x="1041313" y="4449984"/>
+            <a:ext cx="812887" cy="257580"/>
+          </a:xfrm>
+          <a:prstGeom prst="rect">
+            <a:avLst/>
+          </a:prstGeom>
+        </p:spPr>
+      </p:pic>
+      <p:pic>
+        <p:nvPicPr>
+          <p:cNvPr id="175" name="图片 174">
+            <a:extLst>
+              <a:ext uri="{FF2B5EF4-FFF2-40B4-BE49-F238E27FC236}">
+                <a16:creationId xmlns:a16="http://schemas.microsoft.com/office/drawing/2014/main" id="{A15DFBC7-C48B-466C-BC10-F7569FB3C49F}"/>
+              </a:ext>
+            </a:extLst>
+          </p:cNvPr>
+          <p:cNvPicPr>
+            <a:picLocks noChangeAspect="1"/>
+          </p:cNvPicPr>
+          <p:nvPr/>
+        </p:nvPicPr>
+        <p:blipFill>
+          <a:blip r:embed="rId26"/>
+          <a:stretch>
+            <a:fillRect/>
+          </a:stretch>
+        </p:blipFill>
+        <p:spPr>
+          <a:xfrm>
+            <a:off x="3054351" y="4441250"/>
+            <a:ext cx="841226" cy="257580"/>
+          </a:xfrm>
+          <a:prstGeom prst="rect">
+            <a:avLst/>
+          </a:prstGeom>
+        </p:spPr>
+      </p:pic>
+      <p:pic>
+        <p:nvPicPr>
+          <p:cNvPr id="176" name="图片 175">
+            <a:extLst>
+              <a:ext uri="{FF2B5EF4-FFF2-40B4-BE49-F238E27FC236}">
+                <a16:creationId xmlns:a16="http://schemas.microsoft.com/office/drawing/2014/main" id="{246AC020-7707-4E57-B8B5-608447421F6A}"/>
+              </a:ext>
+            </a:extLst>
+          </p:cNvPr>
+          <p:cNvPicPr>
+            <a:picLocks noChangeAspect="1"/>
+          </p:cNvPicPr>
+          <p:nvPr/>
+        </p:nvPicPr>
+        <p:blipFill>
+          <a:blip r:embed="rId26"/>
+          <a:stretch>
+            <a:fillRect/>
+          </a:stretch>
+        </p:blipFill>
+        <p:spPr>
+          <a:xfrm>
+            <a:off x="5071913" y="4442372"/>
+            <a:ext cx="933600" cy="257580"/>
+          </a:xfrm>
+          <a:prstGeom prst="rect">
+            <a:avLst/>
+          </a:prstGeom>
+        </p:spPr>
+      </p:pic>
+      <p:graphicFrame>
+        <p:nvGraphicFramePr>
+          <p:cNvPr id="34" name="对象 33">
+            <a:extLst>
+              <a:ext uri="{FF2B5EF4-FFF2-40B4-BE49-F238E27FC236}">
+                <a16:creationId xmlns:a16="http://schemas.microsoft.com/office/drawing/2014/main" id="{13944BAE-F607-43A2-947F-2F40775ED904}"/>
+              </a:ext>
+            </a:extLst>
+          </p:cNvPr>
+          <p:cNvGraphicFramePr>
+            <a:graphicFrameLocks noChangeAspect="1"/>
+          </p:cNvGraphicFramePr>
+          <p:nvPr>
+            <p:extLst>
+              <p:ext uri="{D42A27DB-BD31-4B8C-83A1-F6EECF244321}">
+                <p14:modId xmlns:p14="http://schemas.microsoft.com/office/powerpoint/2010/main" val="2070366719"/>
+              </p:ext>
+            </p:extLst>
+          </p:nvPr>
+        </p:nvGraphicFramePr>
+        <p:xfrm>
+          <a:off x="1010256" y="4397865"/>
+          <a:ext cx="776972" cy="337814"/>
+        </p:xfrm>
+        <a:graphic>
+          <a:graphicData uri="http://schemas.openxmlformats.org/presentationml/2006/ole">
+            <mc:AlternateContent xmlns:mc="http://schemas.openxmlformats.org/markup-compatibility/2006">
+              <mc:Choice xmlns:v="urn:schemas-microsoft-com:vml" Requires="v">
+                <p:oleObj spid="_x0000_s8235" name="Equation" r:id="rId27" imgW="583920" imgH="253800" progId="Equation.DSMT4">
+                  <p:embed/>
+                </p:oleObj>
+              </mc:Choice>
+              <mc:Fallback>
+                <p:oleObj name="Equation" r:id="rId27" imgW="583920" imgH="253800" progId="Equation.DSMT4">
+                  <p:embed/>
+                  <p:pic>
+                    <p:nvPicPr>
+                      <p:cNvPr id="0" name=""/>
+                      <p:cNvPicPr/>
+                      <p:nvPr/>
+                    </p:nvPicPr>
+                    <p:blipFill>
+                      <a:blip r:embed="rId28"/>
+                      <a:stretch>
+                        <a:fillRect/>
+                      </a:stretch>
+                    </p:blipFill>
+                    <p:spPr>
+                      <a:xfrm>
+                        <a:off x="1010256" y="4397865"/>
+                        <a:ext cx="776972" cy="337814"/>
+                      </a:xfrm>
+                      <a:prstGeom prst="rect">
+                        <a:avLst/>
+                      </a:prstGeom>
+                    </p:spPr>
+                  </p:pic>
+                </p:oleObj>
+              </mc:Fallback>
+            </mc:AlternateContent>
+          </a:graphicData>
+        </a:graphic>
+      </p:graphicFrame>
+      <p:graphicFrame>
+        <p:nvGraphicFramePr>
+          <p:cNvPr id="35" name="对象 34">
+            <a:extLst>
+              <a:ext uri="{FF2B5EF4-FFF2-40B4-BE49-F238E27FC236}">
+                <a16:creationId xmlns:a16="http://schemas.microsoft.com/office/drawing/2014/main" id="{60F1BFA0-99BF-4F21-8524-71FAC7BE1A34}"/>
+              </a:ext>
+            </a:extLst>
+          </p:cNvPr>
+          <p:cNvGraphicFramePr>
+            <a:graphicFrameLocks noChangeAspect="1"/>
+          </p:cNvGraphicFramePr>
+          <p:nvPr>
+            <p:extLst>
+              <p:ext uri="{D42A27DB-BD31-4B8C-83A1-F6EECF244321}">
+                <p14:modId xmlns:p14="http://schemas.microsoft.com/office/powerpoint/2010/main" val="3151474150"/>
+              </p:ext>
+            </p:extLst>
+          </p:nvPr>
+        </p:nvGraphicFramePr>
+        <p:xfrm>
+          <a:off x="3083646" y="4409091"/>
+          <a:ext cx="725335" cy="315363"/>
+        </p:xfrm>
+        <a:graphic>
+          <a:graphicData uri="http://schemas.openxmlformats.org/presentationml/2006/ole">
+            <mc:AlternateContent xmlns:mc="http://schemas.openxmlformats.org/markup-compatibility/2006">
+              <mc:Choice xmlns:v="urn:schemas-microsoft-com:vml" Requires="v">
+                <p:oleObj spid="_x0000_s8236" name="Equation" r:id="rId29" imgW="583920" imgH="253800" progId="Equation.DSMT4">
+                  <p:embed/>
+                </p:oleObj>
+              </mc:Choice>
+              <mc:Fallback>
+                <p:oleObj name="Equation" r:id="rId29" imgW="583920" imgH="253800" progId="Equation.DSMT4">
+                  <p:embed/>
+                  <p:pic>
+                    <p:nvPicPr>
+                      <p:cNvPr id="0" name=""/>
+                      <p:cNvPicPr/>
+                      <p:nvPr/>
+                    </p:nvPicPr>
+                    <p:blipFill>
+                      <a:blip r:embed="rId30"/>
+                      <a:stretch>
+                        <a:fillRect/>
+                      </a:stretch>
+                    </p:blipFill>
+                    <p:spPr>
+                      <a:xfrm>
+                        <a:off x="3083646" y="4409091"/>
+                        <a:ext cx="725335" cy="315363"/>
+                      </a:xfrm>
+                      <a:prstGeom prst="rect">
+                        <a:avLst/>
+                      </a:prstGeom>
+                    </p:spPr>
+                  </p:pic>
+                </p:oleObj>
+              </mc:Fallback>
+            </mc:AlternateContent>
+          </a:graphicData>
+        </a:graphic>
+      </p:graphicFrame>
+      <p:graphicFrame>
+        <p:nvGraphicFramePr>
+          <p:cNvPr id="36" name="对象 35">
+            <a:extLst>
+              <a:ext uri="{FF2B5EF4-FFF2-40B4-BE49-F238E27FC236}">
+                <a16:creationId xmlns:a16="http://schemas.microsoft.com/office/drawing/2014/main" id="{E00C2845-368C-43D9-A97D-9CB4B0F856C9}"/>
+              </a:ext>
+            </a:extLst>
+          </p:cNvPr>
+          <p:cNvGraphicFramePr>
+            <a:graphicFrameLocks noChangeAspect="1"/>
+          </p:cNvGraphicFramePr>
+          <p:nvPr>
+            <p:extLst>
+              <p:ext uri="{D42A27DB-BD31-4B8C-83A1-F6EECF244321}">
+                <p14:modId xmlns:p14="http://schemas.microsoft.com/office/powerpoint/2010/main" val="3035895994"/>
+              </p:ext>
+            </p:extLst>
+          </p:nvPr>
+        </p:nvGraphicFramePr>
+        <p:xfrm>
+          <a:off x="5105399" y="4409091"/>
+          <a:ext cx="889050" cy="321897"/>
+        </p:xfrm>
+        <a:graphic>
+          <a:graphicData uri="http://schemas.openxmlformats.org/presentationml/2006/ole">
+            <mc:AlternateContent xmlns:mc="http://schemas.openxmlformats.org/markup-compatibility/2006">
+              <mc:Choice xmlns:v="urn:schemas-microsoft-com:vml" Requires="v">
+                <p:oleObj spid="_x0000_s8237" name="Equation" r:id="rId31" imgW="736560" imgH="266400" progId="Equation.DSMT4">
+                  <p:embed/>
+                </p:oleObj>
+              </mc:Choice>
+              <mc:Fallback>
+                <p:oleObj name="Equation" r:id="rId31" imgW="736560" imgH="266400" progId="Equation.DSMT4">
+                  <p:embed/>
+                  <p:pic>
+                    <p:nvPicPr>
+                      <p:cNvPr id="0" name=""/>
+                      <p:cNvPicPr/>
+                      <p:nvPr/>
+                    </p:nvPicPr>
+                    <p:blipFill>
+                      <a:blip r:embed="rId32"/>
+                      <a:stretch>
+                        <a:fillRect/>
+                      </a:stretch>
+                    </p:blipFill>
+                    <p:spPr>
+                      <a:xfrm>
+                        <a:off x="5105399" y="4409091"/>
+                        <a:ext cx="889050" cy="321897"/>
+                      </a:xfrm>
+                      <a:prstGeom prst="rect">
+                        <a:avLst/>
+                      </a:prstGeom>
+                    </p:spPr>
+                  </p:pic>
+                </p:oleObj>
+              </mc:Fallback>
+            </mc:AlternateContent>
+          </a:graphicData>
+        </a:graphic>
+      </p:graphicFrame>
+      <p:pic>
+        <p:nvPicPr>
+          <p:cNvPr id="38" name="图片 37">
+            <a:extLst>
+              <a:ext uri="{FF2B5EF4-FFF2-40B4-BE49-F238E27FC236}">
+                <a16:creationId xmlns:a16="http://schemas.microsoft.com/office/drawing/2014/main" id="{E15FA8FB-F9E5-4A34-9B17-3D68D8A45F86}"/>
+              </a:ext>
+            </a:extLst>
+          </p:cNvPr>
+          <p:cNvPicPr>
+            <a:picLocks noChangeAspect="1"/>
+          </p:cNvPicPr>
+          <p:nvPr/>
+        </p:nvPicPr>
+        <p:blipFill rotWithShape="1">
+          <a:blip r:embed="rId33"/>
+          <a:srcRect l="4811" t="1" b="-1"/>
+          <a:stretch/>
+        </p:blipFill>
+        <p:spPr>
+          <a:xfrm>
+            <a:off x="4087772" y="5152229"/>
+            <a:ext cx="373105" cy="167983"/>
+          </a:xfrm>
+          <a:prstGeom prst="rect">
+            <a:avLst/>
+          </a:prstGeom>
+        </p:spPr>
+      </p:pic>
+      <p:pic>
+        <p:nvPicPr>
+          <p:cNvPr id="39" name="图片 38">
+            <a:extLst>
+              <a:ext uri="{FF2B5EF4-FFF2-40B4-BE49-F238E27FC236}">
+                <a16:creationId xmlns:a16="http://schemas.microsoft.com/office/drawing/2014/main" id="{6C282582-3288-4573-ADAE-D109D6A06C4E}"/>
+              </a:ext>
+            </a:extLst>
+          </p:cNvPr>
+          <p:cNvPicPr>
+            <a:picLocks noChangeAspect="1"/>
+          </p:cNvPicPr>
+          <p:nvPr/>
+        </p:nvPicPr>
+        <p:blipFill>
+          <a:blip r:embed="rId34"/>
+          <a:stretch>
+            <a:fillRect/>
+          </a:stretch>
+        </p:blipFill>
+        <p:spPr>
+          <a:xfrm>
+            <a:off x="4446338" y="5101447"/>
+            <a:ext cx="459037" cy="353203"/>
+          </a:xfrm>
+          <a:prstGeom prst="rect">
+            <a:avLst/>
+          </a:prstGeom>
+        </p:spPr>
+      </p:pic>
+      <p:pic>
+        <p:nvPicPr>
+          <p:cNvPr id="40" name="图片 39">
+            <a:extLst>
+              <a:ext uri="{FF2B5EF4-FFF2-40B4-BE49-F238E27FC236}">
+                <a16:creationId xmlns:a16="http://schemas.microsoft.com/office/drawing/2014/main" id="{BDE15C8E-A486-4474-A2CC-E7B1DAAEE194}"/>
+              </a:ext>
+            </a:extLst>
+          </p:cNvPr>
+          <p:cNvPicPr>
+            <a:picLocks noChangeAspect="1"/>
+          </p:cNvPicPr>
+          <p:nvPr/>
+        </p:nvPicPr>
+        <p:blipFill>
+          <a:blip r:embed="rId35"/>
+          <a:stretch>
+            <a:fillRect/>
+          </a:stretch>
+        </p:blipFill>
+        <p:spPr>
+          <a:xfrm>
+            <a:off x="2143181" y="5198780"/>
+            <a:ext cx="177704" cy="220421"/>
+          </a:xfrm>
+          <a:prstGeom prst="rect">
+            <a:avLst/>
+          </a:prstGeom>
+        </p:spPr>
+      </p:pic>
+    </p:spTree>
+    <p:extLst>
+      <p:ext uri="{BB962C8B-B14F-4D97-AF65-F5344CB8AC3E}">
+        <p14:creationId xmlns:p14="http://schemas.microsoft.com/office/powerpoint/2010/main" val="2351464391"/>
       </p:ext>
     </p:extLst>
   </p:cSld>
